--- a/docs/CareerGraph_Project_Presentation.pptx
+++ b/docs/CareerGraph_Project_Presentation.pptx
@@ -3109,7 +3109,7 @@
         <p:spPr>
           <a:xfrm>
             <a:off x="0" y="0"/>
-            <a:ext cx="12191695" cy="109728"/>
+            <a:ext cx="12191695" cy="137160"/>
           </a:xfrm>
           <a:prstGeom prst="rect">
             <a:avLst/>
@@ -3151,8 +3151,8 @@
         </p:nvSpPr>
         <p:spPr>
           <a:xfrm>
-            <a:off x="914400" y="914400"/>
-            <a:ext cx="10362895" cy="1645920"/>
+            <a:off x="731520" y="502920"/>
+            <a:ext cx="10728655" cy="1828800"/>
           </a:xfrm>
           <a:prstGeom prst="rect">
             <a:avLst/>
@@ -3167,9 +3167,9 @@
           <a:p>
             <a:pPr>
               <a:spcAft>
-                <a:spcPts val="800"/>
-              </a:spcAft>
-              <a:defRPr sz="1100" b="1">
+                <a:spcPts val="600"/>
+              </a:spcAft>
+              <a:defRPr sz="1200" b="1">
                 <a:solidFill>
                   <a:srgbClr val="0284C7"/>
                 </a:solidFill>
@@ -3184,7 +3184,7 @@
               <a:spcAft>
                 <a:spcPts val="600"/>
               </a:spcAft>
-              <a:defRPr sz="3600" b="1">
+              <a:defRPr sz="4400" b="1">
                 <a:solidFill>
                   <a:srgbClr val="1E3A8A"/>
                 </a:solidFill>
@@ -3196,14 +3196,14 @@
           </a:p>
           <a:p>
             <a:pPr>
-              <a:defRPr sz="1400">
+              <a:defRPr sz="1550">
                 <a:solidFill>
                   <a:srgbClr val="334155"/>
                 </a:solidFill>
               </a:defRPr>
             </a:pPr>
             <a:r>
-              <a:t>Interactive &amp; Personalized IT Career Roadmap Platform with Prerequisite Locking and Skill Verification</a:t>
+              <a:t>Interactive &amp; Personalized IT Career Roadmap Platform with Topological Prerequisite Locking and Skill Verification</a:t>
             </a:r>
           </a:p>
         </p:txBody>
@@ -3216,8 +3216,8 @@
         </p:nvSpPr>
         <p:spPr>
           <a:xfrm>
-            <a:off x="914400" y="2926080"/>
-            <a:ext cx="10362895" cy="3108960"/>
+            <a:off x="731520" y="2514600"/>
+            <a:ext cx="10728655" cy="3931920"/>
           </a:xfrm>
           <a:prstGeom prst="roundRect">
             <a:avLst/>
@@ -3225,7 +3225,7 @@
           <a:solidFill>
             <a:srgbClr val="F8FAFC"/>
           </a:solidFill>
-          <a:ln w="12700">
+          <a:ln w="15240">
             <a:solidFill>
               <a:srgbClr val="CBD5E1"/>
             </a:solidFill>
@@ -3261,8 +3261,8 @@
         </p:nvSpPr>
         <p:spPr>
           <a:xfrm>
-            <a:off x="1188720" y="3108960"/>
-            <a:ext cx="9784080" cy="2743200"/>
+            <a:off x="1005840" y="2697480"/>
+            <a:ext cx="10180015" cy="3566160"/>
           </a:xfrm>
           <a:prstGeom prst="rect">
             <a:avLst/>
@@ -3277,7 +3277,82 @@
           <a:p>
             <a:pPr>
               <a:spcAft>
-                <a:spcPts val="1200"/>
+                <a:spcPts val="400"/>
+              </a:spcAft>
+              <a:defRPr sz="1500" b="1">
+                <a:solidFill>
+                  <a:srgbClr val="1E3A8A"/>
+                </a:solidFill>
+              </a:defRPr>
+            </a:pPr>
+            <a:r>
+              <a:t>CAPSTONE PROJECT REPORT  •  GROUP NO. 06</a:t>
+            </a:r>
+          </a:p>
+          <a:p>
+            <a:pPr>
+              <a:spcAft>
+                <a:spcPts val="1400"/>
+              </a:spcAft>
+              <a:defRPr sz="1250" b="1">
+                <a:solidFill>
+                  <a:srgbClr val="0284C7"/>
+                </a:solidFill>
+              </a:defRPr>
+            </a:pPr>
+            <a:r>
+              <a:t>Department of Computer Engineering / Information Technology  •  Academic Year: 2025 – 2026</a:t>
+            </a:r>
+          </a:p>
+          <a:p>
+            <a:pPr>
+              <a:spcAft>
+                <a:spcPts val="1000"/>
+              </a:spcAft>
+              <a:defRPr sz="1400" b="1">
+                <a:solidFill>
+                  <a:srgbClr val="0F172A"/>
+                </a:solidFill>
+              </a:defRPr>
+            </a:pPr>
+            <a:r>
+              <a:t>1. Shinde Piyush Anil                     4. Tumma Varsha Chandraprakash</a:t>
+            </a:r>
+          </a:p>
+          <a:p>
+            <a:pPr>
+              <a:spcAft>
+                <a:spcPts val="1000"/>
+              </a:spcAft>
+              <a:defRPr sz="1400" b="1">
+                <a:solidFill>
+                  <a:srgbClr val="0F172A"/>
+                </a:solidFill>
+              </a:defRPr>
+            </a:pPr>
+            <a:r>
+              <a:t>2. Surve Archit Milind                    5. Vichare Sanika Sanjay</a:t>
+            </a:r>
+          </a:p>
+          <a:p>
+            <a:pPr>
+              <a:spcAft>
+                <a:spcPts val="1000"/>
+              </a:spcAft>
+              <a:defRPr sz="1400" b="1">
+                <a:solidFill>
+                  <a:srgbClr val="0F172A"/>
+                </a:solidFill>
+              </a:defRPr>
+            </a:pPr>
+            <a:r>
+              <a:t>3. Telore Jagruti Kishore                 6. Waychal Sanyukta Amol</a:t>
+            </a:r>
+          </a:p>
+          <a:p>
+            <a:pPr>
+              <a:spcAft>
+                <a:spcPts val="400"/>
               </a:spcAft>
               <a:defRPr sz="1200" b="1">
                 <a:solidFill>
@@ -3286,64 +3361,19 @@
               </a:defRPr>
             </a:pPr>
             <a:r>
-              <a:t>GROUP NO. 06  |  PROJECT TEAM MEMBERS</a:t>
-            </a:r>
-          </a:p>
-          <a:p>
-            <a:pPr>
-              <a:spcAft>
-                <a:spcPts val="600"/>
-              </a:spcAft>
-              <a:defRPr sz="1100">
-                <a:solidFill>
-                  <a:srgbClr val="0F172A"/>
-                </a:solidFill>
-              </a:defRPr>
-            </a:pPr>
-            <a:r>
-              <a:t>1. Shinde Piyush Anil                      4. Tumma Varsha Chandraprakash</a:t>
-            </a:r>
-          </a:p>
-          <a:p>
-            <a:pPr>
-              <a:spcAft>
-                <a:spcPts val="600"/>
-              </a:spcAft>
-              <a:defRPr sz="1100">
-                <a:solidFill>
-                  <a:srgbClr val="0F172A"/>
-                </a:solidFill>
-              </a:defRPr>
-            </a:pPr>
-            <a:r>
-              <a:t>2. Surve Archit Milind                     5. Vichare Sanika Sanjay</a:t>
-            </a:r>
-          </a:p>
-          <a:p>
-            <a:pPr>
-              <a:spcAft>
-                <a:spcPts val="1600"/>
-              </a:spcAft>
-              <a:defRPr sz="1100">
-                <a:solidFill>
-                  <a:srgbClr val="0F172A"/>
-                </a:solidFill>
-              </a:defRPr>
-            </a:pPr>
-            <a:r>
-              <a:t>3. Telore Jagruti Kishore                  6. Waychal Sanyukta Amol</a:t>
-            </a:r>
-          </a:p>
-          <a:p>
-            <a:pPr>
-              <a:defRPr sz="1050" b="1">
-                <a:solidFill>
-                  <a:srgbClr val="0284C7"/>
-                </a:solidFill>
-              </a:defRPr>
-            </a:pPr>
-            <a:r>
-              <a:t>Department of Computer Engineering / IT  •  Academic Year: 2025 – 2026</a:t>
+              <a:t>Architecture: Vue 3 Single Page App  |  Node.js &amp; Express REST API  |  MongoDB Atlas Cloud</a:t>
+            </a:r>
+          </a:p>
+          <a:p>
+            <a:pPr>
+              <a:defRPr sz="1150">
+                <a:solidFill>
+                  <a:srgbClr val="334155"/>
+                </a:solidFill>
+              </a:defRPr>
+            </a:pPr>
+            <a:r>
+              <a:t>Key Innovations: Topological Prerequisite Gating  •  Universal Cross-Track Credit  •  Server-Graded Proof-of-Skill</a:t>
             </a:r>
           </a:p>
         </p:txBody>
@@ -3374,8 +3404,8 @@
         </p:nvSpPr>
         <p:spPr>
           <a:xfrm>
-            <a:off x="731520" y="365760"/>
-            <a:ext cx="10515600" cy="320040"/>
+            <a:off x="731520" y="274320"/>
+            <a:ext cx="10728655" cy="320040"/>
           </a:xfrm>
           <a:prstGeom prst="rect">
             <a:avLst/>
@@ -3389,7 +3419,7 @@
           <a:lstStyle/>
           <a:p>
             <a:pPr>
-              <a:defRPr sz="1000" b="1">
+              <a:defRPr sz="1100" b="1">
                 <a:solidFill>
                   <a:srgbClr val="0284C7"/>
                 </a:solidFill>
@@ -3409,8 +3439,8 @@
         </p:nvSpPr>
         <p:spPr>
           <a:xfrm>
-            <a:off x="731520" y="640080"/>
-            <a:ext cx="10515600" cy="502920"/>
+            <a:off x="731520" y="566928"/>
+            <a:ext cx="10728655" cy="502920"/>
           </a:xfrm>
           <a:prstGeom prst="rect">
             <a:avLst/>
@@ -3424,7 +3454,7 @@
           <a:lstStyle/>
           <a:p>
             <a:pPr>
-              <a:defRPr sz="2200" b="1">
+              <a:defRPr sz="2400" b="1">
                 <a:solidFill>
                   <a:srgbClr val="1E3A8A"/>
                 </a:solidFill>
@@ -3444,7 +3474,7 @@
         </p:nvSpPr>
         <p:spPr>
           <a:xfrm>
-            <a:off x="731520" y="1188720"/>
+            <a:off x="731520" y="1115568"/>
             <a:ext cx="10728655" cy="18288"/>
           </a:xfrm>
           <a:prstGeom prst="rect">
@@ -3489,7 +3519,7 @@
         </p:nvSpPr>
         <p:spPr>
           <a:xfrm>
-            <a:off x="731520" y="6400800"/>
+            <a:off x="731520" y="6446520"/>
             <a:ext cx="10728655" cy="274320"/>
           </a:xfrm>
           <a:prstGeom prst="rect">
@@ -3504,7 +3534,7 @@
           <a:lstStyle/>
           <a:p>
             <a:pPr>
-              <a:defRPr sz="900">
+              <a:defRPr sz="1000">
                 <a:solidFill>
                   <a:srgbClr val="94A3B8"/>
                 </a:solidFill>
@@ -3524,8 +3554,8 @@
         </p:nvSpPr>
         <p:spPr>
           <a:xfrm>
-            <a:off x="731520" y="1463040"/>
-            <a:ext cx="5120640" cy="2103120"/>
+            <a:off x="731520" y="1298448"/>
+            <a:ext cx="5212080" cy="2423160"/>
           </a:xfrm>
           <a:prstGeom prst="roundRect">
             <a:avLst/>
@@ -3533,7 +3563,7 @@
           <a:solidFill>
             <a:srgbClr val="F8FAFC"/>
           </a:solidFill>
-          <a:ln w="12700">
+          <a:ln w="15240">
             <a:solidFill>
               <a:srgbClr val="CBD5E1"/>
             </a:solidFill>
@@ -3569,8 +3599,8 @@
         </p:nvSpPr>
         <p:spPr>
           <a:xfrm>
-            <a:off x="960120" y="1645920"/>
-            <a:ext cx="4663440" cy="1737360"/>
+            <a:off x="960120" y="1463040"/>
+            <a:ext cx="4754880" cy="2093976"/>
           </a:xfrm>
           <a:prstGeom prst="rect">
             <a:avLst/>
@@ -3587,26 +3617,44 @@
               <a:spcAft>
                 <a:spcPts val="600"/>
               </a:spcAft>
-              <a:defRPr sz="1250" b="1">
+              <a:defRPr sz="1600" b="1">
                 <a:solidFill>
                   <a:srgbClr val="1E3A8A"/>
                 </a:solidFill>
               </a:defRPr>
             </a:pPr>
             <a:r>
-              <a:t>1. Dynamic SVG Bézier Canvas</a:t>
-            </a:r>
-          </a:p>
-          <a:p>
-            <a:pPr>
-              <a:defRPr sz="950">
+              <a:t>1. Dynamic SVG Bézier Canvas Engine</a:t>
+            </a:r>
+          </a:p>
+          <a:p>
+            <a:pPr>
+              <a:spcAft>
+                <a:spcPts val="400"/>
+              </a:spcAft>
+              <a:defRPr sz="1200">
                 <a:solidFill>
                   <a:srgbClr val="334155"/>
                 </a:solidFill>
               </a:defRPr>
             </a:pPr>
             <a:r>
-              <a:t>Organized into 3 phase columns. Calculates cubic Bézier curves connecting prerequisite nodes to dependents in real time with directional arrows. Full pan/drag and 50%–150% zoom HUD.</a:t>
+              <a:t>• Organizes skills into 3 responsive phase columns with real-time cubic Bézier curves and directional dependency arrows.</a:t>
+            </a:r>
+          </a:p>
+          <a:p>
+            <a:pPr>
+              <a:spcAft>
+                <a:spcPts val="400"/>
+              </a:spcAft>
+              <a:defRPr sz="1200">
+                <a:solidFill>
+                  <a:srgbClr val="334155"/>
+                </a:solidFill>
+              </a:defRPr>
+            </a:pPr>
+            <a:r>
+              <a:t>• Features smooth viewport pan/drag and a 50%–150% zoom control HUD with auto-reset.</a:t>
             </a:r>
           </a:p>
         </p:txBody>
@@ -3619,8 +3667,8 @@
         </p:nvSpPr>
         <p:spPr>
           <a:xfrm>
-            <a:off x="6217920" y="1463040"/>
-            <a:ext cx="5120640" cy="2103120"/>
+            <a:off x="6217920" y="1298448"/>
+            <a:ext cx="5212080" cy="2423160"/>
           </a:xfrm>
           <a:prstGeom prst="roundRect">
             <a:avLst/>
@@ -3628,7 +3676,7 @@
           <a:solidFill>
             <a:srgbClr val="F8FAFC"/>
           </a:solidFill>
-          <a:ln w="12700">
+          <a:ln w="15240">
             <a:solidFill>
               <a:srgbClr val="CBD5E1"/>
             </a:solidFill>
@@ -3664,8 +3712,8 @@
         </p:nvSpPr>
         <p:spPr>
           <a:xfrm>
-            <a:off x="6446520" y="1645920"/>
-            <a:ext cx="4663440" cy="1737360"/>
+            <a:off x="6446520" y="1463040"/>
+            <a:ext cx="4754880" cy="2093976"/>
           </a:xfrm>
           <a:prstGeom prst="rect">
             <a:avLst/>
@@ -3682,26 +3730,44 @@
               <a:spcAft>
                 <a:spcPts val="600"/>
               </a:spcAft>
-              <a:defRPr sz="1250" b="1">
+              <a:defRPr sz="1600" b="1">
                 <a:solidFill>
                   <a:srgbClr val="1E3A8A"/>
                 </a:solidFill>
               </a:defRPr>
             </a:pPr>
             <a:r>
-              <a:t>2. Single-Click Status Toggling</a:t>
-            </a:r>
-          </a:p>
-          <a:p>
-            <a:pPr>
-              <a:defRPr sz="950">
+              <a:t>2. 1-Click Interactive Status Toggling</a:t>
+            </a:r>
+          </a:p>
+          <a:p>
+            <a:pPr>
+              <a:spcAft>
+                <a:spcPts val="400"/>
+              </a:spcAft>
+              <a:defRPr sz="1200">
                 <a:solidFill>
                   <a:srgbClr val="334155"/>
                 </a:solidFill>
               </a:defRPr>
             </a:pPr>
             <a:r>
-              <a:t>Students can click directly on any node status badge to cycle through Not Started ➔ In Progress ➔ Completed in 1 second. Includes a right-click context menu for direct jumps.</a:t>
+              <a:t>• Learners click directly on status badges to cycle from 'Not Started' ➔ 'In Progress' ➔ 'Completed' in 1 second.</a:t>
+            </a:r>
+          </a:p>
+          <a:p>
+            <a:pPr>
+              <a:spcAft>
+                <a:spcPts val="400"/>
+              </a:spcAft>
+              <a:defRPr sz="1200">
+                <a:solidFill>
+                  <a:srgbClr val="334155"/>
+                </a:solidFill>
+              </a:defRPr>
+            </a:pPr>
+            <a:r>
+              <a:t>• Right-click context menu enables direct jumps to any status, instantly updating atomic database rollups.</a:t>
             </a:r>
           </a:p>
         </p:txBody>
@@ -3714,8 +3780,8 @@
         </p:nvSpPr>
         <p:spPr>
           <a:xfrm>
-            <a:off x="731520" y="3840480"/>
-            <a:ext cx="5120640" cy="2103120"/>
+            <a:off x="731520" y="3886200"/>
+            <a:ext cx="5212080" cy="2423160"/>
           </a:xfrm>
           <a:prstGeom prst="roundRect">
             <a:avLst/>
@@ -3723,7 +3789,7 @@
           <a:solidFill>
             <a:srgbClr val="F8FAFC"/>
           </a:solidFill>
-          <a:ln w="12700">
+          <a:ln w="15240">
             <a:solidFill>
               <a:srgbClr val="CBD5E1"/>
             </a:solidFill>
@@ -3759,8 +3825,8 @@
         </p:nvSpPr>
         <p:spPr>
           <a:xfrm>
-            <a:off x="960120" y="4023360"/>
-            <a:ext cx="4663440" cy="1737360"/>
+            <a:off x="960120" y="4050792"/>
+            <a:ext cx="4754880" cy="2093976"/>
           </a:xfrm>
           <a:prstGeom prst="rect">
             <a:avLst/>
@@ -3777,7 +3843,7 @@
               <a:spcAft>
                 <a:spcPts val="600"/>
               </a:spcAft>
-              <a:defRPr sz="1250" b="1">
+              <a:defRPr sz="1600" b="1">
                 <a:solidFill>
                   <a:srgbClr val="1E3A8A"/>
                 </a:solidFill>
@@ -3789,14 +3855,32 @@
           </a:p>
           <a:p>
             <a:pPr>
-              <a:defRPr sz="950">
+              <a:spcAft>
+                <a:spcPts val="400"/>
+              </a:spcAft>
+              <a:defRPr sz="1200">
                 <a:solidFill>
                   <a:srgbClr val="334155"/>
                 </a:solidFill>
               </a:defRPr>
             </a:pPr>
             <a:r>
-              <a:t>Clicking any node slides open an in-canvas preview drawer without leaving the roadmap. Displays 'Why It Matters', curated documentation, video tutorials, and interactive lesson checklists.</a:t>
+              <a:t>• Non-disruptive drawer slides out directly within the roadmap view without losing canvas state or context.</a:t>
+            </a:r>
+          </a:p>
+          <a:p>
+            <a:pPr>
+              <a:spcAft>
+                <a:spcPts val="400"/>
+              </a:spcAft>
+              <a:defRPr sz="1200">
+                <a:solidFill>
+                  <a:srgbClr val="334155"/>
+                </a:solidFill>
+              </a:defRPr>
+            </a:pPr>
+            <a:r>
+              <a:t>• Provides 'Why It Matters' summaries, official documentation links, video tutorials, and interactive lesson checklists.</a:t>
             </a:r>
           </a:p>
         </p:txBody>
@@ -3809,8 +3893,8 @@
         </p:nvSpPr>
         <p:spPr>
           <a:xfrm>
-            <a:off x="6217920" y="3840480"/>
-            <a:ext cx="5120640" cy="2103120"/>
+            <a:off x="6217920" y="3886200"/>
+            <a:ext cx="5212080" cy="2423160"/>
           </a:xfrm>
           <a:prstGeom prst="roundRect">
             <a:avLst/>
@@ -3818,7 +3902,7 @@
           <a:solidFill>
             <a:srgbClr val="F8FAFC"/>
           </a:solidFill>
-          <a:ln w="12700">
+          <a:ln w="15240">
             <a:solidFill>
               <a:srgbClr val="CBD5E1"/>
             </a:solidFill>
@@ -3854,8 +3938,8 @@
         </p:nvSpPr>
         <p:spPr>
           <a:xfrm>
-            <a:off x="6446520" y="4023360"/>
-            <a:ext cx="4663440" cy="1737360"/>
+            <a:off x="6446520" y="4050792"/>
+            <a:ext cx="4754880" cy="2093976"/>
           </a:xfrm>
           <a:prstGeom prst="rect">
             <a:avLst/>
@@ -3872,26 +3956,44 @@
               <a:spcAft>
                 <a:spcPts val="600"/>
               </a:spcAft>
-              <a:defRPr sz="1250" b="1">
+              <a:defRPr sz="1600" b="1">
                 <a:solidFill>
                   <a:srgbClr val="1E3A8A"/>
                 </a:solidFill>
               </a:defRPr>
             </a:pPr>
             <a:r>
-              <a:t>4. In-Place Career Switcher Modal</a:t>
-            </a:r>
-          </a:p>
-          <a:p>
-            <a:pPr>
-              <a:defRPr sz="950">
+              <a:t>4. Instant Career Switcher Modal</a:t>
+            </a:r>
+          </a:p>
+          <a:p>
+            <a:pPr>
+              <a:spcAft>
+                <a:spcPts val="400"/>
+              </a:spcAft>
+              <a:defRPr sz="1200">
                 <a:solidFill>
                   <a:srgbClr val="334155"/>
                 </a:solidFill>
               </a:defRPr>
             </a:pPr>
             <a:r>
-              <a:t>Allows switching target career tracks instantly with real-time stream (CS, IT, AI/DS) and degree (B.Tech, BCA, B.Sc) filtering while preserving completed progress.</a:t>
+              <a:t>• Instant switching across 6 target career tracks with real-time stream (CS, IT, AI/DS) and degree (B.Tech, BCA, B.Sc) filtering.</a:t>
+            </a:r>
+          </a:p>
+          <a:p>
+            <a:pPr>
+              <a:spcAft>
+                <a:spcPts val="400"/>
+              </a:spcAft>
+              <a:defRPr sz="1200">
+                <a:solidFill>
+                  <a:srgbClr val="334155"/>
+                </a:solidFill>
+              </a:defRPr>
+            </a:pPr>
+            <a:r>
+              <a:t>• Updates the visual roadmap canvas in place while preserving all mastered competencies.</a:t>
             </a:r>
           </a:p>
         </p:txBody>
@@ -3922,8 +4024,8 @@
         </p:nvSpPr>
         <p:spPr>
           <a:xfrm>
-            <a:off x="731520" y="365760"/>
-            <a:ext cx="10515600" cy="320040"/>
+            <a:off x="731520" y="274320"/>
+            <a:ext cx="10728655" cy="320040"/>
           </a:xfrm>
           <a:prstGeom prst="rect">
             <a:avLst/>
@@ -3937,14 +4039,14 @@
           <a:lstStyle/>
           <a:p>
             <a:pPr>
-              <a:defRPr sz="1000" b="1">
+              <a:defRPr sz="1100" b="1">
                 <a:solidFill>
                   <a:srgbClr val="0284C7"/>
                 </a:solidFill>
               </a:defRPr>
             </a:pPr>
             <a:r>
-              <a:t>QUALITY ASSURANCE &amp; RESULTS</a:t>
+              <a:t>CRITICAL EVALUATION &amp; COMPARISON</a:t>
             </a:r>
           </a:p>
         </p:txBody>
@@ -3957,8 +4059,8 @@
         </p:nvSpPr>
         <p:spPr>
           <a:xfrm>
-            <a:off x="731520" y="640080"/>
-            <a:ext cx="10515600" cy="502920"/>
+            <a:off x="731520" y="566928"/>
+            <a:ext cx="10728655" cy="502920"/>
           </a:xfrm>
           <a:prstGeom prst="rect">
             <a:avLst/>
@@ -3972,14 +4074,14 @@
           <a:lstStyle/>
           <a:p>
             <a:pPr>
-              <a:defRPr sz="2200" b="1">
+              <a:defRPr sz="2400" b="1">
                 <a:solidFill>
                   <a:srgbClr val="1E3A8A"/>
                 </a:solidFill>
               </a:defRPr>
             </a:pPr>
             <a:r>
-              <a:t>System Testing &amp; Functional Validation</a:t>
+              <a:t>System Advantages &amp; Technical Limitations</a:t>
             </a:r>
           </a:p>
         </p:txBody>
@@ -3992,7 +4094,7 @@
         </p:nvSpPr>
         <p:spPr>
           <a:xfrm>
-            <a:off x="731520" y="1188720"/>
+            <a:off x="731520" y="1115568"/>
             <a:ext cx="10728655" cy="18288"/>
           </a:xfrm>
           <a:prstGeom prst="rect">
@@ -4037,7 +4139,7 @@
         </p:nvSpPr>
         <p:spPr>
           <a:xfrm>
-            <a:off x="731520" y="6400800"/>
+            <a:off x="731520" y="6446520"/>
             <a:ext cx="10728655" cy="274320"/>
           </a:xfrm>
           <a:prstGeom prst="rect">
@@ -4052,7 +4154,7 @@
           <a:lstStyle/>
           <a:p>
             <a:pPr>
-              <a:defRPr sz="900">
+              <a:defRPr sz="1000">
                 <a:solidFill>
                   <a:srgbClr val="94A3B8"/>
                 </a:solidFill>
@@ -4064,786 +4166,472 @@
           </a:p>
         </p:txBody>
       </p:sp>
-      <p:graphicFrame>
-        <p:nvGraphicFramePr>
-          <p:cNvPr id="6" name="Table 5"/>
-          <p:cNvGraphicFramePr>
-            <a:graphicFrameLocks noGrp="1"/>
-          </p:cNvGraphicFramePr>
-          <p:nvPr/>
-        </p:nvGraphicFramePr>
-        <p:xfrm>
-          <a:off x="731520" y="1463040"/>
-          <a:ext cx="10728655" cy="4389120"/>
-        </p:xfrm>
-        <a:graphic>
-          <a:graphicData uri="http://schemas.openxmlformats.org/drawingml/2006/table">
-            <a:tbl>
-              <a:tblPr firstRow="1" bandRow="1">
-                <a:tableStyleId>{5C22544A-7EE6-4342-B048-85BDC9FD1C3A}</a:tableStyleId>
-              </a:tblPr>
-              <a:tblGrid>
-                <a:gridCol w="1097280"/>
-                <a:gridCol w="2926080"/>
-                <a:gridCol w="5425135"/>
-                <a:gridCol w="1280160"/>
-              </a:tblGrid>
-              <a:tr h="548640">
-                <a:tc>
-                  <a:txBody>
-                    <a:bodyPr/>
-                    <a:lstStyle/>
-                    <a:p>
-                      <a:pPr algn="ctr">
-                        <a:defRPr b="1" sz="1050">
-                          <a:solidFill>
-                            <a:srgbClr val="FFFFFF"/>
-                          </a:solidFill>
-                        </a:defRPr>
-                      </a:pPr>
-                      <a:r>
-                        <a:t>Test ID</a:t>
-                      </a:r>
-                    </a:p>
-                  </a:txBody>
-                  <a:tcPr>
-                    <a:solidFill>
-                      <a:srgbClr val="1E3A8A"/>
-                    </a:solidFill>
-                  </a:tcPr>
-                </a:tc>
-                <a:tc>
-                  <a:txBody>
-                    <a:bodyPr/>
-                    <a:lstStyle/>
-                    <a:p>
-                      <a:pPr algn="ctr">
-                        <a:defRPr b="1" sz="1050">
-                          <a:solidFill>
-                            <a:srgbClr val="FFFFFF"/>
-                          </a:solidFill>
-                        </a:defRPr>
-                      </a:pPr>
-                      <a:r>
-                        <a:t>Test Scenario</a:t>
-                      </a:r>
-                    </a:p>
-                  </a:txBody>
-                  <a:tcPr>
-                    <a:solidFill>
-                      <a:srgbClr val="1E3A8A"/>
-                    </a:solidFill>
-                  </a:tcPr>
-                </a:tc>
-                <a:tc>
-                  <a:txBody>
-                    <a:bodyPr/>
-                    <a:lstStyle/>
-                    <a:p>
-                      <a:pPr algn="ctr">
-                        <a:defRPr b="1" sz="1050">
-                          <a:solidFill>
-                            <a:srgbClr val="FFFFFF"/>
-                          </a:solidFill>
-                        </a:defRPr>
-                      </a:pPr>
-                      <a:r>
-                        <a:t>Expected System Behavior</a:t>
-                      </a:r>
-                    </a:p>
-                  </a:txBody>
-                  <a:tcPr>
-                    <a:solidFill>
-                      <a:srgbClr val="1E3A8A"/>
-                    </a:solidFill>
-                  </a:tcPr>
-                </a:tc>
-                <a:tc>
-                  <a:txBody>
-                    <a:bodyPr/>
-                    <a:lstStyle/>
-                    <a:p>
-                      <a:pPr algn="ctr">
-                        <a:defRPr b="1" sz="1050">
-                          <a:solidFill>
-                            <a:srgbClr val="FFFFFF"/>
-                          </a:solidFill>
-                        </a:defRPr>
-                      </a:pPr>
-                      <a:r>
-                        <a:t>Result</a:t>
-                      </a:r>
-                    </a:p>
-                  </a:txBody>
-                  <a:tcPr>
-                    <a:solidFill>
-                      <a:srgbClr val="1E3A8A"/>
-                    </a:solidFill>
-                  </a:tcPr>
-                </a:tc>
-              </a:tr>
-              <a:tr h="548640">
-                <a:tc>
-                  <a:txBody>
-                    <a:bodyPr/>
-                    <a:lstStyle/>
-                    <a:p>
-                      <a:pPr algn="ctr">
-                        <a:defRPr sz="950" b="1">
-                          <a:solidFill>
-                            <a:srgbClr val="0F172A"/>
-                          </a:solidFill>
-                        </a:defRPr>
-                      </a:pPr>
-                      <a:r>
-                        <a:t>TC-01</a:t>
-                      </a:r>
-                    </a:p>
-                  </a:txBody>
-                  <a:tcPr>
-                    <a:solidFill>
-                      <a:srgbClr val="F8FAFC"/>
-                    </a:solidFill>
-                  </a:tcPr>
-                </a:tc>
-                <a:tc>
-                  <a:txBody>
-                    <a:bodyPr/>
-                    <a:lstStyle/>
-                    <a:p>
-                      <a:pPr>
-                        <a:defRPr sz="950">
-                          <a:solidFill>
-                            <a:srgbClr val="0F172A"/>
-                          </a:solidFill>
-                        </a:defRPr>
-                      </a:pPr>
-                      <a:r>
-                        <a:t>User Auth &amp; Bcrypt Security</a:t>
-                      </a:r>
-                    </a:p>
-                  </a:txBody>
-                  <a:tcPr>
-                    <a:solidFill>
-                      <a:srgbClr val="F8FAFC"/>
-                    </a:solidFill>
-                  </a:tcPr>
-                </a:tc>
-                <a:tc>
-                  <a:txBody>
-                    <a:bodyPr/>
-                    <a:lstStyle/>
-                    <a:p>
-                      <a:pPr>
-                        <a:defRPr sz="950">
-                          <a:solidFill>
-                            <a:srgbClr val="0F172A"/>
-                          </a:solidFill>
-                        </a:defRPr>
-                      </a:pPr>
-                      <a:r>
-                        <a:t>Password hashed with 10 salt rounds; stateless JWT issued on login</a:t>
-                      </a:r>
-                    </a:p>
-                  </a:txBody>
-                  <a:tcPr>
-                    <a:solidFill>
-                      <a:srgbClr val="F8FAFC"/>
-                    </a:solidFill>
-                  </a:tcPr>
-                </a:tc>
-                <a:tc>
-                  <a:txBody>
-                    <a:bodyPr/>
-                    <a:lstStyle/>
-                    <a:p>
-                      <a:pPr algn="ctr">
-                        <a:defRPr sz="950" b="1">
-                          <a:solidFill>
-                            <a:srgbClr val="166534"/>
-                          </a:solidFill>
-                        </a:defRPr>
-                      </a:pPr>
-                      <a:r>
-                        <a:t>PASS</a:t>
-                      </a:r>
-                    </a:p>
-                  </a:txBody>
-                  <a:tcPr>
-                    <a:solidFill>
-                      <a:srgbClr val="F8FAFC"/>
-                    </a:solidFill>
-                  </a:tcPr>
-                </a:tc>
-              </a:tr>
-              <a:tr h="548640">
-                <a:tc>
-                  <a:txBody>
-                    <a:bodyPr/>
-                    <a:lstStyle/>
-                    <a:p>
-                      <a:pPr algn="ctr">
-                        <a:defRPr sz="950" b="1">
-                          <a:solidFill>
-                            <a:srgbClr val="0F172A"/>
-                          </a:solidFill>
-                        </a:defRPr>
-                      </a:pPr>
-                      <a:r>
-                        <a:t>TC-02</a:t>
-                      </a:r>
-                    </a:p>
-                  </a:txBody>
-                  <a:tcPr>
-                    <a:solidFill>
-                      <a:srgbClr val="FFFFFF"/>
-                    </a:solidFill>
-                  </a:tcPr>
-                </a:tc>
-                <a:tc>
-                  <a:txBody>
-                    <a:bodyPr/>
-                    <a:lstStyle/>
-                    <a:p>
-                      <a:pPr>
-                        <a:defRPr sz="950">
-                          <a:solidFill>
-                            <a:srgbClr val="0F172A"/>
-                          </a:solidFill>
-                        </a:defRPr>
-                      </a:pPr>
-                      <a:r>
-                        <a:t>Onboarding Gap Calculation</a:t>
-                      </a:r>
-                    </a:p>
-                  </a:txBody>
-                  <a:tcPr>
-                    <a:solidFill>
-                      <a:srgbClr val="FFFFFF"/>
-                    </a:solidFill>
-                  </a:tcPr>
-                </a:tc>
-                <a:tc>
-                  <a:txBody>
-                    <a:bodyPr/>
-                    <a:lstStyle/>
-                    <a:p>
-                      <a:pPr>
-                        <a:defRPr sz="950">
-                          <a:solidFill>
-                            <a:srgbClr val="0F172A"/>
-                          </a:solidFill>
-                        </a:defRPr>
-                      </a:pPr>
-                      <a:r>
-                        <a:t>Baseline self-ratings properly map to completed / in-progress states</a:t>
-                      </a:r>
-                    </a:p>
-                  </a:txBody>
-                  <a:tcPr>
-                    <a:solidFill>
-                      <a:srgbClr val="FFFFFF"/>
-                    </a:solidFill>
-                  </a:tcPr>
-                </a:tc>
-                <a:tc>
-                  <a:txBody>
-                    <a:bodyPr/>
-                    <a:lstStyle/>
-                    <a:p>
-                      <a:pPr algn="ctr">
-                        <a:defRPr sz="950" b="1">
-                          <a:solidFill>
-                            <a:srgbClr val="166534"/>
-                          </a:solidFill>
-                        </a:defRPr>
-                      </a:pPr>
-                      <a:r>
-                        <a:t>PASS</a:t>
-                      </a:r>
-                    </a:p>
-                  </a:txBody>
-                  <a:tcPr>
-                    <a:solidFill>
-                      <a:srgbClr val="FFFFFF"/>
-                    </a:solidFill>
-                  </a:tcPr>
-                </a:tc>
-              </a:tr>
-              <a:tr h="548640">
-                <a:tc>
-                  <a:txBody>
-                    <a:bodyPr/>
-                    <a:lstStyle/>
-                    <a:p>
-                      <a:pPr algn="ctr">
-                        <a:defRPr sz="950" b="1">
-                          <a:solidFill>
-                            <a:srgbClr val="0F172A"/>
-                          </a:solidFill>
-                        </a:defRPr>
-                      </a:pPr>
-                      <a:r>
-                        <a:t>TC-03</a:t>
-                      </a:r>
-                    </a:p>
-                  </a:txBody>
-                  <a:tcPr>
-                    <a:solidFill>
-                      <a:srgbClr val="F8FAFC"/>
-                    </a:solidFill>
-                  </a:tcPr>
-                </a:tc>
-                <a:tc>
-                  <a:txBody>
-                    <a:bodyPr/>
-                    <a:lstStyle/>
-                    <a:p>
-                      <a:pPr>
-                        <a:defRPr sz="950">
-                          <a:solidFill>
-                            <a:srgbClr val="0F172A"/>
-                          </a:solidFill>
-                        </a:defRPr>
-                      </a:pPr>
-                      <a:r>
-                        <a:t>Topological Prerequisite Lock</a:t>
-                      </a:r>
-                    </a:p>
-                  </a:txBody>
-                  <a:tcPr>
-                    <a:solidFill>
-                      <a:srgbClr val="F8FAFC"/>
-                    </a:solidFill>
-                  </a:tcPr>
-                </a:tc>
-                <a:tc>
-                  <a:txBody>
-                    <a:bodyPr/>
-                    <a:lstStyle/>
-                    <a:p>
-                      <a:pPr>
-                        <a:defRPr sz="950">
-                          <a:solidFill>
-                            <a:srgbClr val="0F172A"/>
-                          </a:solidFill>
-                        </a:defRPr>
-                      </a:pPr>
-                      <a:r>
-                        <a:t>Phase 2 &amp; Phase 3 remain locked until preceding phase skills complete</a:t>
-                      </a:r>
-                    </a:p>
-                  </a:txBody>
-                  <a:tcPr>
-                    <a:solidFill>
-                      <a:srgbClr val="F8FAFC"/>
-                    </a:solidFill>
-                  </a:tcPr>
-                </a:tc>
-                <a:tc>
-                  <a:txBody>
-                    <a:bodyPr/>
-                    <a:lstStyle/>
-                    <a:p>
-                      <a:pPr algn="ctr">
-                        <a:defRPr sz="950" b="1">
-                          <a:solidFill>
-                            <a:srgbClr val="166534"/>
-                          </a:solidFill>
-                        </a:defRPr>
-                      </a:pPr>
-                      <a:r>
-                        <a:t>PASS</a:t>
-                      </a:r>
-                    </a:p>
-                  </a:txBody>
-                  <a:tcPr>
-                    <a:solidFill>
-                      <a:srgbClr val="F8FAFC"/>
-                    </a:solidFill>
-                  </a:tcPr>
-                </a:tc>
-              </a:tr>
-              <a:tr h="548640">
-                <a:tc>
-                  <a:txBody>
-                    <a:bodyPr/>
-                    <a:lstStyle/>
-                    <a:p>
-                      <a:pPr algn="ctr">
-                        <a:defRPr sz="950" b="1">
-                          <a:solidFill>
-                            <a:srgbClr val="0F172A"/>
-                          </a:solidFill>
-                        </a:defRPr>
-                      </a:pPr>
-                      <a:r>
-                        <a:t>TC-04</a:t>
-                      </a:r>
-                    </a:p>
-                  </a:txBody>
-                  <a:tcPr>
-                    <a:solidFill>
-                      <a:srgbClr val="FFFFFF"/>
-                    </a:solidFill>
-                  </a:tcPr>
-                </a:tc>
-                <a:tc>
-                  <a:txBody>
-                    <a:bodyPr/>
-                    <a:lstStyle/>
-                    <a:p>
-                      <a:pPr>
-                        <a:defRPr sz="950">
-                          <a:solidFill>
-                            <a:srgbClr val="0F172A"/>
-                          </a:solidFill>
-                        </a:defRPr>
-                      </a:pPr>
-                      <a:r>
-                        <a:t>1-Click Canvas Status Toggle</a:t>
-                      </a:r>
-                    </a:p>
-                  </a:txBody>
-                  <a:tcPr>
-                    <a:solidFill>
-                      <a:srgbClr val="FFFFFF"/>
-                    </a:solidFill>
-                  </a:tcPr>
-                </a:tc>
-                <a:tc>
-                  <a:txBody>
-                    <a:bodyPr/>
-                    <a:lstStyle/>
-                    <a:p>
-                      <a:pPr>
-                        <a:defRPr sz="950">
-                          <a:solidFill>
-                            <a:srgbClr val="0F172A"/>
-                          </a:solidFill>
-                        </a:defRPr>
-                      </a:pPr>
-                      <a:r>
-                        <a:t>Node badge toggle triggers optimistic UI and atomic database rollup</a:t>
-                      </a:r>
-                    </a:p>
-                  </a:txBody>
-                  <a:tcPr>
-                    <a:solidFill>
-                      <a:srgbClr val="FFFFFF"/>
-                    </a:solidFill>
-                  </a:tcPr>
-                </a:tc>
-                <a:tc>
-                  <a:txBody>
-                    <a:bodyPr/>
-                    <a:lstStyle/>
-                    <a:p>
-                      <a:pPr algn="ctr">
-                        <a:defRPr sz="950" b="1">
-                          <a:solidFill>
-                            <a:srgbClr val="166534"/>
-                          </a:solidFill>
-                        </a:defRPr>
-                      </a:pPr>
-                      <a:r>
-                        <a:t>PASS</a:t>
-                      </a:r>
-                    </a:p>
-                  </a:txBody>
-                  <a:tcPr>
-                    <a:solidFill>
-                      <a:srgbClr val="FFFFFF"/>
-                    </a:solidFill>
-                  </a:tcPr>
-                </a:tc>
-              </a:tr>
-              <a:tr h="548640">
-                <a:tc>
-                  <a:txBody>
-                    <a:bodyPr/>
-                    <a:lstStyle/>
-                    <a:p>
-                      <a:pPr algn="ctr">
-                        <a:defRPr sz="950" b="1">
-                          <a:solidFill>
-                            <a:srgbClr val="0F172A"/>
-                          </a:solidFill>
-                        </a:defRPr>
-                      </a:pPr>
-                      <a:r>
-                        <a:t>TC-05</a:t>
-                      </a:r>
-                    </a:p>
-                  </a:txBody>
-                  <a:tcPr>
-                    <a:solidFill>
-                      <a:srgbClr val="F8FAFC"/>
-                    </a:solidFill>
-                  </a:tcPr>
-                </a:tc>
-                <a:tc>
-                  <a:txBody>
-                    <a:bodyPr/>
-                    <a:lstStyle/>
-                    <a:p>
-                      <a:pPr>
-                        <a:defRPr sz="950">
-                          <a:solidFill>
-                            <a:srgbClr val="0F172A"/>
-                          </a:solidFill>
-                        </a:defRPr>
-                      </a:pPr>
-                      <a:r>
-                        <a:t>Quiz Payload Sanitization</a:t>
-                      </a:r>
-                    </a:p>
-                  </a:txBody>
-                  <a:tcPr>
-                    <a:solidFill>
-                      <a:srgbClr val="F8FAFC"/>
-                    </a:solidFill>
-                  </a:tcPr>
-                </a:tc>
-                <a:tc>
-                  <a:txBody>
-                    <a:bodyPr/>
-                    <a:lstStyle/>
-                    <a:p>
-                      <a:pPr>
-                        <a:defRPr sz="950">
-                          <a:solidFill>
-                            <a:srgbClr val="0F172A"/>
-                          </a:solidFill>
-                        </a:defRPr>
-                      </a:pPr>
-                      <a:r>
-                        <a:t>correctIndex and explanation stripped from GET requests in DevTools</a:t>
-                      </a:r>
-                    </a:p>
-                  </a:txBody>
-                  <a:tcPr>
-                    <a:solidFill>
-                      <a:srgbClr val="F8FAFC"/>
-                    </a:solidFill>
-                  </a:tcPr>
-                </a:tc>
-                <a:tc>
-                  <a:txBody>
-                    <a:bodyPr/>
-                    <a:lstStyle/>
-                    <a:p>
-                      <a:pPr algn="ctr">
-                        <a:defRPr sz="950" b="1">
-                          <a:solidFill>
-                            <a:srgbClr val="166534"/>
-                          </a:solidFill>
-                        </a:defRPr>
-                      </a:pPr>
-                      <a:r>
-                        <a:t>PASS</a:t>
-                      </a:r>
-                    </a:p>
-                  </a:txBody>
-                  <a:tcPr>
-                    <a:solidFill>
-                      <a:srgbClr val="F8FAFC"/>
-                    </a:solidFill>
-                  </a:tcPr>
-                </a:tc>
-              </a:tr>
-              <a:tr h="548640">
-                <a:tc>
-                  <a:txBody>
-                    <a:bodyPr/>
-                    <a:lstStyle/>
-                    <a:p>
-                      <a:pPr algn="ctr">
-                        <a:defRPr sz="950" b="1">
-                          <a:solidFill>
-                            <a:srgbClr val="0F172A"/>
-                          </a:solidFill>
-                        </a:defRPr>
-                      </a:pPr>
-                      <a:r>
-                        <a:t>TC-06</a:t>
-                      </a:r>
-                    </a:p>
-                  </a:txBody>
-                  <a:tcPr>
-                    <a:solidFill>
-                      <a:srgbClr val="FFFFFF"/>
-                    </a:solidFill>
-                  </a:tcPr>
-                </a:tc>
-                <a:tc>
-                  <a:txBody>
-                    <a:bodyPr/>
-                    <a:lstStyle/>
-                    <a:p>
-                      <a:pPr>
-                        <a:defRPr sz="950">
-                          <a:solidFill>
-                            <a:srgbClr val="0F172A"/>
-                          </a:solidFill>
-                        </a:defRPr>
-                      </a:pPr>
-                      <a:r>
-                        <a:t>Server-Side Quiz Verification</a:t>
-                      </a:r>
-                    </a:p>
-                  </a:txBody>
-                  <a:tcPr>
-                    <a:solidFill>
-                      <a:srgbClr val="FFFFFF"/>
-                    </a:solidFill>
-                  </a:tcPr>
-                </a:tc>
-                <a:tc>
-                  <a:txBody>
-                    <a:bodyPr/>
-                    <a:lstStyle/>
-                    <a:p>
-                      <a:pPr>
-                        <a:defRPr sz="950">
-                          <a:solidFill>
-                            <a:srgbClr val="0F172A"/>
-                          </a:solidFill>
-                        </a:defRPr>
-                      </a:pPr>
-                      <a:r>
-                        <a:t>Score &gt;= 2/3 awards Verified Badge &amp; elevates user skill profile</a:t>
-                      </a:r>
-                    </a:p>
-                  </a:txBody>
-                  <a:tcPr>
-                    <a:solidFill>
-                      <a:srgbClr val="FFFFFF"/>
-                    </a:solidFill>
-                  </a:tcPr>
-                </a:tc>
-                <a:tc>
-                  <a:txBody>
-                    <a:bodyPr/>
-                    <a:lstStyle/>
-                    <a:p>
-                      <a:pPr algn="ctr">
-                        <a:defRPr sz="950" b="1">
-                          <a:solidFill>
-                            <a:srgbClr val="166534"/>
-                          </a:solidFill>
-                        </a:defRPr>
-                      </a:pPr>
-                      <a:r>
-                        <a:t>PASS</a:t>
-                      </a:r>
-                    </a:p>
-                  </a:txBody>
-                  <a:tcPr>
-                    <a:solidFill>
-                      <a:srgbClr val="FFFFFF"/>
-                    </a:solidFill>
-                  </a:tcPr>
-                </a:tc>
-              </a:tr>
-              <a:tr h="548640">
-                <a:tc>
-                  <a:txBody>
-                    <a:bodyPr/>
-                    <a:lstStyle/>
-                    <a:p>
-                      <a:pPr algn="ctr">
-                        <a:defRPr sz="950" b="1">
-                          <a:solidFill>
-                            <a:srgbClr val="0F172A"/>
-                          </a:solidFill>
-                        </a:defRPr>
-                      </a:pPr>
-                      <a:r>
-                        <a:t>TC-07</a:t>
-                      </a:r>
-                    </a:p>
-                  </a:txBody>
-                  <a:tcPr>
-                    <a:solidFill>
-                      <a:srgbClr val="F8FAFC"/>
-                    </a:solidFill>
-                  </a:tcPr>
-                </a:tc>
-                <a:tc>
-                  <a:txBody>
-                    <a:bodyPr/>
-                    <a:lstStyle/>
-                    <a:p>
-                      <a:pPr>
-                        <a:defRPr sz="950">
-                          <a:solidFill>
-                            <a:srgbClr val="0F172A"/>
-                          </a:solidFill>
-                        </a:defRPr>
-                      </a:pPr>
-                      <a:r>
-                        <a:t>Universal Cross-Track Credit</a:t>
-                      </a:r>
-                    </a:p>
-                  </a:txBody>
-                  <a:tcPr>
-                    <a:solidFill>
-                      <a:srgbClr val="F8FAFC"/>
-                    </a:solidFill>
-                  </a:tcPr>
-                </a:tc>
-                <a:tc>
-                  <a:txBody>
-                    <a:bodyPr/>
-                    <a:lstStyle/>
-                    <a:p>
-                      <a:pPr>
-                        <a:defRPr sz="950">
-                          <a:solidFill>
-                            <a:srgbClr val="0F172A"/>
-                          </a:solidFill>
-                        </a:defRPr>
-                      </a:pPr>
-                      <a:r>
-                        <a:t>Completed skills in Full Stack reflect automatically in DevOps track</a:t>
-                      </a:r>
-                    </a:p>
-                  </a:txBody>
-                  <a:tcPr>
-                    <a:solidFill>
-                      <a:srgbClr val="F8FAFC"/>
-                    </a:solidFill>
-                  </a:tcPr>
-                </a:tc>
-                <a:tc>
-                  <a:txBody>
-                    <a:bodyPr/>
-                    <a:lstStyle/>
-                    <a:p>
-                      <a:pPr algn="ctr">
-                        <a:defRPr sz="950" b="1">
-                          <a:solidFill>
-                            <a:srgbClr val="166534"/>
-                          </a:solidFill>
-                        </a:defRPr>
-                      </a:pPr>
-                      <a:r>
-                        <a:t>PASS</a:t>
-                      </a:r>
-                    </a:p>
-                  </a:txBody>
-                  <a:tcPr>
-                    <a:solidFill>
-                      <a:srgbClr val="F8FAFC"/>
-                    </a:solidFill>
-                  </a:tcPr>
-                </a:tc>
-              </a:tr>
-            </a:tbl>
-          </a:graphicData>
-        </a:graphic>
-      </p:graphicFrame>
+      <p:sp>
+        <p:nvSpPr>
+          <p:cNvPr id="6" name="Rounded Rectangle 5"/>
+          <p:cNvSpPr/>
+          <p:nvPr/>
+        </p:nvSpPr>
+        <p:spPr>
+          <a:xfrm>
+            <a:off x="731520" y="1298448"/>
+            <a:ext cx="5212080" cy="4983480"/>
+          </a:xfrm>
+          <a:prstGeom prst="roundRect">
+            <a:avLst/>
+          </a:prstGeom>
+          <a:solidFill>
+            <a:srgbClr val="F8FAFC"/>
+          </a:solidFill>
+          <a:ln w="15240">
+            <a:solidFill>
+              <a:srgbClr val="93C5FD"/>
+            </a:solidFill>
+          </a:ln>
+        </p:spPr>
+        <p:style>
+          <a:lnRef idx="1">
+            <a:schemeClr val="accent1"/>
+          </a:lnRef>
+          <a:fillRef idx="3">
+            <a:schemeClr val="accent1"/>
+          </a:fillRef>
+          <a:effectRef idx="2">
+            <a:schemeClr val="accent1"/>
+          </a:effectRef>
+          <a:fontRef idx="minor">
+            <a:schemeClr val="lt1"/>
+          </a:fontRef>
+        </p:style>
+        <p:txBody>
+          <a:bodyPr rtlCol="0" anchor="ctr"/>
+          <a:lstStyle/>
+          <a:p>
+            <a:pPr algn="ctr"/>
+          </a:p>
+        </p:txBody>
+      </p:sp>
+      <p:sp>
+        <p:nvSpPr>
+          <p:cNvPr id="7" name="TextBox 6"/>
+          <p:cNvSpPr txBox="1"/>
+          <p:nvPr/>
+        </p:nvSpPr>
+        <p:spPr>
+          <a:xfrm>
+            <a:off x="960120" y="1481328"/>
+            <a:ext cx="4754880" cy="4617720"/>
+          </a:xfrm>
+          <a:prstGeom prst="rect">
+            <a:avLst/>
+          </a:prstGeom>
+          <a:noFill/>
+        </p:spPr>
+        <p:txBody>
+          <a:bodyPr wrap="square">
+            <a:spAutoFit/>
+          </a:bodyPr>
+          <a:lstStyle/>
+          <a:p>
+            <a:pPr>
+              <a:spcAft>
+                <a:spcPts val="300"/>
+              </a:spcAft>
+              <a:defRPr sz="1700" b="1">
+                <a:solidFill>
+                  <a:srgbClr val="1E3A8A"/>
+                </a:solidFill>
+              </a:defRPr>
+            </a:pPr>
+            <a:r>
+              <a:t>Advantages &amp; Key Strengths</a:t>
+            </a:r>
+          </a:p>
+          <a:p>
+            <a:pPr>
+              <a:spcAft>
+                <a:spcPts val="1000"/>
+              </a:spcAft>
+              <a:defRPr sz="1100" b="1">
+                <a:solidFill>
+                  <a:srgbClr val="0284C7"/>
+                </a:solidFill>
+              </a:defRPr>
+            </a:pPr>
+            <a:r>
+              <a:t>Architectural &amp; Pedagogical Superiority</a:t>
+            </a:r>
+          </a:p>
+          <a:p>
+            <a:pPr>
+              <a:defRPr b="1" sz="1300">
+                <a:solidFill>
+                  <a:srgbClr val="1E3A8A"/>
+                </a:solidFill>
+              </a:defRPr>
+            </a:pPr>
+            <a:r>
+              <a:t>✓ Enforced Prerequisite Sequencing</a:t>
+            </a:r>
+          </a:p>
+          <a:p>
+            <a:pPr>
+              <a:spcAft>
+                <a:spcPts val="700"/>
+              </a:spcAft>
+              <a:defRPr sz="1150">
+                <a:solidFill>
+                  <a:srgbClr val="334155"/>
+                </a:solidFill>
+              </a:defRPr>
+            </a:pPr>
+            <a:r>
+              <a:t>   Mathematical topological gating prevents students from skipping fundamental syntax to rush into advanced frameworks, directly combating course abandonment.</a:t>
+            </a:r>
+          </a:p>
+          <a:p>
+            <a:pPr>
+              <a:defRPr b="1" sz="1300">
+                <a:solidFill>
+                  <a:srgbClr val="1E3A8A"/>
+                </a:solidFill>
+              </a:defRPr>
+            </a:pPr>
+            <a:r>
+              <a:t>✓ Universal Cross-Track Mobility</a:t>
+            </a:r>
+          </a:p>
+          <a:p>
+            <a:pPr>
+              <a:spcAft>
+                <a:spcPts val="700"/>
+              </a:spcAft>
+              <a:defRPr sz="1150">
+                <a:solidFill>
+                  <a:srgbClr val="334155"/>
+                </a:solidFill>
+              </a:defRPr>
+            </a:pPr>
+            <a:r>
+              <a:t>   Competencies mastered in one track (e.g. Git, Python, SQL) carry over immediately when switching tracks, saving dozens of hours of duplicate study.</a:t>
+            </a:r>
+          </a:p>
+          <a:p>
+            <a:pPr>
+              <a:defRPr b="1" sz="1300">
+                <a:solidFill>
+                  <a:srgbClr val="1E3A8A"/>
+                </a:solidFill>
+              </a:defRPr>
+            </a:pPr>
+            <a:r>
+              <a:t>✓ Tamper-Proof Proof-of-Skill</a:t>
+            </a:r>
+          </a:p>
+          <a:p>
+            <a:pPr>
+              <a:spcAft>
+                <a:spcPts val="700"/>
+              </a:spcAft>
+              <a:defRPr sz="1150">
+                <a:solidFill>
+                  <a:srgbClr val="334155"/>
+                </a:solidFill>
+              </a:defRPr>
+            </a:pPr>
+            <a:r>
+              <a:t>   Server-graded micro-quizzes with client payload sanitization eliminate honor-system cheating and award credible, verifiable badges (🛡️).</a:t>
+            </a:r>
+          </a:p>
+          <a:p>
+            <a:pPr>
+              <a:defRPr b="1" sz="1300">
+                <a:solidFill>
+                  <a:srgbClr val="1E3A8A"/>
+                </a:solidFill>
+              </a:defRPr>
+            </a:pPr>
+            <a:r>
+              <a:t>✓ Non-Disruptive Dynamic Navigation</a:t>
+            </a:r>
+          </a:p>
+          <a:p>
+            <a:pPr>
+              <a:spcAft>
+                <a:spcPts val="700"/>
+              </a:spcAft>
+              <a:defRPr sz="1150">
+                <a:solidFill>
+                  <a:srgbClr val="334155"/>
+                </a:solidFill>
+              </a:defRPr>
+            </a:pPr>
+            <a:r>
+              <a:t>   In-canvas slide-out drawers and instant status toggling maintain learner focus without continuous page reloads or context loss.</a:t>
+            </a:r>
+          </a:p>
+          <a:p>
+            <a:pPr>
+              <a:defRPr b="1" sz="1300">
+                <a:solidFill>
+                  <a:srgbClr val="1E3A8A"/>
+                </a:solidFill>
+              </a:defRPr>
+            </a:pPr>
+            <a:r>
+              <a:t>✓ Production-Ready Decoupled Stack</a:t>
+            </a:r>
+          </a:p>
+          <a:p>
+            <a:pPr>
+              <a:spcAft>
+                <a:spcPts val="700"/>
+              </a:spcAft>
+              <a:defRPr sz="1150">
+                <a:solidFill>
+                  <a:srgbClr val="334155"/>
+                </a:solidFill>
+              </a:defRPr>
+            </a:pPr>
+            <a:r>
+              <a:t>   Modern Vue 3 SPA + Node/Express REST API delivers sub-100ms UI response times, modular maintenance, and horizontal cloud scalability.</a:t>
+            </a:r>
+          </a:p>
+        </p:txBody>
+      </p:sp>
+      <p:sp>
+        <p:nvSpPr>
+          <p:cNvPr id="8" name="Rounded Rectangle 7"/>
+          <p:cNvSpPr/>
+          <p:nvPr/>
+        </p:nvSpPr>
+        <p:spPr>
+          <a:xfrm>
+            <a:off x="6217920" y="1298448"/>
+            <a:ext cx="5212080" cy="4983480"/>
+          </a:xfrm>
+          <a:prstGeom prst="roundRect">
+            <a:avLst/>
+          </a:prstGeom>
+          <a:solidFill>
+            <a:srgbClr val="FFFBEB"/>
+          </a:solidFill>
+          <a:ln w="15240">
+            <a:solidFill>
+              <a:srgbClr val="FCD34D"/>
+            </a:solidFill>
+          </a:ln>
+        </p:spPr>
+        <p:style>
+          <a:lnRef idx="1">
+            <a:schemeClr val="accent1"/>
+          </a:lnRef>
+          <a:fillRef idx="3">
+            <a:schemeClr val="accent1"/>
+          </a:fillRef>
+          <a:effectRef idx="2">
+            <a:schemeClr val="accent1"/>
+          </a:effectRef>
+          <a:fontRef idx="minor">
+            <a:schemeClr val="lt1"/>
+          </a:fontRef>
+        </p:style>
+        <p:txBody>
+          <a:bodyPr rtlCol="0" anchor="ctr"/>
+          <a:lstStyle/>
+          <a:p>
+            <a:pPr algn="ctr"/>
+          </a:p>
+        </p:txBody>
+      </p:sp>
+      <p:sp>
+        <p:nvSpPr>
+          <p:cNvPr id="9" name="TextBox 8"/>
+          <p:cNvSpPr txBox="1"/>
+          <p:nvPr/>
+        </p:nvSpPr>
+        <p:spPr>
+          <a:xfrm>
+            <a:off x="6446520" y="1481328"/>
+            <a:ext cx="4754880" cy="4617720"/>
+          </a:xfrm>
+          <a:prstGeom prst="rect">
+            <a:avLst/>
+          </a:prstGeom>
+          <a:noFill/>
+        </p:spPr>
+        <p:txBody>
+          <a:bodyPr wrap="square">
+            <a:spAutoFit/>
+          </a:bodyPr>
+          <a:lstStyle/>
+          <a:p>
+            <a:pPr>
+              <a:spcAft>
+                <a:spcPts val="300"/>
+              </a:spcAft>
+              <a:defRPr sz="1700" b="1">
+                <a:solidFill>
+                  <a:srgbClr val="B45309"/>
+                </a:solidFill>
+              </a:defRPr>
+            </a:pPr>
+            <a:r>
+              <a:t>Limitations &amp; Disadvantages</a:t>
+            </a:r>
+          </a:p>
+          <a:p>
+            <a:pPr>
+              <a:spcAft>
+                <a:spcPts val="1000"/>
+              </a:spcAft>
+              <a:defRPr sz="1100" b="1">
+                <a:solidFill>
+                  <a:srgbClr val="D97706"/>
+                </a:solidFill>
+              </a:defRPr>
+            </a:pPr>
+            <a:r>
+              <a:t>Realistic Engineering Constraints</a:t>
+            </a:r>
+          </a:p>
+          <a:p>
+            <a:pPr>
+              <a:defRPr b="1" sz="1300">
+                <a:solidFill>
+                  <a:srgbClr val="B45309"/>
+                </a:solidFill>
+              </a:defRPr>
+            </a:pPr>
+            <a:r>
+              <a:t>• Initial Curriculum Scope</a:t>
+            </a:r>
+          </a:p>
+          <a:p>
+            <a:pPr>
+              <a:spcAft>
+                <a:spcPts val="700"/>
+              </a:spcAft>
+              <a:defRPr sz="1150">
+                <a:solidFill>
+                  <a:srgbClr val="0F172A"/>
+                </a:solidFill>
+              </a:defRPr>
+            </a:pPr>
+            <a:r>
+              <a:t>   Currently covers 6 high-demand IT tracks (Full Stack, DevOps, AI, Cloud, Data, Cyber); emerging niche fields require ongoing administrator curation.</a:t>
+            </a:r>
+          </a:p>
+          <a:p>
+            <a:pPr>
+              <a:defRPr b="1" sz="1300">
+                <a:solidFill>
+                  <a:srgbClr val="B45309"/>
+                </a:solidFill>
+              </a:defRPr>
+            </a:pPr>
+            <a:r>
+              <a:t>• Fixed Validation Quiz Pool</a:t>
+            </a:r>
+          </a:p>
+          <a:p>
+            <a:pPr>
+              <a:spcAft>
+                <a:spcPts val="700"/>
+              </a:spcAft>
+              <a:defRPr sz="1150">
+                <a:solidFill>
+                  <a:srgbClr val="0F172A"/>
+                </a:solidFill>
+              </a:defRPr>
+            </a:pPr>
+            <a:r>
+              <a:t>   Each skill currently draws from a curated 3-question evaluation pool; future expansion requires randomized question banks to prevent repeat memorization.</a:t>
+            </a:r>
+          </a:p>
+          <a:p>
+            <a:pPr>
+              <a:defRPr b="1" sz="1300">
+                <a:solidFill>
+                  <a:srgbClr val="B45309"/>
+                </a:solidFill>
+              </a:defRPr>
+            </a:pPr>
+            <a:r>
+              <a:t>• Active Network Dependency</a:t>
+            </a:r>
+          </a:p>
+          <a:p>
+            <a:pPr>
+              <a:spcAft>
+                <a:spcPts val="700"/>
+              </a:spcAft>
+              <a:defRPr sz="1150">
+                <a:solidFill>
+                  <a:srgbClr val="0F172A"/>
+                </a:solidFill>
+              </a:defRPr>
+            </a:pPr>
+            <a:r>
+              <a:t>   Real-time progress synchronization and server-side quiz grading require active internet connectivity, lacking offline-first PWA caching.</a:t>
+            </a:r>
+          </a:p>
+          <a:p>
+            <a:pPr>
+              <a:defRPr b="1" sz="1300">
+                <a:solidFill>
+                  <a:srgbClr val="B45309"/>
+                </a:solidFill>
+              </a:defRPr>
+            </a:pPr>
+            <a:r>
+              <a:t>• Absence of In-Browser Code Sandbox</a:t>
+            </a:r>
+          </a:p>
+          <a:p>
+            <a:pPr>
+              <a:spcAft>
+                <a:spcPts val="700"/>
+              </a:spcAft>
+              <a:defRPr sz="1150">
+                <a:solidFill>
+                  <a:srgbClr val="0F172A"/>
+                </a:solidFill>
+              </a:defRPr>
+            </a:pPr>
+            <a:r>
+              <a:t>   Assesses conceptual and architectural understanding through quizzes, but does not yet compile and execute student code in an isolated WebAssembly sandbox.</a:t>
+            </a:r>
+          </a:p>
+          <a:p>
+            <a:pPr>
+              <a:defRPr b="1" sz="1300">
+                <a:solidFill>
+                  <a:srgbClr val="B45309"/>
+                </a:solidFill>
+              </a:defRPr>
+            </a:pPr>
+            <a:r>
+              <a:t>• Subjective Initial Onboarding</a:t>
+            </a:r>
+          </a:p>
+          <a:p>
+            <a:pPr>
+              <a:spcAft>
+                <a:spcPts val="700"/>
+              </a:spcAft>
+              <a:defRPr sz="1150">
+                <a:solidFill>
+                  <a:srgbClr val="0F172A"/>
+                </a:solidFill>
+              </a:defRPr>
+            </a:pPr>
+            <a:r>
+              <a:t>   Initial baseline self-ratings rely on student honesty upon sign-up until objectively validated through subsequent micro-quizzes.</a:t>
+            </a:r>
+          </a:p>
+        </p:txBody>
+      </p:sp>
     </p:spTree>
   </p:cSld>
   <p:clrMapOvr>
@@ -4870,8 +4658,8 @@
         </p:nvSpPr>
         <p:spPr>
           <a:xfrm>
-            <a:off x="731520" y="365760"/>
-            <a:ext cx="10515600" cy="320040"/>
+            <a:off x="731520" y="274320"/>
+            <a:ext cx="10728655" cy="320040"/>
           </a:xfrm>
           <a:prstGeom prst="rect">
             <a:avLst/>
@@ -4885,7 +4673,7 @@
           <a:lstStyle/>
           <a:p>
             <a:pPr>
-              <a:defRPr sz="1000" b="1">
+              <a:defRPr sz="1100" b="1">
                 <a:solidFill>
                   <a:srgbClr val="0284C7"/>
                 </a:solidFill>
@@ -4905,8 +4693,8 @@
         </p:nvSpPr>
         <p:spPr>
           <a:xfrm>
-            <a:off x="731520" y="640080"/>
-            <a:ext cx="10515600" cy="502920"/>
+            <a:off x="731520" y="566928"/>
+            <a:ext cx="10728655" cy="502920"/>
           </a:xfrm>
           <a:prstGeom prst="rect">
             <a:avLst/>
@@ -4920,7 +4708,7 @@
           <a:lstStyle/>
           <a:p>
             <a:pPr>
-              <a:defRPr sz="2200" b="1">
+              <a:defRPr sz="2400" b="1">
                 <a:solidFill>
                   <a:srgbClr val="1E3A8A"/>
                 </a:solidFill>
@@ -4940,7 +4728,7 @@
         </p:nvSpPr>
         <p:spPr>
           <a:xfrm>
-            <a:off x="731520" y="1188720"/>
+            <a:off x="731520" y="1115568"/>
             <a:ext cx="10728655" cy="18288"/>
           </a:xfrm>
           <a:prstGeom prst="rect">
@@ -4985,7 +4773,7 @@
         </p:nvSpPr>
         <p:spPr>
           <a:xfrm>
-            <a:off x="731520" y="6400800"/>
+            <a:off x="731520" y="6446520"/>
             <a:ext cx="10728655" cy="274320"/>
           </a:xfrm>
           <a:prstGeom prst="rect">
@@ -5000,7 +4788,7 @@
           <a:lstStyle/>
           <a:p>
             <a:pPr>
-              <a:defRPr sz="900">
+              <a:defRPr sz="1000">
                 <a:solidFill>
                   <a:srgbClr val="94A3B8"/>
                 </a:solidFill>
@@ -5020,8 +4808,8 @@
         </p:nvSpPr>
         <p:spPr>
           <a:xfrm>
-            <a:off x="731520" y="1463040"/>
-            <a:ext cx="3328416" cy="4480560"/>
+            <a:off x="731520" y="1298448"/>
+            <a:ext cx="3383280" cy="4983480"/>
           </a:xfrm>
           <a:prstGeom prst="roundRect">
             <a:avLst/>
@@ -5029,7 +4817,7 @@
           <a:solidFill>
             <a:srgbClr val="F8FAFC"/>
           </a:solidFill>
-          <a:ln w="12700">
+          <a:ln w="15240">
             <a:solidFill>
               <a:srgbClr val="CBD5E1"/>
             </a:solidFill>
@@ -5065,8 +4853,8 @@
         </p:nvSpPr>
         <p:spPr>
           <a:xfrm>
-            <a:off x="914400" y="1691640"/>
-            <a:ext cx="2962656" cy="4023360"/>
+            <a:off x="960120" y="1481328"/>
+            <a:ext cx="2926080" cy="4617720"/>
           </a:xfrm>
           <a:prstGeom prst="rect">
             <a:avLst/>
@@ -5080,22 +4868,22 @@
           <a:lstStyle/>
           <a:p>
             <a:pPr>
-              <a:defRPr sz="1300" b="1">
+              <a:defRPr sz="1600" b="1">
                 <a:solidFill>
                   <a:srgbClr val="1E3A8A"/>
                 </a:solidFill>
               </a:defRPr>
             </a:pPr>
             <a:r>
-              <a:t>Frontend: Vercel Edge Network</a:t>
-            </a:r>
-          </a:p>
-          <a:p>
-            <a:pPr>
-              <a:spcAft>
-                <a:spcPts val="1000"/>
-              </a:spcAft>
-              <a:defRPr sz="850" b="1">
+              <a:t>Frontend: Vercel Edge</a:t>
+            </a:r>
+          </a:p>
+          <a:p>
+            <a:pPr>
+              <a:spcAft>
+                <a:spcPts val="1200"/>
+              </a:spcAft>
+              <a:defRPr sz="1000" b="1">
                 <a:solidFill>
                   <a:srgbClr val="0284C7"/>
                 </a:solidFill>
@@ -5107,26 +4895,62 @@
           </a:p>
           <a:p>
             <a:pPr>
-              <a:defRPr sz="950">
+              <a:spcAft>
+                <a:spcPts val="600"/>
+              </a:spcAft>
+              <a:defRPr sz="1200">
                 <a:solidFill>
                   <a:srgbClr val="334155"/>
                 </a:solidFill>
               </a:defRPr>
             </a:pPr>
             <a:r>
-              <a:t>• Framework: Vue 3 (Composition API, &lt;script setup&gt;), Vite 5.3.</a:t>
-            </a:r>
-            <a:br/>
-            <a:r>
-              <a:t>• Deployment: Hosted on Vercel Global Edge CDN.</a:t>
-            </a:r>
-            <a:br/>
+              <a:t>• Framework: Vue 3 (Composition API, &lt;script setup&gt;), Vite 5.3 bundler.</a:t>
+            </a:r>
+          </a:p>
+          <a:p>
+            <a:pPr>
+              <a:spcAft>
+                <a:spcPts val="600"/>
+              </a:spcAft>
+              <a:defRPr sz="1200">
+                <a:solidFill>
+                  <a:srgbClr val="334155"/>
+                </a:solidFill>
+              </a:defRPr>
+            </a:pPr>
+            <a:r>
+              <a:t>• Deployment: Hosted on Vercel Global Edge CDN with automated caching.</a:t>
+            </a:r>
+          </a:p>
+          <a:p>
+            <a:pPr>
+              <a:spcAft>
+                <a:spcPts val="600"/>
+              </a:spcAft>
+              <a:defRPr sz="1200">
+                <a:solidFill>
+                  <a:srgbClr val="334155"/>
+                </a:solidFill>
+              </a:defRPr>
+            </a:pPr>
             <a:r>
               <a:t>• SPA Routing: vercel.json catch-all rewrite rule (/(.*) -&gt; /) prevents 404s on browser refresh.</a:t>
             </a:r>
-            <a:br/>
-            <a:r>
-              <a:t>• Environment: VITE_API_BASE_URL pointing to live backend API.</a:t>
+          </a:p>
+          <a:p>
+            <a:pPr>
+              <a:spcAft>
+                <a:spcPts val="600"/>
+              </a:spcAft>
+              <a:defRPr sz="1200">
+                <a:solidFill>
+                  <a:srgbClr val="334155"/>
+                </a:solidFill>
+              </a:defRPr>
+            </a:pPr>
+            <a:r>
+              <a:t>• Environment: VITE_API_BASE_URL pointing to live Render backend API.</a:t>
             </a:r>
           </a:p>
         </p:txBody>
@@ -5139,8 +4963,8 @@
         </p:nvSpPr>
         <p:spPr>
           <a:xfrm>
-            <a:off x="4425696" y="1463040"/>
-            <a:ext cx="3328416" cy="4480560"/>
+            <a:off x="4407407" y="1298448"/>
+            <a:ext cx="3383280" cy="4983480"/>
           </a:xfrm>
           <a:prstGeom prst="roundRect">
             <a:avLst/>
@@ -5148,7 +4972,7 @@
           <a:solidFill>
             <a:srgbClr val="F8FAFC"/>
           </a:solidFill>
-          <a:ln w="12700">
+          <a:ln w="15240">
             <a:solidFill>
               <a:srgbClr val="CBD5E1"/>
             </a:solidFill>
@@ -5184,8 +5008,8 @@
         </p:nvSpPr>
         <p:spPr>
           <a:xfrm>
-            <a:off x="4608576" y="1691640"/>
-            <a:ext cx="2962656" cy="4023360"/>
+            <a:off x="4636007" y="1481328"/>
+            <a:ext cx="2926080" cy="4617720"/>
           </a:xfrm>
           <a:prstGeom prst="rect">
             <a:avLst/>
@@ -5199,7 +5023,7 @@
           <a:lstStyle/>
           <a:p>
             <a:pPr>
-              <a:defRPr sz="1300" b="1">
+              <a:defRPr sz="1600" b="1">
                 <a:solidFill>
                   <a:srgbClr val="1E3A8A"/>
                 </a:solidFill>
@@ -5212,9 +5036,9 @@
           <a:p>
             <a:pPr>
               <a:spcAft>
-                <a:spcPts val="1000"/>
-              </a:spcAft>
-              <a:defRPr sz="850" b="1">
+                <a:spcPts val="1200"/>
+              </a:spcAft>
+              <a:defRPr sz="1000" b="1">
                 <a:solidFill>
                   <a:srgbClr val="0284C7"/>
                 </a:solidFill>
@@ -5226,26 +5050,62 @@
           </a:p>
           <a:p>
             <a:pPr>
-              <a:defRPr sz="950">
+              <a:spcAft>
+                <a:spcPts val="600"/>
+              </a:spcAft>
+              <a:defRPr sz="1200">
                 <a:solidFill>
                   <a:srgbClr val="334155"/>
                 </a:solidFill>
               </a:defRPr>
             </a:pPr>
             <a:r>
-              <a:t>• Runtime: Node.js 18+ &amp; Express 4.19 Framework.</a:t>
-            </a:r>
-            <a:br/>
+              <a:t>• Runtime: Node.js 18+ &amp; Express 4.19 web framework.</a:t>
+            </a:r>
+          </a:p>
+          <a:p>
+            <a:pPr>
+              <a:spcAft>
+                <a:spcPts val="600"/>
+              </a:spcAft>
+              <a:defRPr sz="1200">
+                <a:solidFill>
+                  <a:srgbClr val="334155"/>
+                </a:solidFill>
+              </a:defRPr>
+            </a:pPr>
             <a:r>
               <a:t>• Deployment: Deployed on Render Web Service with continuous integration.</a:t>
             </a:r>
-            <a:br/>
-            <a:r>
-              <a:t>• Auto-Deploy: Triggers automatically on git push to main branch.</a:t>
-            </a:r>
-            <a:br/>
-            <a:r>
-              <a:t>• Security: CORS whitelisting, stateless JWT authorization.</a:t>
+          </a:p>
+          <a:p>
+            <a:pPr>
+              <a:spcAft>
+                <a:spcPts val="600"/>
+              </a:spcAft>
+              <a:defRPr sz="1200">
+                <a:solidFill>
+                  <a:srgbClr val="334155"/>
+                </a:solidFill>
+              </a:defRPr>
+            </a:pPr>
+            <a:r>
+              <a:t>• Auto-Deploy: Triggers automatically on git push to the main branch.</a:t>
+            </a:r>
+          </a:p>
+          <a:p>
+            <a:pPr>
+              <a:spcAft>
+                <a:spcPts val="600"/>
+              </a:spcAft>
+              <a:defRPr sz="1200">
+                <a:solidFill>
+                  <a:srgbClr val="334155"/>
+                </a:solidFill>
+              </a:defRPr>
+            </a:pPr>
+            <a:r>
+              <a:t>• Security: Strict CORS whitelisting, stateless JWT authorization, and Bcrypt hashing.</a:t>
             </a:r>
           </a:p>
         </p:txBody>
@@ -5258,8 +5118,8 @@
         </p:nvSpPr>
         <p:spPr>
           <a:xfrm>
-            <a:off x="8119872" y="1463040"/>
-            <a:ext cx="3328416" cy="4480560"/>
+            <a:off x="8083296" y="1298448"/>
+            <a:ext cx="3383280" cy="4983480"/>
           </a:xfrm>
           <a:prstGeom prst="roundRect">
             <a:avLst/>
@@ -5267,7 +5127,7 @@
           <a:solidFill>
             <a:srgbClr val="F8FAFC"/>
           </a:solidFill>
-          <a:ln w="12700">
+          <a:ln w="15240">
             <a:solidFill>
               <a:srgbClr val="CBD5E1"/>
             </a:solidFill>
@@ -5303,8 +5163,8 @@
         </p:nvSpPr>
         <p:spPr>
           <a:xfrm>
-            <a:off x="8302752" y="1691640"/>
-            <a:ext cx="2962656" cy="4023360"/>
+            <a:off x="8311896" y="1481328"/>
+            <a:ext cx="2926080" cy="4617720"/>
           </a:xfrm>
           <a:prstGeom prst="rect">
             <a:avLst/>
@@ -5318,7 +5178,7 @@
           <a:lstStyle/>
           <a:p>
             <a:pPr>
-              <a:defRPr sz="1300" b="1">
+              <a:defRPr sz="1600" b="1">
                 <a:solidFill>
                   <a:srgbClr val="1E3A8A"/>
                 </a:solidFill>
@@ -5331,9 +5191,9 @@
           <a:p>
             <a:pPr>
               <a:spcAft>
-                <a:spcPts val="1000"/>
-              </a:spcAft>
-              <a:defRPr sz="850" b="1">
+                <a:spcPts val="1200"/>
+              </a:spcAft>
+              <a:defRPr sz="1000" b="1">
                 <a:solidFill>
                   <a:srgbClr val="0284C7"/>
                 </a:solidFill>
@@ -5345,22 +5205,62 @@
           </a:p>
           <a:p>
             <a:pPr>
-              <a:defRPr sz="950">
+              <a:spcAft>
+                <a:spcPts val="600"/>
+              </a:spcAft>
+              <a:defRPr sz="1200">
                 <a:solidFill>
                   <a:srgbClr val="334155"/>
                 </a:solidFill>
               </a:defRPr>
             </a:pPr>
             <a:r>
-              <a:t>• Clustering: Managed MongoDB Atlas cloud cluster.</a:t>
-            </a:r>
-            <a:br/>
-            <a:r>
-              <a:t>• Schema ODM: Mongoose 8.5 with strict normalization &amp; indexes.</a:t>
-            </a:r>
-            <a:br/>
-            <a:r>
-              <a:t>• Reliability: Automated daily snapshots, IP access whitelisting, and connection pooling.</a:t>
+              <a:t>• Clustering: Managed MongoDB Atlas cloud cluster with 99.99% uptime.</a:t>
+            </a:r>
+          </a:p>
+          <a:p>
+            <a:pPr>
+              <a:spcAft>
+                <a:spcPts val="600"/>
+              </a:spcAft>
+              <a:defRPr sz="1200">
+                <a:solidFill>
+                  <a:srgbClr val="334155"/>
+                </a:solidFill>
+              </a:defRPr>
+            </a:pPr>
+            <a:r>
+              <a:t>• Schema ODM: Mongoose 8.5 with strict normalization &amp; compound unique indexes.</a:t>
+            </a:r>
+          </a:p>
+          <a:p>
+            <a:pPr>
+              <a:spcAft>
+                <a:spcPts val="600"/>
+              </a:spcAft>
+              <a:defRPr sz="1200">
+                <a:solidFill>
+                  <a:srgbClr val="334155"/>
+                </a:solidFill>
+              </a:defRPr>
+            </a:pPr>
+            <a:r>
+              <a:t>• Idempotency: Compound uniqueness prevents duplicate progress write operations.</a:t>
+            </a:r>
+          </a:p>
+          <a:p>
+            <a:pPr>
+              <a:spcAft>
+                <a:spcPts val="600"/>
+              </a:spcAft>
+              <a:defRPr sz="1200">
+                <a:solidFill>
+                  <a:srgbClr val="334155"/>
+                </a:solidFill>
+              </a:defRPr>
+            </a:pPr>
+            <a:r>
+              <a:t>• Reliability: Automated daily snapshots, TLS/SSL transport encryption, and connection pooling.</a:t>
             </a:r>
           </a:p>
         </p:txBody>
@@ -5391,8 +5291,8 @@
         </p:nvSpPr>
         <p:spPr>
           <a:xfrm>
-            <a:off x="731520" y="365760"/>
-            <a:ext cx="10515600" cy="320040"/>
+            <a:off x="731520" y="274320"/>
+            <a:ext cx="10728655" cy="320040"/>
           </a:xfrm>
           <a:prstGeom prst="rect">
             <a:avLst/>
@@ -5406,7 +5306,7 @@
           <a:lstStyle/>
           <a:p>
             <a:pPr>
-              <a:defRPr sz="1000" b="1">
+              <a:defRPr sz="1100" b="1">
                 <a:solidFill>
                   <a:srgbClr val="0284C7"/>
                 </a:solidFill>
@@ -5426,8 +5326,8 @@
         </p:nvSpPr>
         <p:spPr>
           <a:xfrm>
-            <a:off x="731520" y="640080"/>
-            <a:ext cx="10515600" cy="502920"/>
+            <a:off x="731520" y="566928"/>
+            <a:ext cx="10728655" cy="502920"/>
           </a:xfrm>
           <a:prstGeom prst="rect">
             <a:avLst/>
@@ -5441,7 +5341,7 @@
           <a:lstStyle/>
           <a:p>
             <a:pPr>
-              <a:defRPr sz="2200" b="1">
+              <a:defRPr sz="2400" b="1">
                 <a:solidFill>
                   <a:srgbClr val="1E3A8A"/>
                 </a:solidFill>
@@ -5461,7 +5361,7 @@
         </p:nvSpPr>
         <p:spPr>
           <a:xfrm>
-            <a:off x="731520" y="1188720"/>
+            <a:off x="731520" y="1115568"/>
             <a:ext cx="10728655" cy="18288"/>
           </a:xfrm>
           <a:prstGeom prst="rect">
@@ -5506,7 +5406,7 @@
         </p:nvSpPr>
         <p:spPr>
           <a:xfrm>
-            <a:off x="731520" y="6400800"/>
+            <a:off x="731520" y="6446520"/>
             <a:ext cx="10728655" cy="274320"/>
           </a:xfrm>
           <a:prstGeom prst="rect">
@@ -5521,7 +5421,7 @@
           <a:lstStyle/>
           <a:p>
             <a:pPr>
-              <a:defRPr sz="900">
+              <a:defRPr sz="1000">
                 <a:solidFill>
                   <a:srgbClr val="94A3B8"/>
                 </a:solidFill>
@@ -5541,8 +5441,8 @@
         </p:nvSpPr>
         <p:spPr>
           <a:xfrm>
-            <a:off x="731520" y="1463040"/>
-            <a:ext cx="5120640" cy="3657600"/>
+            <a:off x="731520" y="1298448"/>
+            <a:ext cx="5212080" cy="4069080"/>
           </a:xfrm>
           <a:prstGeom prst="roundRect">
             <a:avLst/>
@@ -5550,7 +5450,7 @@
           <a:solidFill>
             <a:srgbClr val="F8FAFC"/>
           </a:solidFill>
-          <a:ln w="12700">
+          <a:ln w="15240">
             <a:solidFill>
               <a:srgbClr val="CBD5E1"/>
             </a:solidFill>
@@ -5586,8 +5486,8 @@
         </p:nvSpPr>
         <p:spPr>
           <a:xfrm>
-            <a:off x="960120" y="1691640"/>
-            <a:ext cx="4663440" cy="3200400"/>
+            <a:off x="960120" y="1481328"/>
+            <a:ext cx="4754880" cy="3703320"/>
           </a:xfrm>
           <a:prstGeom prst="rect">
             <a:avLst/>
@@ -5602,9 +5502,9 @@
           <a:p>
             <a:pPr>
               <a:spcAft>
-                <a:spcPts val="800"/>
-              </a:spcAft>
-              <a:defRPr b="1" sz="1400">
+                <a:spcPts val="300"/>
+              </a:spcAft>
+              <a:defRPr b="1" sz="1700">
                 <a:solidFill>
                   <a:srgbClr val="1E3A8A"/>
                 </a:solidFill>
@@ -5617,76 +5517,124 @@
           <a:p>
             <a:pPr>
               <a:spcAft>
-                <a:spcPts val="400"/>
-              </a:spcAft>
-              <a:defRPr sz="1000">
+                <a:spcPts val="1000"/>
+              </a:spcAft>
+              <a:defRPr sz="1100" b="1">
+                <a:solidFill>
+                  <a:srgbClr val="0284C7"/>
+                </a:solidFill>
+              </a:defRPr>
+            </a:pPr>
+            <a:r>
+              <a:t>Capstone Engineering Deliverables</a:t>
+            </a:r>
+          </a:p>
+          <a:p>
+            <a:pPr>
+              <a:defRPr b="1" sz="1300">
                 <a:solidFill>
                   <a:srgbClr val="0F172A"/>
                 </a:solidFill>
               </a:defRPr>
             </a:pPr>
             <a:r>
-              <a:t>✓ Delivered a fully responsive, interactive IT career guidance platform.</a:t>
-            </a:r>
-          </a:p>
-          <a:p>
-            <a:pPr>
-              <a:spcAft>
-                <a:spcPts val="400"/>
-              </a:spcAft>
-              <a:defRPr sz="1000">
+              <a:t>✓ Delivered Full-Stack Platform</a:t>
+            </a:r>
+          </a:p>
+          <a:p>
+            <a:pPr>
+              <a:spcAft>
+                <a:spcPts val="700"/>
+              </a:spcAft>
+              <a:defRPr sz="1150">
+                <a:solidFill>
+                  <a:srgbClr val="334155"/>
+                </a:solidFill>
+              </a:defRPr>
+            </a:pPr>
+            <a:r>
+              <a:t>   Deployed an interactive 5-tier roadmap platform for computer engineering and IT students.</a:t>
+            </a:r>
+          </a:p>
+          <a:p>
+            <a:pPr>
+              <a:defRPr b="1" sz="1300">
                 <a:solidFill>
                   <a:srgbClr val="0F172A"/>
                 </a:solidFill>
               </a:defRPr>
             </a:pPr>
             <a:r>
-              <a:t>✓ Solved the problem of skipping core prerequisites via topological gating.</a:t>
-            </a:r>
-          </a:p>
-          <a:p>
-            <a:pPr>
-              <a:spcAft>
-                <a:spcPts val="400"/>
-              </a:spcAft>
-              <a:defRPr sz="1000">
+              <a:t>✓ Eliminated Prerequisite Gaps</a:t>
+            </a:r>
+          </a:p>
+          <a:p>
+            <a:pPr>
+              <a:spcAft>
+                <a:spcPts val="700"/>
+              </a:spcAft>
+              <a:defRPr sz="1150">
+                <a:solidFill>
+                  <a:srgbClr val="334155"/>
+                </a:solidFill>
+              </a:defRPr>
+            </a:pPr>
+            <a:r>
+              <a:t>   Topological gating algorithm strictly prevents premature framework skipping.</a:t>
+            </a:r>
+          </a:p>
+          <a:p>
+            <a:pPr>
+              <a:defRPr b="1" sz="1300">
                 <a:solidFill>
                   <a:srgbClr val="0F172A"/>
                 </a:solidFill>
               </a:defRPr>
             </a:pPr>
             <a:r>
-              <a:t>✓ Universal skill credit eliminates redundant learning across adjacent tracks.</a:t>
-            </a:r>
-          </a:p>
-          <a:p>
-            <a:pPr>
-              <a:spcAft>
-                <a:spcPts val="400"/>
-              </a:spcAft>
-              <a:defRPr sz="1000">
+              <a:t>✓ Portable Developer Competency</a:t>
+            </a:r>
+          </a:p>
+          <a:p>
+            <a:pPr>
+              <a:spcAft>
+                <a:spcPts val="700"/>
+              </a:spcAft>
+              <a:defRPr sz="1150">
+                <a:solidFill>
+                  <a:srgbClr val="334155"/>
+                </a:solidFill>
+              </a:defRPr>
+            </a:pPr>
+            <a:r>
+              <a:t>   Universal skill propagation eliminates redundant study across adjacent engineering tracks.</a:t>
+            </a:r>
+          </a:p>
+          <a:p>
+            <a:pPr>
+              <a:defRPr b="1" sz="1300">
                 <a:solidFill>
                   <a:srgbClr val="0F172A"/>
                 </a:solidFill>
               </a:defRPr>
             </a:pPr>
             <a:r>
-              <a:t>✓ Server-graded Proof-of-Skill quizzes provide credible, verifiable competency.</a:t>
-            </a:r>
-          </a:p>
-          <a:p>
-            <a:pPr>
-              <a:spcAft>
-                <a:spcPts val="400"/>
-              </a:spcAft>
-              <a:defRPr sz="1000">
-                <a:solidFill>
-                  <a:srgbClr val="0F172A"/>
-                </a:solidFill>
-              </a:defRPr>
-            </a:pPr>
-            <a:r>
-              <a:t>✓ Production deployed on Vercel and Render with verified performance.</a:t>
+              <a:t>✓ Objective Credentialing</a:t>
+            </a:r>
+          </a:p>
+          <a:p>
+            <a:pPr>
+              <a:spcAft>
+                <a:spcPts val="700"/>
+              </a:spcAft>
+              <a:defRPr sz="1150">
+                <a:solidFill>
+                  <a:srgbClr val="334155"/>
+                </a:solidFill>
+              </a:defRPr>
+            </a:pPr>
+            <a:r>
+              <a:t>   Server-graded validation micro-quizzes deliver credible proof-of-skill badges.</a:t>
             </a:r>
           </a:p>
         </p:txBody>
@@ -5699,8 +5647,8 @@
         </p:nvSpPr>
         <p:spPr>
           <a:xfrm>
-            <a:off x="6217920" y="1463040"/>
-            <a:ext cx="5120640" cy="3657600"/>
+            <a:off x="6217920" y="1298448"/>
+            <a:ext cx="5212080" cy="4069080"/>
           </a:xfrm>
           <a:prstGeom prst="roundRect">
             <a:avLst/>
@@ -5708,7 +5656,7 @@
           <a:solidFill>
             <a:srgbClr val="F8FAFC"/>
           </a:solidFill>
-          <a:ln w="12700">
+          <a:ln w="15240">
             <a:solidFill>
               <a:srgbClr val="CBD5E1"/>
             </a:solidFill>
@@ -5744,8 +5692,8 @@
         </p:nvSpPr>
         <p:spPr>
           <a:xfrm>
-            <a:off x="6446520" y="1691640"/>
-            <a:ext cx="4663440" cy="3200400"/>
+            <a:off x="6446520" y="1481328"/>
+            <a:ext cx="4754880" cy="3703320"/>
           </a:xfrm>
           <a:prstGeom prst="rect">
             <a:avLst/>
@@ -5760,9 +5708,9 @@
           <a:p>
             <a:pPr>
               <a:spcAft>
-                <a:spcPts val="800"/>
-              </a:spcAft>
-              <a:defRPr b="1" sz="1400">
+                <a:spcPts val="300"/>
+              </a:spcAft>
+              <a:defRPr b="1" sz="1700">
                 <a:solidFill>
                   <a:srgbClr val="1E3A8A"/>
                 </a:solidFill>
@@ -5775,61 +5723,124 @@
           <a:p>
             <a:pPr>
               <a:spcAft>
-                <a:spcPts val="400"/>
-              </a:spcAft>
-              <a:defRPr sz="1000">
+                <a:spcPts val="1000"/>
+              </a:spcAft>
+              <a:defRPr sz="1100" b="1">
+                <a:solidFill>
+                  <a:srgbClr val="0284C7"/>
+                </a:solidFill>
+              </a:defRPr>
+            </a:pPr>
+            <a:r>
+              <a:t>Post-Capstone Vision &amp; Scale</a:t>
+            </a:r>
+          </a:p>
+          <a:p>
+            <a:pPr>
+              <a:defRPr b="1" sz="1300">
                 <a:solidFill>
                   <a:srgbClr val="0F172A"/>
                 </a:solidFill>
               </a:defRPr>
             </a:pPr>
             <a:r>
-              <a:t>• AI-Driven Adaptive Roadmaps: LLM hints &amp; explanations based on quiz errors.</a:t>
-            </a:r>
-          </a:p>
-          <a:p>
-            <a:pPr>
-              <a:spcAft>
-                <a:spcPts val="400"/>
-              </a:spcAft>
-              <a:defRPr sz="1000">
+              <a:t>• AI-Powered Adaptive Coaching</a:t>
+            </a:r>
+          </a:p>
+          <a:p>
+            <a:pPr>
+              <a:spcAft>
+                <a:spcPts val="700"/>
+              </a:spcAft>
+              <a:defRPr sz="1150">
+                <a:solidFill>
+                  <a:srgbClr val="334155"/>
+                </a:solidFill>
+              </a:defRPr>
+            </a:pPr>
+            <a:r>
+              <a:t>   Integrate LLM diagnostic tutoring to explain mistakes when a quiz question is failed.</a:t>
+            </a:r>
+          </a:p>
+          <a:p>
+            <a:pPr>
+              <a:defRPr b="1" sz="1300">
                 <a:solidFill>
                   <a:srgbClr val="0F172A"/>
                 </a:solidFill>
               </a:defRPr>
             </a:pPr>
             <a:r>
-              <a:t>• In-Browser Code Sandboxes: WebAssembly coding playgrounds inside the topic drawer.</a:t>
-            </a:r>
-          </a:p>
-          <a:p>
-            <a:pPr>
-              <a:spcAft>
-                <a:spcPts val="400"/>
-              </a:spcAft>
-              <a:defRPr sz="1000">
+              <a:t>• In-Browser Code Playground</a:t>
+            </a:r>
+          </a:p>
+          <a:p>
+            <a:pPr>
+              <a:spcAft>
+                <a:spcPts val="700"/>
+              </a:spcAft>
+              <a:defRPr sz="1150">
+                <a:solidFill>
+                  <a:srgbClr val="334155"/>
+                </a:solidFill>
+              </a:defRPr>
+            </a:pPr>
+            <a:r>
+              <a:t>   Embed WebAssembly-based code runners (e.g. Pyodide / Node sandbox) inside topic drawers.</a:t>
+            </a:r>
+          </a:p>
+          <a:p>
+            <a:pPr>
+              <a:defRPr b="1" sz="1300">
                 <a:solidFill>
                   <a:srgbClr val="0F172A"/>
                 </a:solidFill>
               </a:defRPr>
             </a:pPr>
             <a:r>
-              <a:t>• Community Roadmap Creator: Allowing verified mentors to publish emerging tracks.</a:t>
-            </a:r>
-          </a:p>
-          <a:p>
-            <a:pPr>
-              <a:spcAft>
-                <a:spcPts val="400"/>
-              </a:spcAft>
-              <a:defRPr sz="1000">
+              <a:t>• Community Roadmap Builder</a:t>
+            </a:r>
+          </a:p>
+          <a:p>
+            <a:pPr>
+              <a:spcAft>
+                <a:spcPts val="700"/>
+              </a:spcAft>
+              <a:defRPr sz="1150">
+                <a:solidFill>
+                  <a:srgbClr val="334155"/>
+                </a:solidFill>
+              </a:defRPr>
+            </a:pPr>
+            <a:r>
+              <a:t>   Allow university faculty and verified mentors to author new specialized roadmaps.</a:t>
+            </a:r>
+          </a:p>
+          <a:p>
+            <a:pPr>
+              <a:defRPr b="1" sz="1300">
                 <a:solidFill>
                   <a:srgbClr val="0F172A"/>
                 </a:solidFill>
               </a:defRPr>
             </a:pPr>
             <a:r>
-              <a:t>• Employer Talent Portal: Verified badge verification for recruiting pipelines.</a:t>
+              <a:t>• Enterprise Talent Matching</a:t>
+            </a:r>
+          </a:p>
+          <a:p>
+            <a:pPr>
+              <a:spcAft>
+                <a:spcPts val="700"/>
+              </a:spcAft>
+              <a:defRPr sz="1150">
+                <a:solidFill>
+                  <a:srgbClr val="334155"/>
+                </a:solidFill>
+              </a:defRPr>
+            </a:pPr>
+            <a:r>
+              <a:t>   Enable tech recruiters to verify student skill credentials directly via public badge URLs.</a:t>
             </a:r>
           </a:p>
         </p:txBody>
@@ -5842,8 +5853,8 @@
         </p:nvSpPr>
         <p:spPr>
           <a:xfrm>
-            <a:off x="731520" y="5303520"/>
-            <a:ext cx="10728655" cy="822960"/>
+            <a:off x="731520" y="5486400"/>
+            <a:ext cx="10728655" cy="868680"/>
           </a:xfrm>
           <a:prstGeom prst="roundRect">
             <a:avLst/>
@@ -5851,7 +5862,7 @@
           <a:solidFill>
             <a:srgbClr val="1E3A8A"/>
           </a:solidFill>
-          <a:ln w="12700">
+          <a:ln w="15240">
             <a:solidFill>
               <a:srgbClr val="1E3A8A"/>
             </a:solidFill>
@@ -5887,8 +5898,8 @@
         </p:nvSpPr>
         <p:spPr>
           <a:xfrm>
-            <a:off x="960120" y="5394960"/>
-            <a:ext cx="10241280" cy="640080"/>
+            <a:off x="960120" y="5559552"/>
+            <a:ext cx="10241280" cy="731520"/>
           </a:xfrm>
           <a:prstGeom prst="rect">
             <a:avLst/>
@@ -5902,7 +5913,10 @@
           <a:lstStyle/>
           <a:p>
             <a:pPr algn="ctr">
-              <a:defRPr b="1" sz="1300">
+              <a:spcAft>
+                <a:spcPts val="200"/>
+              </a:spcAft>
+              <a:defRPr b="1" sz="1500">
                 <a:solidFill>
                   <a:srgbClr val="FFFFFF"/>
                 </a:solidFill>
@@ -5910,6 +5924,18 @@
             </a:pPr>
             <a:r>
               <a:t>THANK YOU!   —   OPEN FOR QUESTIONS &amp; ANSWERS (Q&amp;A)</a:t>
+            </a:r>
+          </a:p>
+          <a:p>
+            <a:pPr algn="ctr">
+              <a:defRPr sz="1150">
+                <a:solidFill>
+                  <a:srgbClr val="BAE6FD"/>
+                </a:solidFill>
+              </a:defRPr>
+            </a:pPr>
+            <a:r>
+              <a:t>Career Graph: Interactive &amp; Personalized IT Career Roadmap Platform</a:t>
             </a:r>
           </a:p>
         </p:txBody>
@@ -5940,8 +5966,8 @@
         </p:nvSpPr>
         <p:spPr>
           <a:xfrm>
-            <a:off x="731520" y="365760"/>
-            <a:ext cx="10515600" cy="320040"/>
+            <a:off x="731520" y="274320"/>
+            <a:ext cx="10728655" cy="320040"/>
           </a:xfrm>
           <a:prstGeom prst="rect">
             <a:avLst/>
@@ -5955,7 +5981,7 @@
           <a:lstStyle/>
           <a:p>
             <a:pPr>
-              <a:defRPr sz="1000" b="1">
+              <a:defRPr sz="1100" b="1">
                 <a:solidFill>
                   <a:srgbClr val="0284C7"/>
                 </a:solidFill>
@@ -5975,8 +6001,8 @@
         </p:nvSpPr>
         <p:spPr>
           <a:xfrm>
-            <a:off x="731520" y="640080"/>
-            <a:ext cx="10515600" cy="502920"/>
+            <a:off x="731520" y="566928"/>
+            <a:ext cx="10728655" cy="502920"/>
           </a:xfrm>
           <a:prstGeom prst="rect">
             <a:avLst/>
@@ -5990,7 +6016,7 @@
           <a:lstStyle/>
           <a:p>
             <a:pPr>
-              <a:defRPr sz="2200" b="1">
+              <a:defRPr sz="2400" b="1">
                 <a:solidFill>
                   <a:srgbClr val="1E3A8A"/>
                 </a:solidFill>
@@ -6010,7 +6036,7 @@
         </p:nvSpPr>
         <p:spPr>
           <a:xfrm>
-            <a:off x="731520" y="1188720"/>
+            <a:off x="731520" y="1115568"/>
             <a:ext cx="10728655" cy="18288"/>
           </a:xfrm>
           <a:prstGeom prst="rect">
@@ -6055,7 +6081,7 @@
         </p:nvSpPr>
         <p:spPr>
           <a:xfrm>
-            <a:off x="731520" y="6400800"/>
+            <a:off x="731520" y="6446520"/>
             <a:ext cx="10728655" cy="274320"/>
           </a:xfrm>
           <a:prstGeom prst="rect">
@@ -6070,7 +6096,7 @@
           <a:lstStyle/>
           <a:p>
             <a:pPr>
-              <a:defRPr sz="900">
+              <a:defRPr sz="1000">
                 <a:solidFill>
                   <a:srgbClr val="94A3B8"/>
                 </a:solidFill>
@@ -6090,8 +6116,8 @@
         </p:nvSpPr>
         <p:spPr>
           <a:xfrm>
-            <a:off x="731520" y="1463040"/>
-            <a:ext cx="5120640" cy="2103120"/>
+            <a:off x="731520" y="1298448"/>
+            <a:ext cx="5212080" cy="2423160"/>
           </a:xfrm>
           <a:prstGeom prst="roundRect">
             <a:avLst/>
@@ -6099,7 +6125,7 @@
           <a:solidFill>
             <a:srgbClr val="F8FAFC"/>
           </a:solidFill>
-          <a:ln w="12700">
+          <a:ln w="15240">
             <a:solidFill>
               <a:srgbClr val="CBD5E1"/>
             </a:solidFill>
@@ -6135,8 +6161,8 @@
         </p:nvSpPr>
         <p:spPr>
           <a:xfrm>
-            <a:off x="960120" y="1645920"/>
-            <a:ext cx="4663440" cy="1737360"/>
+            <a:off x="960120" y="1463040"/>
+            <a:ext cx="4754880" cy="2093976"/>
           </a:xfrm>
           <a:prstGeom prst="rect">
             <a:avLst/>
@@ -6153,26 +6179,44 @@
               <a:spcAft>
                 <a:spcPts val="600"/>
               </a:spcAft>
-              <a:defRPr sz="1300" b="1">
+              <a:defRPr sz="1600" b="1">
                 <a:solidFill>
                   <a:srgbClr val="1E3A8A"/>
                 </a:solidFill>
               </a:defRPr>
             </a:pPr>
             <a:r>
-              <a:t>1. Unstructured Learning Chaos</a:t>
-            </a:r>
-          </a:p>
-          <a:p>
-            <a:pPr>
-              <a:defRPr sz="1000">
+              <a:t>1. Premature High-Level Tool Fatigue</a:t>
+            </a:r>
+          </a:p>
+          <a:p>
+            <a:pPr>
+              <a:spcAft>
+                <a:spcPts val="400"/>
+              </a:spcAft>
+              <a:defRPr sz="1200">
                 <a:solidFill>
                   <a:srgbClr val="334155"/>
                 </a:solidFill>
               </a:defRPr>
             </a:pPr>
             <a:r>
-              <a:t>Students frequently jump directly into high-level tools (React, Docker, Kubernetes) without mastering fundamental prerequisites (HTML, CSS, JS event loops, Linux CLI). This leads to high abandonment rates.</a:t>
+              <a:t>• Students frequently dive straight into advanced frameworks (React, Docker, Kubernetes) without mastering fundamental syntax, HTTP protocols, or Linux CLI.</a:t>
+            </a:r>
+          </a:p>
+          <a:p>
+            <a:pPr>
+              <a:spcAft>
+                <a:spcPts val="400"/>
+              </a:spcAft>
+              <a:defRPr sz="1200">
+                <a:solidFill>
+                  <a:srgbClr val="334155"/>
+                </a:solidFill>
+              </a:defRPr>
+            </a:pPr>
+            <a:r>
+              <a:t>• Leads to severe cognitive overload, tutorial dependency, and over 70% online course abandonment rates among engineering undergraduates.</a:t>
             </a:r>
           </a:p>
         </p:txBody>
@@ -6185,8 +6229,8 @@
         </p:nvSpPr>
         <p:spPr>
           <a:xfrm>
-            <a:off x="6217920" y="1463040"/>
-            <a:ext cx="5120640" cy="2103120"/>
+            <a:off x="6217920" y="1298448"/>
+            <a:ext cx="5212080" cy="2423160"/>
           </a:xfrm>
           <a:prstGeom prst="roundRect">
             <a:avLst/>
@@ -6194,7 +6238,7 @@
           <a:solidFill>
             <a:srgbClr val="F8FAFC"/>
           </a:solidFill>
-          <a:ln w="12700">
+          <a:ln w="15240">
             <a:solidFill>
               <a:srgbClr val="CBD5E1"/>
             </a:solidFill>
@@ -6230,8 +6274,8 @@
         </p:nvSpPr>
         <p:spPr>
           <a:xfrm>
-            <a:off x="6446520" y="1645920"/>
-            <a:ext cx="4663440" cy="1737360"/>
+            <a:off x="6446520" y="1463040"/>
+            <a:ext cx="4754880" cy="2093976"/>
           </a:xfrm>
           <a:prstGeom prst="rect">
             <a:avLst/>
@@ -6248,26 +6292,44 @@
               <a:spcAft>
                 <a:spcPts val="600"/>
               </a:spcAft>
-              <a:defRPr sz="1300" b="1">
+              <a:defRPr sz="1600" b="1">
                 <a:solidFill>
                   <a:srgbClr val="1E3A8A"/>
                 </a:solidFill>
               </a:defRPr>
             </a:pPr>
             <a:r>
-              <a:t>2. Static, Read-Only Roadmaps</a:t>
-            </a:r>
-          </a:p>
-          <a:p>
-            <a:pPr>
-              <a:defRPr sz="1000">
+              <a:t>2. Static &amp; Non-Adaptive Visualizers</a:t>
+            </a:r>
+          </a:p>
+          <a:p>
+            <a:pPr>
+              <a:spcAft>
+                <a:spcPts val="400"/>
+              </a:spcAft>
+              <a:defRPr sz="1200">
                 <a:solidFill>
                   <a:srgbClr val="334155"/>
                 </a:solidFill>
               </a:defRPr>
             </a:pPr>
             <a:r>
-              <a:t>Platforms like roadmap.sh offer static reference diagrams. They cannot assess what a learner already knows, adapt dynamically, or provide real-time progress tracking.</a:t>
+              <a:t>• Existing community visualizers (e.g. roadmap.sh) present static, read-only SVG diagrams with zero awareness of what the learner already knows.</a:t>
+            </a:r>
+          </a:p>
+          <a:p>
+            <a:pPr>
+              <a:spcAft>
+                <a:spcPts val="400"/>
+              </a:spcAft>
+              <a:defRPr sz="1200">
+                <a:solidFill>
+                  <a:srgbClr val="334155"/>
+                </a:solidFill>
+              </a:defRPr>
+            </a:pPr>
+            <a:r>
+              <a:t>• Cannot adapt to university academic curricula, evaluate prior student baseline competencies, or provide personalized step-by-step guidance.</a:t>
             </a:r>
           </a:p>
         </p:txBody>
@@ -6280,8 +6342,8 @@
         </p:nvSpPr>
         <p:spPr>
           <a:xfrm>
-            <a:off x="731520" y="3840480"/>
-            <a:ext cx="5120640" cy="2103120"/>
+            <a:off x="731520" y="3886200"/>
+            <a:ext cx="5212080" cy="2423160"/>
           </a:xfrm>
           <a:prstGeom prst="roundRect">
             <a:avLst/>
@@ -6289,7 +6351,7 @@
           <a:solidFill>
             <a:srgbClr val="F8FAFC"/>
           </a:solidFill>
-          <a:ln w="12700">
+          <a:ln w="15240">
             <a:solidFill>
               <a:srgbClr val="CBD5E1"/>
             </a:solidFill>
@@ -6325,8 +6387,8 @@
         </p:nvSpPr>
         <p:spPr>
           <a:xfrm>
-            <a:off x="960120" y="4023360"/>
-            <a:ext cx="4663440" cy="1737360"/>
+            <a:off x="960120" y="4050792"/>
+            <a:ext cx="4754880" cy="2093976"/>
           </a:xfrm>
           <a:prstGeom prst="rect">
             <a:avLst/>
@@ -6343,26 +6405,44 @@
               <a:spcAft>
                 <a:spcPts val="600"/>
               </a:spcAft>
-              <a:defRPr sz="1300" b="1">
+              <a:defRPr sz="1600" b="1">
                 <a:solidFill>
                   <a:srgbClr val="1E3A8A"/>
                 </a:solidFill>
               </a:defRPr>
             </a:pPr>
             <a:r>
-              <a:t>3. Siloed, Non-Transferable Progress</a:t>
-            </a:r>
-          </a:p>
-          <a:p>
-            <a:pPr>
-              <a:defRPr sz="1000">
+              <a:t>3. Siloed, Non-Portable Skill Progress</a:t>
+            </a:r>
+          </a:p>
+          <a:p>
+            <a:pPr>
+              <a:spcAft>
+                <a:spcPts val="400"/>
+              </a:spcAft>
+              <a:defRPr sz="1200">
                 <a:solidFill>
                   <a:srgbClr val="334155"/>
                 </a:solidFill>
               </a:defRPr>
             </a:pPr>
             <a:r>
-              <a:t>When a student masters a core skill (e.g. Python or SQL) in a web development roadmap, that progress is lost if they switch to an adjacent track such as Data Analysis or DevOps.</a:t>
+              <a:t>• When a student masters shared engineering skills (e.g. Git, Python, SQL) in Web Development, that progress is trapped in an isolated course silo.</a:t>
+            </a:r>
+          </a:p>
+          <a:p>
+            <a:pPr>
+              <a:spcAft>
+                <a:spcPts val="400"/>
+              </a:spcAft>
+              <a:defRPr sz="1200">
+                <a:solidFill>
+                  <a:srgbClr val="334155"/>
+                </a:solidFill>
+              </a:defRPr>
+            </a:pPr>
+            <a:r>
+              <a:t>• Switching tracks to DevOps or AI/ML forces students to repeat identical modules from scratch, wasting dozens of hours.</a:t>
             </a:r>
           </a:p>
         </p:txBody>
@@ -6375,8 +6455,8 @@
         </p:nvSpPr>
         <p:spPr>
           <a:xfrm>
-            <a:off x="6217920" y="3840480"/>
-            <a:ext cx="5120640" cy="2103120"/>
+            <a:off x="6217920" y="3886200"/>
+            <a:ext cx="5212080" cy="2423160"/>
           </a:xfrm>
           <a:prstGeom prst="roundRect">
             <a:avLst/>
@@ -6384,7 +6464,7 @@
           <a:solidFill>
             <a:srgbClr val="F8FAFC"/>
           </a:solidFill>
-          <a:ln w="12700">
+          <a:ln w="15240">
             <a:solidFill>
               <a:srgbClr val="CBD5E1"/>
             </a:solidFill>
@@ -6420,8 +6500,8 @@
         </p:nvSpPr>
         <p:spPr>
           <a:xfrm>
-            <a:off x="6446520" y="4023360"/>
-            <a:ext cx="4663440" cy="1737360"/>
+            <a:off x="6446520" y="4050792"/>
+            <a:ext cx="4754880" cy="2093976"/>
           </a:xfrm>
           <a:prstGeom prst="rect">
             <a:avLst/>
@@ -6438,26 +6518,44 @@
               <a:spcAft>
                 <a:spcPts val="600"/>
               </a:spcAft>
-              <a:defRPr sz="1300" b="1">
+              <a:defRPr sz="1600" b="1">
                 <a:solidFill>
                   <a:srgbClr val="1E3A8A"/>
                 </a:solidFill>
               </a:defRPr>
             </a:pPr>
             <a:r>
-              <a:t>4. Lack of Credible Verification</a:t>
-            </a:r>
-          </a:p>
-          <a:p>
-            <a:pPr>
-              <a:defRPr sz="1000">
+              <a:t>4. Unverified 'Honor-System' Checklists</a:t>
+            </a:r>
+          </a:p>
+          <a:p>
+            <a:pPr>
+              <a:spcAft>
+                <a:spcPts val="400"/>
+              </a:spcAft>
+              <a:defRPr sz="1200">
                 <a:solidFill>
                   <a:srgbClr val="334155"/>
                 </a:solidFill>
               </a:defRPr>
             </a:pPr>
             <a:r>
-              <a:t>Most platforms rely on unchecked honor-system checkmarks. There is no automated evaluation to confirm whether a student has genuinely understood the underlying concepts.</a:t>
+              <a:t>• Mainstream platforms rely on self-marked checkboxes or passive video playback with zero objective evaluation.</a:t>
+            </a:r>
+          </a:p>
+          <a:p>
+            <a:pPr>
+              <a:spcAft>
+                <a:spcPts val="400"/>
+              </a:spcAft>
+              <a:defRPr sz="1200">
+                <a:solidFill>
+                  <a:srgbClr val="334155"/>
+                </a:solidFill>
+              </a:defRPr>
+            </a:pPr>
+            <a:r>
+              <a:t>• Fails to guarantee conceptual understanding, creating a false sense of competence without employer-verifiable proof.</a:t>
             </a:r>
           </a:p>
         </p:txBody>
@@ -6488,8 +6586,8 @@
         </p:nvSpPr>
         <p:spPr>
           <a:xfrm>
-            <a:off x="731520" y="365760"/>
-            <a:ext cx="10515600" cy="320040"/>
+            <a:off x="731520" y="274320"/>
+            <a:ext cx="10728655" cy="320040"/>
           </a:xfrm>
           <a:prstGeom prst="rect">
             <a:avLst/>
@@ -6503,7 +6601,7 @@
           <a:lstStyle/>
           <a:p>
             <a:pPr>
-              <a:defRPr sz="1000" b="1">
+              <a:defRPr sz="1100" b="1">
                 <a:solidFill>
                   <a:srgbClr val="0284C7"/>
                 </a:solidFill>
@@ -6523,8 +6621,8 @@
         </p:nvSpPr>
         <p:spPr>
           <a:xfrm>
-            <a:off x="731520" y="640080"/>
-            <a:ext cx="10515600" cy="502920"/>
+            <a:off x="731520" y="566928"/>
+            <a:ext cx="10728655" cy="502920"/>
           </a:xfrm>
           <a:prstGeom prst="rect">
             <a:avLst/>
@@ -6538,7 +6636,7 @@
           <a:lstStyle/>
           <a:p>
             <a:pPr>
-              <a:defRPr sz="2200" b="1">
+              <a:defRPr sz="2400" b="1">
                 <a:solidFill>
                   <a:srgbClr val="1E3A8A"/>
                 </a:solidFill>
@@ -6558,7 +6656,7 @@
         </p:nvSpPr>
         <p:spPr>
           <a:xfrm>
-            <a:off x="731520" y="1188720"/>
+            <a:off x="731520" y="1115568"/>
             <a:ext cx="10728655" cy="18288"/>
           </a:xfrm>
           <a:prstGeom prst="rect">
@@ -6603,7 +6701,7 @@
         </p:nvSpPr>
         <p:spPr>
           <a:xfrm>
-            <a:off x="731520" y="6400800"/>
+            <a:off x="731520" y="6446520"/>
             <a:ext cx="10728655" cy="274320"/>
           </a:xfrm>
           <a:prstGeom prst="rect">
@@ -6618,7 +6716,7 @@
           <a:lstStyle/>
           <a:p>
             <a:pPr>
-              <a:defRPr sz="900">
+              <a:defRPr sz="1000">
                 <a:solidFill>
                   <a:srgbClr val="94A3B8"/>
                 </a:solidFill>
@@ -6638,8 +6736,8 @@
         </p:nvSpPr>
         <p:spPr>
           <a:xfrm>
-            <a:off x="731520" y="1463040"/>
-            <a:ext cx="5120640" cy="4480560"/>
+            <a:off x="731520" y="1298448"/>
+            <a:ext cx="5212080" cy="4983480"/>
           </a:xfrm>
           <a:prstGeom prst="roundRect">
             <a:avLst/>
@@ -6647,7 +6745,7 @@
           <a:solidFill>
             <a:srgbClr val="F8FAFC"/>
           </a:solidFill>
-          <a:ln w="12700">
+          <a:ln w="15240">
             <a:solidFill>
               <a:srgbClr val="CBD5E1"/>
             </a:solidFill>
@@ -6683,8 +6781,8 @@
         </p:nvSpPr>
         <p:spPr>
           <a:xfrm>
-            <a:off x="960120" y="1691640"/>
-            <a:ext cx="4663440" cy="4023360"/>
+            <a:off x="960120" y="1481328"/>
+            <a:ext cx="4754880" cy="4617720"/>
           </a:xfrm>
           <a:prstGeom prst="rect">
             <a:avLst/>
@@ -6699,9 +6797,9 @@
           <a:p>
             <a:pPr>
               <a:spcAft>
-                <a:spcPts val="800"/>
-              </a:spcAft>
-              <a:defRPr sz="1400" b="1">
+                <a:spcPts val="300"/>
+              </a:spcAft>
+              <a:defRPr sz="1700" b="1">
                 <a:solidFill>
                   <a:srgbClr val="1E3A8A"/>
                 </a:solidFill>
@@ -6714,76 +6812,151 @@
           <a:p>
             <a:pPr>
               <a:spcAft>
-                <a:spcPts val="400"/>
-              </a:spcAft>
-              <a:defRPr sz="1000">
+                <a:spcPts val="1000"/>
+              </a:spcAft>
+              <a:defRPr sz="1100" b="1">
+                <a:solidFill>
+                  <a:srgbClr val="0284C7"/>
+                </a:solidFill>
+              </a:defRPr>
+            </a:pPr>
+            <a:r>
+              <a:t>Structured Pedagogical Decomposition</a:t>
+            </a:r>
+          </a:p>
+          <a:p>
+            <a:pPr>
+              <a:defRPr b="1" sz="1300">
                 <a:solidFill>
                   <a:srgbClr val="0F172A"/>
                 </a:solidFill>
               </a:defRPr>
             </a:pPr>
             <a:r>
-              <a:t>• Tier 1: Career Track: Target industry role (Full Stack, DevOps, AI/ML).</a:t>
-            </a:r>
-          </a:p>
-          <a:p>
-            <a:pPr>
-              <a:spcAft>
-                <a:spcPts val="400"/>
-              </a:spcAft>
-              <a:defRPr sz="1000">
+              <a:t>• Tier 1: Target Career Tracks</a:t>
+            </a:r>
+          </a:p>
+          <a:p>
+            <a:pPr>
+              <a:spcAft>
+                <a:spcPts val="700"/>
+              </a:spcAft>
+              <a:defRPr sz="1150">
+                <a:solidFill>
+                  <a:srgbClr val="334155"/>
+                </a:solidFill>
+              </a:defRPr>
+            </a:pPr>
+            <a:r>
+              <a:t>   6 Curated industry role pathways (Full Stack, DevOps, AI/ML, Cloud, Data Science, Cyber Security).</a:t>
+            </a:r>
+          </a:p>
+          <a:p>
+            <a:pPr>
+              <a:defRPr b="1" sz="1300">
                 <a:solidFill>
                   <a:srgbClr val="0F172A"/>
                 </a:solidFill>
               </a:defRPr>
             </a:pPr>
             <a:r>
-              <a:t>• Tier 2: Skills Catalog: Atomic competencies with prerequisites (e.g. Git, Docker).</a:t>
-            </a:r>
-          </a:p>
-          <a:p>
-            <a:pPr>
-              <a:spcAft>
-                <a:spcPts val="400"/>
-              </a:spcAft>
-              <a:defRPr sz="1000">
+              <a:t>• Tier 2: Atomic Skills Catalog</a:t>
+            </a:r>
+          </a:p>
+          <a:p>
+            <a:pPr>
+              <a:spcAft>
+                <a:spcPts val="700"/>
+              </a:spcAft>
+              <a:defRPr sz="1150">
+                <a:solidFill>
+                  <a:srgbClr val="334155"/>
+                </a:solidFill>
+              </a:defRPr>
+            </a:pPr>
+            <a:r>
+              <a:t>   Component skills linked via explicit topological mathematical prerequisite dependencies (DAG).</a:t>
+            </a:r>
+          </a:p>
+          <a:p>
+            <a:pPr>
+              <a:defRPr b="1" sz="1300">
                 <a:solidFill>
                   <a:srgbClr val="0F172A"/>
                 </a:solidFill>
               </a:defRPr>
             </a:pPr>
             <a:r>
-              <a:t>• Tier 3: Course Syllabus: Structured curriculum connected 1:1 with each skill.</a:t>
-            </a:r>
-          </a:p>
-          <a:p>
-            <a:pPr>
-              <a:spcAft>
-                <a:spcPts val="400"/>
-              </a:spcAft>
-              <a:defRPr sz="1000">
+              <a:t>• Tier 3: Course Syllabus</a:t>
+            </a:r>
+          </a:p>
+          <a:p>
+            <a:pPr>
+              <a:spcAft>
+                <a:spcPts val="700"/>
+              </a:spcAft>
+              <a:defRPr sz="1150">
+                <a:solidFill>
+                  <a:srgbClr val="334155"/>
+                </a:solidFill>
+              </a:defRPr>
+            </a:pPr>
+            <a:r>
+              <a:t>   Comprehensive curriculum connected 1:1 with each roadmap skill node, maintaining clean domain boundaries.</a:t>
+            </a:r>
+          </a:p>
+          <a:p>
+            <a:pPr>
+              <a:defRPr b="1" sz="1300">
                 <a:solidFill>
                   <a:srgbClr val="0F172A"/>
                 </a:solidFill>
               </a:defRPr>
             </a:pPr>
             <a:r>
-              <a:t>• Tier 4: Modules &amp; Levels: Progressive levels: Beginner, Intermediate, Advanced.</a:t>
-            </a:r>
-          </a:p>
-          <a:p>
-            <a:pPr>
-              <a:spcAft>
-                <a:spcPts val="400"/>
-              </a:spcAft>
-              <a:defRPr sz="1000">
+              <a:t>• Tier 4: Staged Progression Levels</a:t>
+            </a:r>
+          </a:p>
+          <a:p>
+            <a:pPr>
+              <a:spcAft>
+                <a:spcPts val="700"/>
+              </a:spcAft>
+              <a:defRPr sz="1150">
+                <a:solidFill>
+                  <a:srgbClr val="334155"/>
+                </a:solidFill>
+              </a:defRPr>
+            </a:pPr>
+            <a:r>
+              <a:t>   Strict tiered progression across Beginner ➔ Intermediate ➔ Advanced modules enforcing gradual mastery.</a:t>
+            </a:r>
+          </a:p>
+          <a:p>
+            <a:pPr>
+              <a:defRPr b="1" sz="1300">
                 <a:solidFill>
                   <a:srgbClr val="0F172A"/>
                 </a:solidFill>
               </a:defRPr>
             </a:pPr>
             <a:r>
-              <a:t>• Tier 5: Atomic Lessons: Granular lessons with explanations &amp; runnable code.</a:t>
+              <a:t>• Tier 5: Granular Interactive Lessons</a:t>
+            </a:r>
+          </a:p>
+          <a:p>
+            <a:pPr>
+              <a:spcAft>
+                <a:spcPts val="700"/>
+              </a:spcAft>
+              <a:defRPr sz="1150">
+                <a:solidFill>
+                  <a:srgbClr val="334155"/>
+                </a:solidFill>
+              </a:defRPr>
+            </a:pPr>
+            <a:r>
+              <a:t>   Bite-sized practical study units featuring clear theory, key takeaways, and runnable code examples.</a:t>
             </a:r>
           </a:p>
         </p:txBody>
@@ -6796,8 +6969,8 @@
         </p:nvSpPr>
         <p:spPr>
           <a:xfrm>
-            <a:off x="6217920" y="1463040"/>
-            <a:ext cx="5120640" cy="4480560"/>
+            <a:off x="6217920" y="1298448"/>
+            <a:ext cx="5212080" cy="4983480"/>
           </a:xfrm>
           <a:prstGeom prst="roundRect">
             <a:avLst/>
@@ -6805,7 +6978,7 @@
           <a:solidFill>
             <a:srgbClr val="F8FAFC"/>
           </a:solidFill>
-          <a:ln w="12700">
+          <a:ln w="15240">
             <a:solidFill>
               <a:srgbClr val="CBD5E1"/>
             </a:solidFill>
@@ -6841,8 +7014,8 @@
         </p:nvSpPr>
         <p:spPr>
           <a:xfrm>
-            <a:off x="6446520" y="1691640"/>
-            <a:ext cx="4663440" cy="4023360"/>
+            <a:off x="6446520" y="1481328"/>
+            <a:ext cx="4754880" cy="4617720"/>
           </a:xfrm>
           <a:prstGeom prst="rect">
             <a:avLst/>
@@ -6857,9 +7030,9 @@
           <a:p>
             <a:pPr>
               <a:spcAft>
-                <a:spcPts val="800"/>
-              </a:spcAft>
-              <a:defRPr sz="1400" b="1">
+                <a:spcPts val="300"/>
+              </a:spcAft>
+              <a:defRPr sz="1700" b="1">
                 <a:solidFill>
                   <a:srgbClr val="1E3A8A"/>
                 </a:solidFill>
@@ -6871,110 +7044,125 @@
           </a:p>
           <a:p>
             <a:pPr>
-              <a:defRPr b="1" sz="1050">
+              <a:spcAft>
+                <a:spcPts val="1000"/>
+              </a:spcAft>
+              <a:defRPr sz="1100" b="1">
                 <a:solidFill>
                   <a:srgbClr val="0284C7"/>
                 </a:solidFill>
               </a:defRPr>
             </a:pPr>
             <a:r>
-              <a:t>✓ Topological Prerequisite Engine: </a:t>
-            </a:r>
-          </a:p>
-          <a:p>
-            <a:pPr>
-              <a:spcAft>
-                <a:spcPts val="600"/>
-              </a:spcAft>
-              <a:defRPr sz="950">
+              <a:t>Platform Engineering Differentiators</a:t>
+            </a:r>
+          </a:p>
+          <a:p>
+            <a:pPr>
+              <a:defRPr b="1" sz="1300">
+                <a:solidFill>
+                  <a:srgbClr val="1E3A8A"/>
+                </a:solidFill>
+              </a:defRPr>
+            </a:pPr>
+            <a:r>
+              <a:t>✓ Topological Prerequisite Engine</a:t>
+            </a:r>
+          </a:p>
+          <a:p>
+            <a:pPr>
+              <a:spcAft>
+                <a:spcPts val="1000"/>
+              </a:spcAft>
+              <a:defRPr sz="1150">
                 <a:solidFill>
                   <a:srgbClr val="334155"/>
                 </a:solidFill>
               </a:defRPr>
             </a:pPr>
             <a:r>
-              <a:t>   Advanced phases lock until fundamental skills are completed.</a:t>
-            </a:r>
-          </a:p>
-          <a:p>
-            <a:pPr>
-              <a:defRPr b="1" sz="1050">
-                <a:solidFill>
-                  <a:srgbClr val="0284C7"/>
-                </a:solidFill>
-              </a:defRPr>
-            </a:pPr>
-            <a:r>
-              <a:t>✓ Onboarding Baseline Evaluation: </a:t>
-            </a:r>
-          </a:p>
-          <a:p>
-            <a:pPr>
-              <a:spcAft>
-                <a:spcPts val="600"/>
-              </a:spcAft>
-              <a:defRPr sz="950">
+              <a:t>   Advanced phases lock strictly until foundational skills reach 100% completion, eliminating premature tool hopping.</a:t>
+            </a:r>
+          </a:p>
+          <a:p>
+            <a:pPr>
+              <a:defRPr b="1" sz="1300">
+                <a:solidFill>
+                  <a:srgbClr val="1E3A8A"/>
+                </a:solidFill>
+              </a:defRPr>
+            </a:pPr>
+            <a:r>
+              <a:t>✓ Adaptive Onboarding Baseline</a:t>
+            </a:r>
+          </a:p>
+          <a:p>
+            <a:pPr>
+              <a:spcAft>
+                <a:spcPts val="1000"/>
+              </a:spcAft>
+              <a:defRPr sz="1150">
                 <a:solidFill>
                   <a:srgbClr val="334155"/>
                 </a:solidFill>
               </a:defRPr>
             </a:pPr>
             <a:r>
-              <a:t>   Adapts the graph to student degree, stream, and declared knowledge.</a:t>
-            </a:r>
-          </a:p>
-          <a:p>
-            <a:pPr>
-              <a:defRPr b="1" sz="1050">
-                <a:solidFill>
-                  <a:srgbClr val="0284C7"/>
-                </a:solidFill>
-              </a:defRPr>
-            </a:pPr>
-            <a:r>
-              <a:t>✓ Universal Cross-Track Credit: </a:t>
-            </a:r>
-          </a:p>
-          <a:p>
-            <a:pPr>
-              <a:spcAft>
-                <a:spcPts val="600"/>
-              </a:spcAft>
-              <a:defRPr sz="950">
+              <a:t>   Calibrates roadmap starting points based on student academic degree, stream, and declared baseline knowledge.</a:t>
+            </a:r>
+          </a:p>
+          <a:p>
+            <a:pPr>
+              <a:defRPr b="1" sz="1300">
+                <a:solidFill>
+                  <a:srgbClr val="1E3A8A"/>
+                </a:solidFill>
+              </a:defRPr>
+            </a:pPr>
+            <a:r>
+              <a:t>✓ Universal Cross-Track Credit</a:t>
+            </a:r>
+          </a:p>
+          <a:p>
+            <a:pPr>
+              <a:spcAft>
+                <a:spcPts val="1000"/>
+              </a:spcAft>
+              <a:defRPr sz="1150">
                 <a:solidFill>
                   <a:srgbClr val="334155"/>
                 </a:solidFill>
               </a:defRPr>
             </a:pPr>
             <a:r>
-              <a:t>   Skills mastered in one track automatically count in all other tracks.</a:t>
-            </a:r>
-          </a:p>
-          <a:p>
-            <a:pPr>
-              <a:defRPr b="1" sz="1050">
-                <a:solidFill>
-                  <a:srgbClr val="0284C7"/>
-                </a:solidFill>
-              </a:defRPr>
-            </a:pPr>
-            <a:r>
-              <a:t>✓ Proof-of-Skill Validation: </a:t>
-            </a:r>
-          </a:p>
-          <a:p>
-            <a:pPr>
-              <a:spcAft>
-                <a:spcPts val="600"/>
-              </a:spcAft>
-              <a:defRPr sz="950">
+              <a:t>   Canonical skill IDs ensure skills mastered in one track immediately reflect across all adjacent tracks.</a:t>
+            </a:r>
+          </a:p>
+          <a:p>
+            <a:pPr>
+              <a:defRPr b="1" sz="1300">
+                <a:solidFill>
+                  <a:srgbClr val="1E3A8A"/>
+                </a:solidFill>
+              </a:defRPr>
+            </a:pPr>
+            <a:r>
+              <a:t>✓ Server-Graded Proof-of-Skill</a:t>
+            </a:r>
+          </a:p>
+          <a:p>
+            <a:pPr>
+              <a:spcAft>
+                <a:spcPts val="1000"/>
+              </a:spcAft>
+              <a:defRPr sz="1150">
                 <a:solidFill>
                   <a:srgbClr val="334155"/>
                 </a:solidFill>
               </a:defRPr>
             </a:pPr>
             <a:r>
-              <a:t>   Server-graded micro-quizzes award verifiable completion badges.</a:t>
+              <a:t>   Tamper-proof micro-quizzes evaluate advanced phase learners and award verifiable skill badges (🛡️).</a:t>
             </a:r>
           </a:p>
         </p:txBody>
@@ -7005,8 +7193,8 @@
         </p:nvSpPr>
         <p:spPr>
           <a:xfrm>
-            <a:off x="731520" y="365760"/>
-            <a:ext cx="10515600" cy="320040"/>
+            <a:off x="731520" y="274320"/>
+            <a:ext cx="10728655" cy="320040"/>
           </a:xfrm>
           <a:prstGeom prst="rect">
             <a:avLst/>
@@ -7020,7 +7208,7 @@
           <a:lstStyle/>
           <a:p>
             <a:pPr>
-              <a:defRPr sz="1000" b="1">
+              <a:defRPr sz="1100" b="1">
                 <a:solidFill>
                   <a:srgbClr val="0284C7"/>
                 </a:solidFill>
@@ -7040,8 +7228,8 @@
         </p:nvSpPr>
         <p:spPr>
           <a:xfrm>
-            <a:off x="731520" y="640080"/>
-            <a:ext cx="10515600" cy="502920"/>
+            <a:off x="731520" y="566928"/>
+            <a:ext cx="10728655" cy="502920"/>
           </a:xfrm>
           <a:prstGeom prst="rect">
             <a:avLst/>
@@ -7055,7 +7243,7 @@
           <a:lstStyle/>
           <a:p>
             <a:pPr>
-              <a:defRPr sz="2200" b="1">
+              <a:defRPr sz="2400" b="1">
                 <a:solidFill>
                   <a:srgbClr val="1E3A8A"/>
                 </a:solidFill>
@@ -7075,7 +7263,7 @@
         </p:nvSpPr>
         <p:spPr>
           <a:xfrm>
-            <a:off x="731520" y="1188720"/>
+            <a:off x="731520" y="1115568"/>
             <a:ext cx="10728655" cy="18288"/>
           </a:xfrm>
           <a:prstGeom prst="rect">
@@ -7120,7 +7308,7 @@
         </p:nvSpPr>
         <p:spPr>
           <a:xfrm>
-            <a:off x="731520" y="6400800"/>
+            <a:off x="731520" y="6446520"/>
             <a:ext cx="10728655" cy="274320"/>
           </a:xfrm>
           <a:prstGeom prst="rect">
@@ -7135,7 +7323,7 @@
           <a:lstStyle/>
           <a:p>
             <a:pPr>
-              <a:defRPr sz="900">
+              <a:defRPr sz="1000">
                 <a:solidFill>
                   <a:srgbClr val="94A3B8"/>
                 </a:solidFill>
@@ -7156,8 +7344,8 @@
           <p:nvPr/>
         </p:nvGraphicFramePr>
         <p:xfrm>
-          <a:off x="731520" y="1463040"/>
-          <a:ext cx="10728655" cy="4389120"/>
+          <a:off x="731520" y="1298448"/>
+          <a:ext cx="10728655" cy="4983480"/>
         </p:xfrm>
         <a:graphic>
           <a:graphicData uri="http://schemas.openxmlformats.org/drawingml/2006/table">
@@ -7171,14 +7359,14 @@
                 <a:gridCol w="2377440"/>
                 <a:gridCol w="3047695"/>
               </a:tblGrid>
-              <a:tr h="627017">
+              <a:tr h="711925">
                 <a:tc>
                   <a:txBody>
                     <a:bodyPr/>
                     <a:lstStyle/>
                     <a:p>
                       <a:pPr algn="ctr">
-                        <a:defRPr b="1" sz="1100">
+                        <a:defRPr b="1" sz="1300">
                           <a:solidFill>
                             <a:srgbClr val="FFFFFF"/>
                           </a:solidFill>
@@ -7201,7 +7389,7 @@
                     <a:lstStyle/>
                     <a:p>
                       <a:pPr algn="ctr">
-                        <a:defRPr b="1" sz="1100">
+                        <a:defRPr b="1" sz="1300">
                           <a:solidFill>
                             <a:srgbClr val="FFFFFF"/>
                           </a:solidFill>
@@ -7224,7 +7412,7 @@
                     <a:lstStyle/>
                     <a:p>
                       <a:pPr algn="ctr">
-                        <a:defRPr b="1" sz="1100">
+                        <a:defRPr b="1" sz="1300">
                           <a:solidFill>
                             <a:srgbClr val="FFFFFF"/>
                           </a:solidFill>
@@ -7247,7 +7435,7 @@
                     <a:lstStyle/>
                     <a:p>
                       <a:pPr algn="ctr">
-                        <a:defRPr b="1" sz="1100">
+                        <a:defRPr b="1" sz="1300">
                           <a:solidFill>
                             <a:srgbClr val="FFFFFF"/>
                           </a:solidFill>
@@ -7265,14 +7453,14 @@
                   </a:tcPr>
                 </a:tc>
               </a:tr>
-              <a:tr h="627017">
+              <a:tr h="711925">
                 <a:tc>
                   <a:txBody>
                     <a:bodyPr/>
                     <a:lstStyle/>
                     <a:p>
                       <a:pPr>
-                        <a:defRPr sz="1000">
+                        <a:defRPr sz="1150">
                           <a:solidFill>
                             <a:srgbClr val="0F172A"/>
                           </a:solidFill>
@@ -7295,7 +7483,7 @@
                     <a:lstStyle/>
                     <a:p>
                       <a:pPr algn="ctr">
-                        <a:defRPr sz="1000">
+                        <a:defRPr sz="1150">
                           <a:solidFill>
                             <a:srgbClr val="0F172A"/>
                           </a:solidFill>
@@ -7318,7 +7506,7 @@
                     <a:lstStyle/>
                     <a:p>
                       <a:pPr algn="ctr">
-                        <a:defRPr sz="1000">
+                        <a:defRPr sz="1150">
                           <a:solidFill>
                             <a:srgbClr val="0F172A"/>
                           </a:solidFill>
@@ -7341,7 +7529,7 @@
                     <a:lstStyle/>
                     <a:p>
                       <a:pPr algn="ctr">
-                        <a:defRPr sz="1000" b="1">
+                        <a:defRPr sz="1150" b="1">
                           <a:solidFill>
                             <a:srgbClr val="1E3A8A"/>
                           </a:solidFill>
@@ -7354,19 +7542,19 @@
                   </a:txBody>
                   <a:tcPr>
                     <a:solidFill>
-                      <a:srgbClr val="F8FAFC"/>
+                      <a:srgbClr val="EFF6FF"/>
                     </a:solidFill>
                   </a:tcPr>
                 </a:tc>
               </a:tr>
-              <a:tr h="627017">
+              <a:tr h="711925">
                 <a:tc>
                   <a:txBody>
                     <a:bodyPr/>
                     <a:lstStyle/>
                     <a:p>
                       <a:pPr>
-                        <a:defRPr sz="1000">
+                        <a:defRPr sz="1150">
                           <a:solidFill>
                             <a:srgbClr val="0F172A"/>
                           </a:solidFill>
@@ -7389,7 +7577,7 @@
                     <a:lstStyle/>
                     <a:p>
                       <a:pPr algn="ctr">
-                        <a:defRPr sz="1000">
+                        <a:defRPr sz="1150">
                           <a:solidFill>
                             <a:srgbClr val="0F172A"/>
                           </a:solidFill>
@@ -7412,7 +7600,7 @@
                     <a:lstStyle/>
                     <a:p>
                       <a:pPr algn="ctr">
-                        <a:defRPr sz="1000">
+                        <a:defRPr sz="1150">
                           <a:solidFill>
                             <a:srgbClr val="0F172A"/>
                           </a:solidFill>
@@ -7435,7 +7623,7 @@
                     <a:lstStyle/>
                     <a:p>
                       <a:pPr algn="ctr">
-                        <a:defRPr sz="1000" b="1">
+                        <a:defRPr sz="1150" b="1">
                           <a:solidFill>
                             <a:srgbClr val="1E3A8A"/>
                           </a:solidFill>
@@ -7448,19 +7636,19 @@
                   </a:txBody>
                   <a:tcPr>
                     <a:solidFill>
-                      <a:srgbClr val="FFFFFF"/>
+                      <a:srgbClr val="EFF6FF"/>
                     </a:solidFill>
                   </a:tcPr>
                 </a:tc>
               </a:tr>
-              <a:tr h="627017">
+              <a:tr h="711925">
                 <a:tc>
                   <a:txBody>
                     <a:bodyPr/>
                     <a:lstStyle/>
                     <a:p>
                       <a:pPr>
-                        <a:defRPr sz="1000">
+                        <a:defRPr sz="1150">
                           <a:solidFill>
                             <a:srgbClr val="0F172A"/>
                           </a:solidFill>
@@ -7483,7 +7671,7 @@
                     <a:lstStyle/>
                     <a:p>
                       <a:pPr algn="ctr">
-                        <a:defRPr sz="1000">
+                        <a:defRPr sz="1150">
                           <a:solidFill>
                             <a:srgbClr val="0F172A"/>
                           </a:solidFill>
@@ -7506,7 +7694,7 @@
                     <a:lstStyle/>
                     <a:p>
                       <a:pPr algn="ctr">
-                        <a:defRPr sz="1000">
+                        <a:defRPr sz="1150">
                           <a:solidFill>
                             <a:srgbClr val="0F172A"/>
                           </a:solidFill>
@@ -7529,32 +7717,32 @@
                     <a:lstStyle/>
                     <a:p>
                       <a:pPr algn="ctr">
-                        <a:defRPr sz="1000" b="1">
+                        <a:defRPr sz="1150" b="1">
                           <a:solidFill>
                             <a:srgbClr val="1E3A8A"/>
                           </a:solidFill>
                         </a:defRPr>
                       </a:pPr>
                       <a:r>
-                        <a:t>Onboarding + Dynamic Gap Calc</a:t>
+                        <a:t>Stream, Degree &amp; Baseline Profiling</a:t>
                       </a:r>
                     </a:p>
                   </a:txBody>
                   <a:tcPr>
                     <a:solidFill>
-                      <a:srgbClr val="F8FAFC"/>
+                      <a:srgbClr val="EFF6FF"/>
                     </a:solidFill>
                   </a:tcPr>
                 </a:tc>
               </a:tr>
-              <a:tr h="627017">
+              <a:tr h="711925">
                 <a:tc>
                   <a:txBody>
                     <a:bodyPr/>
                     <a:lstStyle/>
                     <a:p>
                       <a:pPr>
-                        <a:defRPr sz="1000">
+                        <a:defRPr sz="1150">
                           <a:solidFill>
                             <a:srgbClr val="0F172A"/>
                           </a:solidFill>
@@ -7577,7 +7765,7 @@
                     <a:lstStyle/>
                     <a:p>
                       <a:pPr algn="ctr">
-                        <a:defRPr sz="1000">
+                        <a:defRPr sz="1150">
                           <a:solidFill>
                             <a:srgbClr val="0F172A"/>
                           </a:solidFill>
@@ -7600,7 +7788,7 @@
                     <a:lstStyle/>
                     <a:p>
                       <a:pPr algn="ctr">
-                        <a:defRPr sz="1000">
+                        <a:defRPr sz="1150">
                           <a:solidFill>
                             <a:srgbClr val="0F172A"/>
                           </a:solidFill>
@@ -7623,7 +7811,7 @@
                     <a:lstStyle/>
                     <a:p>
                       <a:pPr algn="ctr">
-                        <a:defRPr sz="1000" b="1">
+                        <a:defRPr sz="1150" b="1">
                           <a:solidFill>
                             <a:srgbClr val="1E3A8A"/>
                           </a:solidFill>
@@ -7636,19 +7824,19 @@
                   </a:txBody>
                   <a:tcPr>
                     <a:solidFill>
-                      <a:srgbClr val="FFFFFF"/>
+                      <a:srgbClr val="EFF6FF"/>
                     </a:solidFill>
                   </a:tcPr>
                 </a:tc>
               </a:tr>
-              <a:tr h="627017">
+              <a:tr h="711925">
                 <a:tc>
                   <a:txBody>
                     <a:bodyPr/>
                     <a:lstStyle/>
                     <a:p>
                       <a:pPr>
-                        <a:defRPr sz="1000">
+                        <a:defRPr sz="1150">
                           <a:solidFill>
                             <a:srgbClr val="0F172A"/>
                           </a:solidFill>
@@ -7671,7 +7859,7 @@
                     <a:lstStyle/>
                     <a:p>
                       <a:pPr algn="ctr">
-                        <a:defRPr sz="1000">
+                        <a:defRPr sz="1150">
                           <a:solidFill>
                             <a:srgbClr val="0F172A"/>
                           </a:solidFill>
@@ -7694,7 +7882,7 @@
                     <a:lstStyle/>
                     <a:p>
                       <a:pPr algn="ctr">
-                        <a:defRPr sz="1000">
+                        <a:defRPr sz="1150">
                           <a:solidFill>
                             <a:srgbClr val="0F172A"/>
                           </a:solidFill>
@@ -7717,32 +7905,32 @@
                     <a:lstStyle/>
                     <a:p>
                       <a:pPr algn="ctr">
-                        <a:defRPr sz="1000" b="1">
+                        <a:defRPr sz="1150" b="1">
                           <a:solidFill>
                             <a:srgbClr val="1E3A8A"/>
                           </a:solidFill>
                         </a:defRPr>
                       </a:pPr>
                       <a:r>
-                        <a:t>Server-Graded Validation Quiz</a:t>
+                        <a:t>Server-Graded Anti-Cheat Quizzes</a:t>
                       </a:r>
                     </a:p>
                   </a:txBody>
                   <a:tcPr>
                     <a:solidFill>
-                      <a:srgbClr val="F8FAFC"/>
+                      <a:srgbClr val="EFF6FF"/>
                     </a:solidFill>
                   </a:tcPr>
                 </a:tc>
               </a:tr>
-              <a:tr h="627018">
+              <a:tr h="711930">
                 <a:tc>
                   <a:txBody>
                     <a:bodyPr/>
                     <a:lstStyle/>
                     <a:p>
                       <a:pPr>
-                        <a:defRPr sz="1000">
+                        <a:defRPr sz="1150">
                           <a:solidFill>
                             <a:srgbClr val="0F172A"/>
                           </a:solidFill>
@@ -7765,7 +7953,7 @@
                     <a:lstStyle/>
                     <a:p>
                       <a:pPr algn="ctr">
-                        <a:defRPr sz="1000">
+                        <a:defRPr sz="1150">
                           <a:solidFill>
                             <a:srgbClr val="0F172A"/>
                           </a:solidFill>
@@ -7788,7 +7976,7 @@
                     <a:lstStyle/>
                     <a:p>
                       <a:pPr algn="ctr">
-                        <a:defRPr sz="1000">
+                        <a:defRPr sz="1150">
                           <a:solidFill>
                             <a:srgbClr val="0F172A"/>
                           </a:solidFill>
@@ -7811,20 +7999,20 @@
                     <a:lstStyle/>
                     <a:p>
                       <a:pPr algn="ctr">
-                        <a:defRPr sz="1000" b="1">
+                        <a:defRPr sz="1150" b="1">
                           <a:solidFill>
                             <a:srgbClr val="1E3A8A"/>
                           </a:solidFill>
                         </a:defRPr>
                       </a:pPr>
                       <a:r>
-                        <a:t>Instant modal switch with live update</a:t>
+                        <a:t>Instant Modal Switch with Live State</a:t>
                       </a:r>
                     </a:p>
                   </a:txBody>
                   <a:tcPr>
                     <a:solidFill>
-                      <a:srgbClr val="FFFFFF"/>
+                      <a:srgbClr val="EFF6FF"/>
                     </a:solidFill>
                   </a:tcPr>
                 </a:tc>
@@ -7859,8 +8047,8 @@
         </p:nvSpPr>
         <p:spPr>
           <a:xfrm>
-            <a:off x="731520" y="365760"/>
-            <a:ext cx="10515600" cy="320040"/>
+            <a:off x="731520" y="274320"/>
+            <a:ext cx="10728655" cy="320040"/>
           </a:xfrm>
           <a:prstGeom prst="rect">
             <a:avLst/>
@@ -7874,7 +8062,7 @@
           <a:lstStyle/>
           <a:p>
             <a:pPr>
-              <a:defRPr sz="1000" b="1">
+              <a:defRPr sz="1100" b="1">
                 <a:solidFill>
                   <a:srgbClr val="0284C7"/>
                 </a:solidFill>
@@ -7894,8 +8082,8 @@
         </p:nvSpPr>
         <p:spPr>
           <a:xfrm>
-            <a:off x="731520" y="640080"/>
-            <a:ext cx="10515600" cy="502920"/>
+            <a:off x="731520" y="566928"/>
+            <a:ext cx="10728655" cy="502920"/>
           </a:xfrm>
           <a:prstGeom prst="rect">
             <a:avLst/>
@@ -7909,7 +8097,7 @@
           <a:lstStyle/>
           <a:p>
             <a:pPr>
-              <a:defRPr sz="2200" b="1">
+              <a:defRPr sz="2400" b="1">
                 <a:solidFill>
                   <a:srgbClr val="1E3A8A"/>
                 </a:solidFill>
@@ -7929,7 +8117,7 @@
         </p:nvSpPr>
         <p:spPr>
           <a:xfrm>
-            <a:off x="731520" y="1188720"/>
+            <a:off x="731520" y="1115568"/>
             <a:ext cx="10728655" cy="18288"/>
           </a:xfrm>
           <a:prstGeom prst="rect">
@@ -7974,7 +8162,7 @@
         </p:nvSpPr>
         <p:spPr>
           <a:xfrm>
-            <a:off x="731520" y="6400800"/>
+            <a:off x="731520" y="6446520"/>
             <a:ext cx="10728655" cy="274320"/>
           </a:xfrm>
           <a:prstGeom prst="rect">
@@ -7989,7 +8177,7 @@
           <a:lstStyle/>
           <a:p>
             <a:pPr>
-              <a:defRPr sz="900">
+              <a:defRPr sz="1000">
                 <a:solidFill>
                   <a:srgbClr val="94A3B8"/>
                 </a:solidFill>
@@ -7997,13 +8185,48 @@
             </a:pPr>
             <a:r>
               <a:t>Career Graph — Project Presentation  |  Group No. 06  |  Department of Computer Engineering / IT</a:t>
+            </a:r>
+          </a:p>
+        </p:txBody>
+      </p:sp>
+      <p:sp>
+        <p:nvSpPr>
+          <p:cNvPr id="6" name="TextBox 5"/>
+          <p:cNvSpPr txBox="1"/>
+          <p:nvPr/>
+        </p:nvSpPr>
+        <p:spPr>
+          <a:xfrm>
+            <a:off x="731520" y="1280160"/>
+            <a:ext cx="5394960" cy="320040"/>
+          </a:xfrm>
+          <a:prstGeom prst="rect">
+            <a:avLst/>
+          </a:prstGeom>
+          <a:noFill/>
+        </p:spPr>
+        <p:txBody>
+          <a:bodyPr wrap="square" lIns="0" tIns="0" rIns="0" bIns="0">
+            <a:spAutoFit/>
+          </a:bodyPr>
+          <a:lstStyle/>
+          <a:p>
+            <a:pPr>
+              <a:defRPr sz="1200" b="1">
+                <a:solidFill>
+                  <a:srgbClr val="1E3A8A"/>
+                </a:solidFill>
+              </a:defRPr>
+            </a:pPr>
+            <a:r>
+              <a:t>Figure 1: Three-Tier Cloud Architecture Block Diagram</a:t>
             </a:r>
           </a:p>
         </p:txBody>
       </p:sp>
       <p:pic>
         <p:nvPicPr>
-          <p:cNvPr id="6" name="Picture 5" descr="system_architecture.png"/>
+          <p:cNvPr id="7" name="Picture 6" descr="system_architecture.png"/>
           <p:cNvPicPr>
             <a:picLocks noChangeAspect="1"/>
           </p:cNvPicPr>
@@ -8017,24 +8240,29 @@
         </p:blipFill>
         <p:spPr>
           <a:xfrm>
-            <a:off x="731520" y="1463040"/>
-            <a:ext cx="5669280" cy="3378662"/>
+            <a:off x="731520" y="1645920"/>
+            <a:ext cx="5394960" cy="4157584"/>
           </a:xfrm>
           <a:prstGeom prst="rect">
             <a:avLst/>
           </a:prstGeom>
+          <a:ln w="15240">
+            <a:solidFill>
+              <a:srgbClr val="CBD5E1"/>
+            </a:solidFill>
+          </a:ln>
         </p:spPr>
       </p:pic>
       <p:sp>
         <p:nvSpPr>
-          <p:cNvPr id="7" name="Rounded Rectangle 6"/>
+          <p:cNvPr id="8" name="Rounded Rectangle 7"/>
           <p:cNvSpPr/>
           <p:nvPr/>
         </p:nvSpPr>
         <p:spPr>
           <a:xfrm>
-            <a:off x="6675120" y="1463040"/>
-            <a:ext cx="4754880" cy="4480560"/>
+            <a:off x="6309360" y="1298448"/>
+            <a:ext cx="5150815" cy="4983480"/>
           </a:xfrm>
           <a:prstGeom prst="roundRect">
             <a:avLst/>
@@ -8042,7 +8270,7 @@
           <a:solidFill>
             <a:srgbClr val="F8FAFC"/>
           </a:solidFill>
-          <a:ln w="12700">
+          <a:ln w="15240">
             <a:solidFill>
               <a:srgbClr val="CBD5E1"/>
             </a:solidFill>
@@ -8072,14 +8300,14 @@
       </p:sp>
       <p:sp>
         <p:nvSpPr>
-          <p:cNvPr id="8" name="TextBox 7"/>
+          <p:cNvPr id="9" name="TextBox 8"/>
           <p:cNvSpPr txBox="1"/>
           <p:nvPr/>
         </p:nvSpPr>
         <p:spPr>
           <a:xfrm>
-            <a:off x="6903720" y="1691640"/>
-            <a:ext cx="4297680" cy="4023360"/>
+            <a:off x="6537960" y="1481328"/>
+            <a:ext cx="4663440" cy="4617720"/>
           </a:xfrm>
           <a:prstGeom prst="rect">
             <a:avLst/>
@@ -8094,124 +8322,139 @@
           <a:p>
             <a:pPr>
               <a:spcAft>
+                <a:spcPts val="300"/>
+              </a:spcAft>
+              <a:defRPr sz="1700" b="1">
+                <a:solidFill>
+                  <a:srgbClr val="1E3A8A"/>
+                </a:solidFill>
+              </a:defRPr>
+            </a:pPr>
+            <a:r>
+              <a:t>Architectural Tier Decomposition</a:t>
+            </a:r>
+          </a:p>
+          <a:p>
+            <a:pPr>
+              <a:spcAft>
+                <a:spcPts val="1000"/>
+              </a:spcAft>
+              <a:defRPr sz="1100" b="1">
+                <a:solidFill>
+                  <a:srgbClr val="0284C7"/>
+                </a:solidFill>
+              </a:defRPr>
+            </a:pPr>
+            <a:r>
+              <a:t>Decoupled Modern Cloud Web Stack</a:t>
+            </a:r>
+          </a:p>
+          <a:p>
+            <a:pPr>
+              <a:defRPr b="1" sz="1300">
+                <a:solidFill>
+                  <a:srgbClr val="0F172A"/>
+                </a:solidFill>
+              </a:defRPr>
+            </a:pPr>
+            <a:r>
+              <a:t>• 1. Presentation Tier (Frontend SPA)</a:t>
+            </a:r>
+          </a:p>
+          <a:p>
+            <a:pPr>
+              <a:spcAft>
                 <a:spcPts val="800"/>
               </a:spcAft>
-              <a:defRPr sz="1400" b="1">
-                <a:solidFill>
-                  <a:srgbClr val="1E3A8A"/>
-                </a:solidFill>
-              </a:defRPr>
-            </a:pPr>
-            <a:r>
-              <a:t>Architectural Tier Decomposition</a:t>
-            </a:r>
-          </a:p>
-          <a:p>
-            <a:pPr>
-              <a:defRPr b="1" sz="1000">
-                <a:solidFill>
-                  <a:srgbClr val="0284C7"/>
-                </a:solidFill>
-              </a:defRPr>
-            </a:pPr>
-            <a:r>
-              <a:t>• 1. Presentation Tier (Frontend): </a:t>
-            </a:r>
-          </a:p>
-          <a:p>
-            <a:pPr>
-              <a:spcAft>
-                <a:spcPts val="400"/>
-              </a:spcAft>
-              <a:defRPr sz="950">
+              <a:defRPr sz="1150">
                 <a:solidFill>
                   <a:srgbClr val="334155"/>
                 </a:solidFill>
               </a:defRPr>
             </a:pPr>
             <a:r>
-              <a:t>  Vue 3 Composition API with Vite bundler. Pinia centralized state stores (auth, roadmap, user). Dynamic SVG canvas computing Bézier connector paths.</a:t>
-            </a:r>
-          </a:p>
-          <a:p>
-            <a:pPr>
-              <a:defRPr b="1" sz="1000">
-                <a:solidFill>
-                  <a:srgbClr val="0284C7"/>
-                </a:solidFill>
-              </a:defRPr>
-            </a:pPr>
-            <a:r>
-              <a:t>• 2. Application Tier (Backend API): </a:t>
-            </a:r>
-          </a:p>
-          <a:p>
-            <a:pPr>
-              <a:spcAft>
-                <a:spcPts val="400"/>
-              </a:spcAft>
-              <a:defRPr sz="950">
+              <a:t>   Vue 3 Composition API (&lt;script setup&gt;) &amp; Vite 5.3 bundler. Pinia centralized state stores (auth, roadmap, user). Dynamic SVG canvas computing cubic Bézier paths with pan/zoom HUD.</a:t>
+            </a:r>
+          </a:p>
+          <a:p>
+            <a:pPr>
+              <a:defRPr b="1" sz="1300">
+                <a:solidFill>
+                  <a:srgbClr val="0F172A"/>
+                </a:solidFill>
+              </a:defRPr>
+            </a:pPr>
+            <a:r>
+              <a:t>• 2. Application Tier (Backend REST API)</a:t>
+            </a:r>
+          </a:p>
+          <a:p>
+            <a:pPr>
+              <a:spcAft>
+                <a:spcPts val="800"/>
+              </a:spcAft>
+              <a:defRPr sz="1150">
                 <a:solidFill>
                   <a:srgbClr val="334155"/>
                 </a:solidFill>
               </a:defRPr>
             </a:pPr>
             <a:r>
-              <a:t>  Node.js 18+ runtime with Express 4.19 framework. Stateless JWT authentication, bcrypt password hashing, topological graph engine (skillGapService.js).</a:t>
-            </a:r>
-          </a:p>
-          <a:p>
-            <a:pPr>
-              <a:defRPr b="1" sz="1000">
-                <a:solidFill>
-                  <a:srgbClr val="0284C7"/>
-                </a:solidFill>
-              </a:defRPr>
-            </a:pPr>
-            <a:r>
-              <a:t>• 3. Persistence Tier (Database): </a:t>
-            </a:r>
-          </a:p>
-          <a:p>
-            <a:pPr>
-              <a:spcAft>
-                <a:spcPts val="400"/>
-              </a:spcAft>
-              <a:defRPr sz="950">
+              <a:t>   Node.js 18+ runtime with Express 4.19 framework. Stateless JWT auth, bcrypt password hashing, topological DAG prerequisite engine (skillGapService.js), and atomic progress rollups.</a:t>
+            </a:r>
+          </a:p>
+          <a:p>
+            <a:pPr>
+              <a:defRPr b="1" sz="1300">
+                <a:solidFill>
+                  <a:srgbClr val="0F172A"/>
+                </a:solidFill>
+              </a:defRPr>
+            </a:pPr>
+            <a:r>
+              <a:t>• 3. Persistence Tier (Cloud Database)</a:t>
+            </a:r>
+          </a:p>
+          <a:p>
+            <a:pPr>
+              <a:spcAft>
+                <a:spcPts val="800"/>
+              </a:spcAft>
+              <a:defRPr sz="1150">
                 <a:solidFill>
                   <a:srgbClr val="334155"/>
                 </a:solidFill>
               </a:defRPr>
             </a:pPr>
             <a:r>
-              <a:t>  MongoDB Atlas managed via Mongoose 8.5 ODM. 9 normalized collections with compound uniqueness indexes guaranteeing idempotency.</a:t>
-            </a:r>
-          </a:p>
-          <a:p>
-            <a:pPr>
-              <a:defRPr b="1" sz="1000">
-                <a:solidFill>
-                  <a:srgbClr val="0284C7"/>
-                </a:solidFill>
-              </a:defRPr>
-            </a:pPr>
-            <a:r>
-              <a:t>• Communication Protocol: </a:t>
-            </a:r>
-          </a:p>
-          <a:p>
-            <a:pPr>
-              <a:spcAft>
-                <a:spcPts val="400"/>
-              </a:spcAft>
-              <a:defRPr sz="950">
+              <a:t>   Managed MongoDB Atlas replica set cluster. 9 normalized Mongoose 8.5 schemas with compound unique indexes guaranteeing idempotent write operations.</a:t>
+            </a:r>
+          </a:p>
+          <a:p>
+            <a:pPr>
+              <a:defRPr b="1" sz="1300">
+                <a:solidFill>
+                  <a:srgbClr val="0F172A"/>
+                </a:solidFill>
+              </a:defRPr>
+            </a:pPr>
+            <a:r>
+              <a:t>• 4. Edge Hosting &amp; CI/CD Pipeline</a:t>
+            </a:r>
+          </a:p>
+          <a:p>
+            <a:pPr>
+              <a:spcAft>
+                <a:spcPts val="800"/>
+              </a:spcAft>
+              <a:defRPr sz="1150">
                 <a:solidFill>
                   <a:srgbClr val="334155"/>
                 </a:solidFill>
               </a:defRPr>
             </a:pPr>
             <a:r>
-              <a:t>  Secure RESTful APIs over HTTPS with JSON payloads and Bearer token authorization.</a:t>
+              <a:t>   Frontend on Vercel Global Edge CDN with SPA rewrites (/(.*) -&gt; /). Backend auto-deployed on Render with git-triggered builds.</a:t>
             </a:r>
           </a:p>
         </p:txBody>
@@ -8242,8 +8485,8 @@
         </p:nvSpPr>
         <p:spPr>
           <a:xfrm>
-            <a:off x="731520" y="365760"/>
-            <a:ext cx="10515600" cy="320040"/>
+            <a:off x="731520" y="274320"/>
+            <a:ext cx="10728655" cy="320040"/>
           </a:xfrm>
           <a:prstGeom prst="rect">
             <a:avLst/>
@@ -8257,7 +8500,7 @@
           <a:lstStyle/>
           <a:p>
             <a:pPr>
-              <a:defRPr sz="1000" b="1">
+              <a:defRPr sz="1100" b="1">
                 <a:solidFill>
                   <a:srgbClr val="0284C7"/>
                 </a:solidFill>
@@ -8277,8 +8520,8 @@
         </p:nvSpPr>
         <p:spPr>
           <a:xfrm>
-            <a:off x="731520" y="640080"/>
-            <a:ext cx="10515600" cy="502920"/>
+            <a:off x="731520" y="566928"/>
+            <a:ext cx="10728655" cy="502920"/>
           </a:xfrm>
           <a:prstGeom prst="rect">
             <a:avLst/>
@@ -8292,7 +8535,7 @@
           <a:lstStyle/>
           <a:p>
             <a:pPr>
-              <a:defRPr sz="2200" b="1">
+              <a:defRPr sz="2400" b="1">
                 <a:solidFill>
                   <a:srgbClr val="1E3A8A"/>
                 </a:solidFill>
@@ -8312,7 +8555,7 @@
         </p:nvSpPr>
         <p:spPr>
           <a:xfrm>
-            <a:off x="731520" y="1188720"/>
+            <a:off x="731520" y="1115568"/>
             <a:ext cx="10728655" cy="18288"/>
           </a:xfrm>
           <a:prstGeom prst="rect">
@@ -8357,7 +8600,7 @@
         </p:nvSpPr>
         <p:spPr>
           <a:xfrm>
-            <a:off x="731520" y="6400800"/>
+            <a:off x="731520" y="6446520"/>
             <a:ext cx="10728655" cy="274320"/>
           </a:xfrm>
           <a:prstGeom prst="rect">
@@ -8372,7 +8615,7 @@
           <a:lstStyle/>
           <a:p>
             <a:pPr>
-              <a:defRPr sz="900">
+              <a:defRPr sz="1000">
                 <a:solidFill>
                   <a:srgbClr val="94A3B8"/>
                 </a:solidFill>
@@ -8380,13 +8623,48 @@
             </a:pPr>
             <a:r>
               <a:t>Career Graph — Project Presentation  |  Group No. 06  |  Department of Computer Engineering / IT</a:t>
+            </a:r>
+          </a:p>
+        </p:txBody>
+      </p:sp>
+      <p:sp>
+        <p:nvSpPr>
+          <p:cNvPr id="6" name="TextBox 5"/>
+          <p:cNvSpPr txBox="1"/>
+          <p:nvPr/>
+        </p:nvSpPr>
+        <p:spPr>
+          <a:xfrm>
+            <a:off x="731520" y="1280160"/>
+            <a:ext cx="5394960" cy="320040"/>
+          </a:xfrm>
+          <a:prstGeom prst="rect">
+            <a:avLst/>
+          </a:prstGeom>
+          <a:noFill/>
+        </p:spPr>
+        <p:txBody>
+          <a:bodyPr wrap="square" lIns="0" tIns="0" rIns="0" bIns="0">
+            <a:spAutoFit/>
+          </a:bodyPr>
+          <a:lstStyle/>
+          <a:p>
+            <a:pPr>
+              <a:defRPr sz="1200" b="1">
+                <a:solidFill>
+                  <a:srgbClr val="1E3A8A"/>
+                </a:solidFill>
+              </a:defRPr>
+            </a:pPr>
+            <a:r>
+              <a:t>Figure 2: Mongoose 8.5 Normalized ER Model &amp; Cardinalities</a:t>
             </a:r>
           </a:p>
         </p:txBody>
       </p:sp>
       <p:pic>
         <p:nvPicPr>
-          <p:cNvPr id="6" name="Picture 5" descr="er_diagram.png"/>
+          <p:cNvPr id="7" name="Picture 6" descr="er_diagram.png"/>
           <p:cNvPicPr>
             <a:picLocks noChangeAspect="1"/>
           </p:cNvPicPr>
@@ -8400,24 +8678,29 @@
         </p:blipFill>
         <p:spPr>
           <a:xfrm>
-            <a:off x="731520" y="1463040"/>
-            <a:ext cx="5669280" cy="3848869"/>
+            <a:off x="731520" y="1645920"/>
+            <a:ext cx="5394960" cy="4117206"/>
           </a:xfrm>
           <a:prstGeom prst="rect">
             <a:avLst/>
           </a:prstGeom>
+          <a:ln w="15240">
+            <a:solidFill>
+              <a:srgbClr val="CBD5E1"/>
+            </a:solidFill>
+          </a:ln>
         </p:spPr>
       </p:pic>
       <p:sp>
         <p:nvSpPr>
-          <p:cNvPr id="7" name="Rounded Rectangle 6"/>
+          <p:cNvPr id="8" name="Rounded Rectangle 7"/>
           <p:cNvSpPr/>
           <p:nvPr/>
         </p:nvSpPr>
         <p:spPr>
           <a:xfrm>
-            <a:off x="6675120" y="1463040"/>
-            <a:ext cx="4754880" cy="4480560"/>
+            <a:off x="6309360" y="1298448"/>
+            <a:ext cx="5150815" cy="4983480"/>
           </a:xfrm>
           <a:prstGeom prst="roundRect">
             <a:avLst/>
@@ -8425,7 +8708,7 @@
           <a:solidFill>
             <a:srgbClr val="F8FAFC"/>
           </a:solidFill>
-          <a:ln w="12700">
+          <a:ln w="15240">
             <a:solidFill>
               <a:srgbClr val="CBD5E1"/>
             </a:solidFill>
@@ -8455,14 +8738,14 @@
       </p:sp>
       <p:sp>
         <p:nvSpPr>
-          <p:cNvPr id="8" name="TextBox 7"/>
+          <p:cNvPr id="9" name="TextBox 8"/>
           <p:cNvSpPr txBox="1"/>
           <p:nvPr/>
         </p:nvSpPr>
         <p:spPr>
           <a:xfrm>
-            <a:off x="6903720" y="1691640"/>
-            <a:ext cx="4297680" cy="4023360"/>
+            <a:off x="6537960" y="1481328"/>
+            <a:ext cx="4663440" cy="4617720"/>
           </a:xfrm>
           <a:prstGeom prst="rect">
             <a:avLst/>
@@ -8477,151 +8760,166 @@
           <a:p>
             <a:pPr>
               <a:spcAft>
+                <a:spcPts val="300"/>
+              </a:spcAft>
+              <a:defRPr sz="1700" b="1">
+                <a:solidFill>
+                  <a:srgbClr val="1E3A8A"/>
+                </a:solidFill>
+              </a:defRPr>
+            </a:pPr>
+            <a:r>
+              <a:t>Key Data Entities &amp; Relational Logic</a:t>
+            </a:r>
+          </a:p>
+          <a:p>
+            <a:pPr>
+              <a:spcAft>
+                <a:spcPts val="1000"/>
+              </a:spcAft>
+              <a:defRPr sz="1100" b="1">
+                <a:solidFill>
+                  <a:srgbClr val="0284C7"/>
+                </a:solidFill>
+              </a:defRPr>
+            </a:pPr>
+            <a:r>
+              <a:t>Mongoose 8.5 Normalized Schemas</a:t>
+            </a:r>
+          </a:p>
+          <a:p>
+            <a:pPr>
+              <a:defRPr b="1" sz="1300">
+                <a:solidFill>
+                  <a:srgbClr val="0F172A"/>
+                </a:solidFill>
+              </a:defRPr>
+            </a:pPr>
+            <a:r>
+              <a:t>• User &amp; UserProfile (1:1)</a:t>
+            </a:r>
+          </a:p>
+          <a:p>
+            <a:pPr>
+              <a:spcAft>
                 <a:spcPts val="800"/>
               </a:spcAft>
-              <a:defRPr sz="1400" b="1">
-                <a:solidFill>
-                  <a:srgbClr val="1E3A8A"/>
-                </a:solidFill>
-              </a:defRPr>
-            </a:pPr>
-            <a:r>
-              <a:t>Key Data Entities &amp; Relationships</a:t>
-            </a:r>
-          </a:p>
-          <a:p>
-            <a:pPr>
-              <a:defRPr b="1" sz="1000">
-                <a:solidFill>
-                  <a:srgbClr val="0284C7"/>
-                </a:solidFill>
-              </a:defRPr>
-            </a:pPr>
-            <a:r>
-              <a:t>• User &amp; UserProfile (1:1): </a:t>
-            </a:r>
-          </a:p>
-          <a:p>
-            <a:pPr>
-              <a:spcAft>
-                <a:spcPts val="400"/>
-              </a:spcAft>
-              <a:defRPr sz="950">
+              <a:defRPr sz="1150">
                 <a:solidFill>
                   <a:srgbClr val="334155"/>
                 </a:solidFill>
               </a:defRPr>
             </a:pPr>
             <a:r>
-              <a:t>  Stores identity, bcrypt password hash, academic stream/degree, and declared baseline ratings.</a:t>
-            </a:r>
-          </a:p>
-          <a:p>
-            <a:pPr>
-              <a:defRPr b="1" sz="1000">
-                <a:solidFill>
-                  <a:srgbClr val="0284C7"/>
-                </a:solidFill>
-              </a:defRPr>
-            </a:pPr>
-            <a:r>
-              <a:t>• Career &amp; Skill (1:N embedded): </a:t>
-            </a:r>
-          </a:p>
-          <a:p>
-            <a:pPr>
-              <a:spcAft>
-                <a:spcPts val="400"/>
-              </a:spcAft>
-              <a:defRPr sz="950">
+              <a:t>   Stores identity credentials, bcrypt password hash, academic stream/degree, and declared baseline self-ratings.</a:t>
+            </a:r>
+          </a:p>
+          <a:p>
+            <a:pPr>
+              <a:defRPr b="1" sz="1300">
+                <a:solidFill>
+                  <a:srgbClr val="0F172A"/>
+                </a:solidFill>
+              </a:defRPr>
+            </a:pPr>
+            <a:r>
+              <a:t>• Career &amp; Skill (1:N embedded)</a:t>
+            </a:r>
+          </a:p>
+          <a:p>
+            <a:pPr>
+              <a:spcAft>
+                <a:spcPts val="800"/>
+              </a:spcAft>
+              <a:defRPr sz="1150">
                 <a:solidFill>
                   <a:srgbClr val="334155"/>
                 </a:solidFill>
               </a:defRPr>
             </a:pPr>
             <a:r>
-              <a:t>  Defines career tracks with required skills categorized into Foundations, Core, and Advanced phases.</a:t>
-            </a:r>
-          </a:p>
-          <a:p>
-            <a:pPr>
-              <a:defRPr b="1" sz="1000">
-                <a:solidFill>
-                  <a:srgbClr val="0284C7"/>
-                </a:solidFill>
-              </a:defRPr>
-            </a:pPr>
-            <a:r>
-              <a:t>• Course &amp; Levels (1:1 &amp; 1:N): </a:t>
-            </a:r>
-          </a:p>
-          <a:p>
-            <a:pPr>
-              <a:spcAft>
-                <a:spcPts val="400"/>
-              </a:spcAft>
-              <a:defRPr sz="950">
+              <a:t>   Structured roadmap catalog partitioned into Foundations, Core, and Advanced phases.</a:t>
+            </a:r>
+          </a:p>
+          <a:p>
+            <a:pPr>
+              <a:defRPr b="1" sz="1300">
+                <a:solidFill>
+                  <a:srgbClr val="0F172A"/>
+                </a:solidFill>
+              </a:defRPr>
+            </a:pPr>
+            <a:r>
+              <a:t>• Course, Level &amp; Lesson (1:1 &amp; 1:N)</a:t>
+            </a:r>
+          </a:p>
+          <a:p>
+            <a:pPr>
+              <a:spcAft>
+                <a:spcPts val="800"/>
+              </a:spcAft>
+              <a:defRPr sz="1150">
                 <a:solidFill>
                   <a:srgbClr val="334155"/>
                 </a:solidFill>
               </a:defRPr>
             </a:pPr>
             <a:r>
-              <a:t>  Course connects to Skill; divided into Beginner, Intermediate, Advanced levels with embedded modules and lessons.</a:t>
-            </a:r>
-          </a:p>
-          <a:p>
-            <a:pPr>
-              <a:defRPr b="1" sz="1000">
-                <a:solidFill>
-                  <a:srgbClr val="0284C7"/>
-                </a:solidFill>
-              </a:defRPr>
-            </a:pPr>
-            <a:r>
-              <a:t>• CourseProgress &amp; LessonProgress: </a:t>
-            </a:r>
-          </a:p>
-          <a:p>
-            <a:pPr>
-              <a:spcAft>
-                <a:spcPts val="400"/>
-              </a:spcAft>
-              <a:defRPr sz="950">
+              <a:t>   Granular syllabus mapping directly to skill nodes with Beginner, Intermediate, and Advanced tiers.</a:t>
+            </a:r>
+          </a:p>
+          <a:p>
+            <a:pPr>
+              <a:defRPr b="1" sz="1300">
+                <a:solidFill>
+                  <a:srgbClr val="0F172A"/>
+                </a:solidFill>
+              </a:defRPr>
+            </a:pPr>
+            <a:r>
+              <a:t>• CourseProgress &amp; LessonProgress</a:t>
+            </a:r>
+          </a:p>
+          <a:p>
+            <a:pPr>
+              <a:spcAft>
+                <a:spcPts val="800"/>
+              </a:spcAft>
+              <a:defRPr sz="1150">
                 <a:solidFill>
                   <a:srgbClr val="334155"/>
                 </a:solidFill>
               </a:defRPr>
             </a:pPr>
             <a:r>
-              <a:t>  Atomic completion logs with compound unique indexes ({ user: 1, course: 1 } and { user: 1, lesson: 1 }).</a:t>
-            </a:r>
-          </a:p>
-          <a:p>
-            <a:pPr>
-              <a:defRPr b="1" sz="1000">
-                <a:solidFill>
-                  <a:srgbClr val="0284C7"/>
-                </a:solidFill>
-              </a:defRPr>
-            </a:pPr>
-            <a:r>
-              <a:t>• SkillQuiz (1:1 with Skill): </a:t>
-            </a:r>
-          </a:p>
-          <a:p>
-            <a:pPr>
-              <a:spcAft>
-                <a:spcPts val="400"/>
-              </a:spcAft>
-              <a:defRPr sz="950">
+              <a:t>   Compound unique indexes ({ user, course }, { user, lesson }) guaranteeing idempotent progress tracking.</a:t>
+            </a:r>
+          </a:p>
+          <a:p>
+            <a:pPr>
+              <a:defRPr b="1" sz="1300">
+                <a:solidFill>
+                  <a:srgbClr val="0F172A"/>
+                </a:solidFill>
+              </a:defRPr>
+            </a:pPr>
+            <a:r>
+              <a:t>• SkillQuiz (1:1 with Skill)</a:t>
+            </a:r>
+          </a:p>
+          <a:p>
+            <a:pPr>
+              <a:spcAft>
+                <a:spcPts val="800"/>
+              </a:spcAft>
+              <a:defRPr sz="1150">
                 <a:solidFill>
                   <a:srgbClr val="334155"/>
                 </a:solidFill>
               </a:defRPr>
             </a:pPr>
             <a:r>
-              <a:t>  Contains validation multiple-choice questions with server-side answer keys.</a:t>
+              <a:t>   Houses multiple-choice validation questions with server-side answer keys for proof-of-skill badging.</a:t>
             </a:r>
           </a:p>
         </p:txBody>
@@ -8652,8 +8950,8 @@
         </p:nvSpPr>
         <p:spPr>
           <a:xfrm>
-            <a:off x="731520" y="365760"/>
-            <a:ext cx="10515600" cy="320040"/>
+            <a:off x="731520" y="274320"/>
+            <a:ext cx="10728655" cy="320040"/>
           </a:xfrm>
           <a:prstGeom prst="rect">
             <a:avLst/>
@@ -8667,7 +8965,7 @@
           <a:lstStyle/>
           <a:p>
             <a:pPr>
-              <a:defRPr sz="1000" b="1">
+              <a:defRPr sz="1100" b="1">
                 <a:solidFill>
                   <a:srgbClr val="0284C7"/>
                 </a:solidFill>
@@ -8687,8 +8985,8 @@
         </p:nvSpPr>
         <p:spPr>
           <a:xfrm>
-            <a:off x="731520" y="640080"/>
-            <a:ext cx="10515600" cy="502920"/>
+            <a:off x="731520" y="566928"/>
+            <a:ext cx="10728655" cy="502920"/>
           </a:xfrm>
           <a:prstGeom prst="rect">
             <a:avLst/>
@@ -8702,7 +9000,7 @@
           <a:lstStyle/>
           <a:p>
             <a:pPr>
-              <a:defRPr sz="2200" b="1">
+              <a:defRPr sz="2400" b="1">
                 <a:solidFill>
                   <a:srgbClr val="1E3A8A"/>
                 </a:solidFill>
@@ -8722,7 +9020,7 @@
         </p:nvSpPr>
         <p:spPr>
           <a:xfrm>
-            <a:off x="731520" y="1188720"/>
+            <a:off x="731520" y="1115568"/>
             <a:ext cx="10728655" cy="18288"/>
           </a:xfrm>
           <a:prstGeom prst="rect">
@@ -8767,7 +9065,7 @@
         </p:nvSpPr>
         <p:spPr>
           <a:xfrm>
-            <a:off x="731520" y="6400800"/>
+            <a:off x="731520" y="6446520"/>
             <a:ext cx="10728655" cy="274320"/>
           </a:xfrm>
           <a:prstGeom prst="rect">
@@ -8782,7 +9080,7 @@
           <a:lstStyle/>
           <a:p>
             <a:pPr>
-              <a:defRPr sz="900">
+              <a:defRPr sz="1000">
                 <a:solidFill>
                   <a:srgbClr val="94A3B8"/>
                 </a:solidFill>
@@ -8802,8 +9100,8 @@
         </p:nvSpPr>
         <p:spPr>
           <a:xfrm>
-            <a:off x="731520" y="1463040"/>
-            <a:ext cx="3328416" cy="3108960"/>
+            <a:off x="731520" y="1298448"/>
+            <a:ext cx="3383280" cy="3429000"/>
           </a:xfrm>
           <a:prstGeom prst="roundRect">
             <a:avLst/>
@@ -8811,7 +9109,7 @@
           <a:solidFill>
             <a:srgbClr val="F8FAFC"/>
           </a:solidFill>
-          <a:ln w="12700">
+          <a:ln w="15240">
             <a:solidFill>
               <a:srgbClr val="CBD5E1"/>
             </a:solidFill>
@@ -8847,8 +9145,8 @@
         </p:nvSpPr>
         <p:spPr>
           <a:xfrm>
-            <a:off x="914400" y="1645920"/>
-            <a:ext cx="2962656" cy="2743200"/>
+            <a:off x="960120" y="1481328"/>
+            <a:ext cx="2926080" cy="3063240"/>
           </a:xfrm>
           <a:prstGeom prst="rect">
             <a:avLst/>
@@ -8862,7 +9160,7 @@
           <a:lstStyle/>
           <a:p>
             <a:pPr>
-              <a:defRPr sz="1300" b="1">
+              <a:defRPr sz="1600" b="1">
                 <a:solidFill>
                   <a:srgbClr val="1E3A8A"/>
                 </a:solidFill>
@@ -8877,7 +9175,7 @@
               <a:spcAft>
                 <a:spcPts val="800"/>
               </a:spcAft>
-              <a:defRPr sz="850" b="1">
+              <a:defRPr sz="1000" b="1">
                 <a:solidFill>
                   <a:srgbClr val="0284C7"/>
                 </a:solidFill>
@@ -8889,22 +9187,47 @@
           </a:p>
           <a:p>
             <a:pPr>
-              <a:defRPr sz="950">
+              <a:spcAft>
+                <a:spcPts val="400"/>
+              </a:spcAft>
+              <a:defRPr sz="1200">
                 <a:solidFill>
                   <a:srgbClr val="334155"/>
                 </a:solidFill>
               </a:defRPr>
             </a:pPr>
             <a:r>
-              <a:t>• Unconditionally UNLOCKED by default.</a:t>
-            </a:r>
-            <a:br/>
-            <a:r>
-              <a:t>• Core tools: HTML, CSS, JavaScript, Git (for Full Stack); Linux, Git, Networking (for DevOps).</a:t>
-            </a:r>
-            <a:br/>
-            <a:r>
-              <a:t>• Establishes baseline engineering fundamentals.</a:t>
+              <a:t>• Unconditionally UNLOCKED upon enrollment.</a:t>
+            </a:r>
+          </a:p>
+          <a:p>
+            <a:pPr>
+              <a:spcAft>
+                <a:spcPts val="400"/>
+              </a:spcAft>
+              <a:defRPr sz="1200">
+                <a:solidFill>
+                  <a:srgbClr val="334155"/>
+                </a:solidFill>
+              </a:defRPr>
+            </a:pPr>
+            <a:r>
+              <a:t>• Core tools: HTML, CSS, JavaScript, Git (Full Stack); Linux, Git, Networking (DevOps).</a:t>
+            </a:r>
+          </a:p>
+          <a:p>
+            <a:pPr>
+              <a:spcAft>
+                <a:spcPts val="400"/>
+              </a:spcAft>
+              <a:defRPr sz="1200">
+                <a:solidFill>
+                  <a:srgbClr val="334155"/>
+                </a:solidFill>
+              </a:defRPr>
+            </a:pPr>
+            <a:r>
+              <a:t>• Establishes vital syntax and engineering baseline before any framework usage.</a:t>
             </a:r>
           </a:p>
         </p:txBody>
@@ -8917,8 +9240,8 @@
         </p:nvSpPr>
         <p:spPr>
           <a:xfrm>
-            <a:off x="4425696" y="1463040"/>
-            <a:ext cx="3328416" cy="3108960"/>
+            <a:off x="4407407" y="1298448"/>
+            <a:ext cx="3383280" cy="3429000"/>
           </a:xfrm>
           <a:prstGeom prst="roundRect">
             <a:avLst/>
@@ -8926,7 +9249,7 @@
           <a:solidFill>
             <a:srgbClr val="F8FAFC"/>
           </a:solidFill>
-          <a:ln w="12700">
+          <a:ln w="15240">
             <a:solidFill>
               <a:srgbClr val="CBD5E1"/>
             </a:solidFill>
@@ -8962,8 +9285,8 @@
         </p:nvSpPr>
         <p:spPr>
           <a:xfrm>
-            <a:off x="4608576" y="1645920"/>
-            <a:ext cx="2962656" cy="2743200"/>
+            <a:off x="4636007" y="1481328"/>
+            <a:ext cx="2926080" cy="3063240"/>
           </a:xfrm>
           <a:prstGeom prst="rect">
             <a:avLst/>
@@ -8977,7 +9300,7 @@
           <a:lstStyle/>
           <a:p>
             <a:pPr>
-              <a:defRPr sz="1300" b="1">
+              <a:defRPr sz="1600" b="1">
                 <a:solidFill>
                   <a:srgbClr val="1E3A8A"/>
                 </a:solidFill>
@@ -8992,7 +9315,7 @@
               <a:spcAft>
                 <a:spcPts val="800"/>
               </a:spcAft>
-              <a:defRPr sz="850" b="1">
+              <a:defRPr sz="1000" b="1">
                 <a:solidFill>
                   <a:srgbClr val="0284C7"/>
                 </a:solidFill>
@@ -9004,22 +9327,47 @@
           </a:p>
           <a:p>
             <a:pPr>
-              <a:defRPr sz="950">
+              <a:spcAft>
+                <a:spcPts val="400"/>
+              </a:spcAft>
+              <a:defRPr sz="1200">
                 <a:solidFill>
                   <a:srgbClr val="334155"/>
                 </a:solidFill>
               </a:defRPr>
             </a:pPr>
             <a:r>
-              <a:t>• STRICTLY LOCKED until all Phase 1 skills are completed.</a:t>
-            </a:r>
-            <a:br/>
-            <a:r>
-              <a:t>• Tools: Vue.js, Node.js, Express, MongoDB.</a:t>
-            </a:r>
-            <a:br/>
-            <a:r>
-              <a:t>• Prevents jumping into backend/full-stack frameworks prematurely.</a:t>
+              <a:t>• STRICTLY LOCKED until all Phase 1 skills reach 100% completion.</a:t>
+            </a:r>
+          </a:p>
+          <a:p>
+            <a:pPr>
+              <a:spcAft>
+                <a:spcPts val="400"/>
+              </a:spcAft>
+              <a:defRPr sz="1200">
+                <a:solidFill>
+                  <a:srgbClr val="334155"/>
+                </a:solidFill>
+              </a:defRPr>
+            </a:pPr>
+            <a:r>
+              <a:t>• Frameworks: Vue.js, Node.js, Express, MongoDB.</a:t>
+            </a:r>
+          </a:p>
+          <a:p>
+            <a:pPr>
+              <a:spcAft>
+                <a:spcPts val="400"/>
+              </a:spcAft>
+              <a:defRPr sz="1200">
+                <a:solidFill>
+                  <a:srgbClr val="334155"/>
+                </a:solidFill>
+              </a:defRPr>
+            </a:pPr>
+            <a:r>
+              <a:t>• Prevents students from jumping into backend APIs and full-stack frameworks prematurely.</a:t>
             </a:r>
           </a:p>
         </p:txBody>
@@ -9032,8 +9380,8 @@
         </p:nvSpPr>
         <p:spPr>
           <a:xfrm>
-            <a:off x="8119872" y="1463040"/>
-            <a:ext cx="3328416" cy="3108960"/>
+            <a:off x="8083296" y="1298448"/>
+            <a:ext cx="3383280" cy="3429000"/>
           </a:xfrm>
           <a:prstGeom prst="roundRect">
             <a:avLst/>
@@ -9041,7 +9389,7 @@
           <a:solidFill>
             <a:srgbClr val="F8FAFC"/>
           </a:solidFill>
-          <a:ln w="12700">
+          <a:ln w="15240">
             <a:solidFill>
               <a:srgbClr val="CBD5E1"/>
             </a:solidFill>
@@ -9077,8 +9425,8 @@
         </p:nvSpPr>
         <p:spPr>
           <a:xfrm>
-            <a:off x="8302752" y="1645920"/>
-            <a:ext cx="2962656" cy="2743200"/>
+            <a:off x="8311896" y="1481328"/>
+            <a:ext cx="2926080" cy="3063240"/>
           </a:xfrm>
           <a:prstGeom prst="rect">
             <a:avLst/>
@@ -9092,14 +9440,14 @@
           <a:lstStyle/>
           <a:p>
             <a:pPr>
-              <a:defRPr sz="1300" b="1">
+              <a:defRPr sz="1600" b="1">
                 <a:solidFill>
                   <a:srgbClr val="1E3A8A"/>
                 </a:solidFill>
               </a:defRPr>
             </a:pPr>
             <a:r>
-              <a:t>Phase 3: Advanced &amp; Ecosystem</a:t>
+              <a:t>Phase 3: Advanced</a:t>
             </a:r>
           </a:p>
           <a:p>
@@ -9107,34 +9455,59 @@
               <a:spcAft>
                 <a:spcPts val="800"/>
               </a:spcAft>
-              <a:defRPr sz="850" b="1">
+              <a:defRPr sz="1000" b="1">
                 <a:solidFill>
                   <a:srgbClr val="0284C7"/>
                 </a:solidFill>
               </a:defRPr>
             </a:pPr>
             <a:r>
-              <a:t>PRODUCTION &amp; CLOUD ARCHITECTURE</a:t>
-            </a:r>
-          </a:p>
-          <a:p>
-            <a:pPr>
-              <a:defRPr sz="950">
+              <a:t>PRODUCTION &amp; CLOUD</a:t>
+            </a:r>
+          </a:p>
+          <a:p>
+            <a:pPr>
+              <a:spcAft>
+                <a:spcPts val="400"/>
+              </a:spcAft>
+              <a:defRPr sz="1200">
                 <a:solidFill>
                   <a:srgbClr val="334155"/>
                 </a:solidFill>
               </a:defRPr>
             </a:pPr>
             <a:r>
-              <a:t>• STRICTLY LOCKED until all Phase 2 skills are completed.</a:t>
-            </a:r>
-            <a:br/>
-            <a:r>
-              <a:t>• Tools: Docker, AWS Cloud, Kubernetes, Microservices.</a:t>
-            </a:r>
-            <a:br/>
-            <a:r>
-              <a:t>• Ensures students master coding before cloud deployments.</a:t>
+              <a:t>• STRICTLY LOCKED until all Phase 2 skills are verified or completed.</a:t>
+            </a:r>
+          </a:p>
+          <a:p>
+            <a:pPr>
+              <a:spcAft>
+                <a:spcPts val="400"/>
+              </a:spcAft>
+              <a:defRPr sz="1200">
+                <a:solidFill>
+                  <a:srgbClr val="334155"/>
+                </a:solidFill>
+              </a:defRPr>
+            </a:pPr>
+            <a:r>
+              <a:t>• Tools: Docker, AWS Cloud, Kubernetes, CI/CD.</a:t>
+            </a:r>
+          </a:p>
+          <a:p>
+            <a:pPr>
+              <a:spcAft>
+                <a:spcPts val="400"/>
+              </a:spcAft>
+              <a:defRPr sz="1200">
+                <a:solidFill>
+                  <a:srgbClr val="334155"/>
+                </a:solidFill>
+              </a:defRPr>
+            </a:pPr>
+            <a:r>
+              <a:t>• Ensures code literacy and API proficiency prior to containerized deployments.</a:t>
             </a:r>
           </a:p>
         </p:txBody>
@@ -9147,8 +9520,8 @@
         </p:nvSpPr>
         <p:spPr>
           <a:xfrm>
-            <a:off x="731520" y="4754880"/>
-            <a:ext cx="10728655" cy="1280160"/>
+            <a:off x="731520" y="4892040"/>
+            <a:ext cx="10728655" cy="1371600"/>
           </a:xfrm>
           <a:prstGeom prst="roundRect">
             <a:avLst/>
@@ -9156,7 +9529,7 @@
           <a:solidFill>
             <a:srgbClr val="F8FAFC"/>
           </a:solidFill>
-          <a:ln w="12700">
+          <a:ln w="15240">
             <a:solidFill>
               <a:srgbClr val="CBD5E1"/>
             </a:solidFill>
@@ -9192,8 +9565,8 @@
         </p:nvSpPr>
         <p:spPr>
           <a:xfrm>
-            <a:off x="960120" y="4892040"/>
-            <a:ext cx="10241280" cy="1005840"/>
+            <a:off x="960120" y="5029200"/>
+            <a:ext cx="10241280" cy="1097280"/>
           </a:xfrm>
           <a:prstGeom prst="rect">
             <a:avLst/>
@@ -9207,26 +9580,29 @@
           <a:lstStyle/>
           <a:p>
             <a:pPr>
-              <a:defRPr b="1" sz="1100">
+              <a:spcAft>
+                <a:spcPts val="400"/>
+              </a:spcAft>
+              <a:defRPr b="1" sz="1400">
                 <a:solidFill>
                   <a:srgbClr val="1E3A8A"/>
                 </a:solidFill>
               </a:defRPr>
             </a:pPr>
             <a:r>
-              <a:t>Node-Level Dependency Checking &amp; Next-Skill Recommendation:</a:t>
-            </a:r>
-          </a:p>
-          <a:p>
-            <a:pPr>
-              <a:defRPr sz="950">
-                <a:solidFill>
-                  <a:srgbClr val="334155"/>
-                </a:solidFill>
-              </a:defRPr>
-            </a:pPr>
-            <a:r>
-              <a:t>Even inside an unlocked phase, individual nodes verify specific prerequisite ObjectIds (e.g. JavaScript requires HTML and CSS). The engine traverses nodes in topological order to automatically flag the next 'recommended' skill for the learner.</a:t>
+              <a:t>Node-Level Dependency Checking &amp; Dynamic Next-Skill Recommendation:</a:t>
+            </a:r>
+          </a:p>
+          <a:p>
+            <a:pPr>
+              <a:defRPr sz="1250">
+                <a:solidFill>
+                  <a:srgbClr val="0F172A"/>
+                </a:solidFill>
+              </a:defRPr>
+            </a:pPr>
+            <a:r>
+              <a:t>Beyond macro phases, individual nodes verify specific prerequisite ObjectIds (e.g. JavaScript requires HTML &amp; CSS). The engine performs topological sort traversal to dynamically highlight the next recommended skill on the roadmap canvas.</a:t>
             </a:r>
           </a:p>
         </p:txBody>
@@ -9257,8 +9633,8 @@
         </p:nvSpPr>
         <p:spPr>
           <a:xfrm>
-            <a:off x="731520" y="365760"/>
-            <a:ext cx="10515600" cy="320040"/>
+            <a:off x="731520" y="274320"/>
+            <a:ext cx="10728655" cy="320040"/>
           </a:xfrm>
           <a:prstGeom prst="rect">
             <a:avLst/>
@@ -9272,7 +9648,7 @@
           <a:lstStyle/>
           <a:p>
             <a:pPr>
-              <a:defRPr sz="1000" b="1">
+              <a:defRPr sz="1100" b="1">
                 <a:solidFill>
                   <a:srgbClr val="0284C7"/>
                 </a:solidFill>
@@ -9292,8 +9668,8 @@
         </p:nvSpPr>
         <p:spPr>
           <a:xfrm>
-            <a:off x="731520" y="640080"/>
-            <a:ext cx="10515600" cy="502920"/>
+            <a:off x="731520" y="566928"/>
+            <a:ext cx="10728655" cy="502920"/>
           </a:xfrm>
           <a:prstGeom prst="rect">
             <a:avLst/>
@@ -9307,14 +9683,14 @@
           <a:lstStyle/>
           <a:p>
             <a:pPr>
-              <a:defRPr sz="2200" b="1">
+              <a:defRPr sz="2400" b="1">
                 <a:solidFill>
                   <a:srgbClr val="1E3A8A"/>
                 </a:solidFill>
               </a:defRPr>
             </a:pPr>
             <a:r>
-              <a:t>Core Logic 2: Proof-of-Skill Validation Engine</a:t>
+              <a:t>Core Logic 2: Proof-of-Skill Validation System</a:t>
             </a:r>
           </a:p>
         </p:txBody>
@@ -9327,7 +9703,7 @@
         </p:nvSpPr>
         <p:spPr>
           <a:xfrm>
-            <a:off x="731520" y="1188720"/>
+            <a:off x="731520" y="1115568"/>
             <a:ext cx="10728655" cy="18288"/>
           </a:xfrm>
           <a:prstGeom prst="rect">
@@ -9372,7 +9748,7 @@
         </p:nvSpPr>
         <p:spPr>
           <a:xfrm>
-            <a:off x="731520" y="6400800"/>
+            <a:off x="731520" y="6446520"/>
             <a:ext cx="10728655" cy="274320"/>
           </a:xfrm>
           <a:prstGeom prst="rect">
@@ -9387,7 +9763,7 @@
           <a:lstStyle/>
           <a:p>
             <a:pPr>
-              <a:defRPr sz="900">
+              <a:defRPr sz="1000">
                 <a:solidFill>
                   <a:srgbClr val="94A3B8"/>
                 </a:solidFill>
@@ -9407,8 +9783,8 @@
         </p:nvSpPr>
         <p:spPr>
           <a:xfrm>
-            <a:off x="731520" y="1463040"/>
-            <a:ext cx="3328416" cy="3291840"/>
+            <a:off x="731520" y="1298448"/>
+            <a:ext cx="3383280" cy="3429000"/>
           </a:xfrm>
           <a:prstGeom prst="roundRect">
             <a:avLst/>
@@ -9416,7 +9792,7 @@
           <a:solidFill>
             <a:srgbClr val="F8FAFC"/>
           </a:solidFill>
-          <a:ln w="12700">
+          <a:ln w="15240">
             <a:solidFill>
               <a:srgbClr val="CBD5E1"/>
             </a:solidFill>
@@ -9452,8 +9828,8 @@
         </p:nvSpPr>
         <p:spPr>
           <a:xfrm>
-            <a:off x="960120" y="1691640"/>
-            <a:ext cx="2871216" cy="2834640"/>
+            <a:off x="960120" y="1481328"/>
+            <a:ext cx="2926080" cy="3063240"/>
           </a:xfrm>
           <a:prstGeom prst="rect">
             <a:avLst/>
@@ -9467,34 +9843,74 @@
           <a:lstStyle/>
           <a:p>
             <a:pPr>
+              <a:defRPr sz="1600" b="1">
+                <a:solidFill>
+                  <a:srgbClr val="1E3A8A"/>
+                </a:solidFill>
+              </a:defRPr>
+            </a:pPr>
+            <a:r>
+              <a:t>Step 1: Advanced Phase Gating</a:t>
+            </a:r>
+          </a:p>
+          <a:p>
+            <a:pPr>
               <a:spcAft>
                 <a:spcPts val="800"/>
               </a:spcAft>
-              <a:defRPr sz="1300" b="1">
-                <a:solidFill>
-                  <a:srgbClr val="1E3A8A"/>
-                </a:solidFill>
-              </a:defRPr>
-            </a:pPr>
-            <a:r>
-              <a:t>Step 1: Advanced Phase Gating</a:t>
-            </a:r>
-          </a:p>
-          <a:p>
-            <a:pPr>
-              <a:defRPr sz="1000">
+              <a:defRPr sz="1000" b="1">
+                <a:solidFill>
+                  <a:srgbClr val="0284C7"/>
+                </a:solidFill>
+              </a:defRPr>
+            </a:pPr>
+            <a:r>
+              <a:t>Prerequisite Enforcement</a:t>
+            </a:r>
+          </a:p>
+          <a:p>
+            <a:pPr>
+              <a:spcAft>
+                <a:spcPts val="400"/>
+              </a:spcAft>
+              <a:defRPr sz="1200">
                 <a:solidFill>
                   <a:srgbClr val="334155"/>
                 </a:solidFill>
               </a:defRPr>
             </a:pPr>
             <a:r>
-              <a:t>Access to the quiz is locked on day one.</a:t>
-            </a:r>
-            <a:br/>
-            <a:br/>
-            <a:r>
-              <a:t>A student MUST reach the Advanced phase (by completing all Beginner and Intermediate lessons, or having declared baseline level &gt;= 3) before the quiz unlocks.</a:t>
+              <a:t>• Micro-quiz is locked on day one.</a:t>
+            </a:r>
+          </a:p>
+          <a:p>
+            <a:pPr>
+              <a:spcAft>
+                <a:spcPts val="400"/>
+              </a:spcAft>
+              <a:defRPr sz="1200">
+                <a:solidFill>
+                  <a:srgbClr val="334155"/>
+                </a:solidFill>
+              </a:defRPr>
+            </a:pPr>
+            <a:r>
+              <a:t>• A student MUST reach the Advanced level (by completing all Beginner and Intermediate lessons, or holding a baseline rating &gt;= 3).</a:t>
+            </a:r>
+          </a:p>
+          <a:p>
+            <a:pPr>
+              <a:spcAft>
+                <a:spcPts val="400"/>
+              </a:spcAft>
+              <a:defRPr sz="1200">
+                <a:solidFill>
+                  <a:srgbClr val="334155"/>
+                </a:solidFill>
+              </a:defRPr>
+            </a:pPr>
+            <a:r>
+              <a:t>• Prevents blind guessing and ensures sufficient study preparation.</a:t>
             </a:r>
           </a:p>
         </p:txBody>
@@ -9507,8 +9923,8 @@
         </p:nvSpPr>
         <p:spPr>
           <a:xfrm>
-            <a:off x="4425696" y="1463040"/>
-            <a:ext cx="3328416" cy="3291840"/>
+            <a:off x="4407407" y="1298448"/>
+            <a:ext cx="3383280" cy="3429000"/>
           </a:xfrm>
           <a:prstGeom prst="roundRect">
             <a:avLst/>
@@ -9516,7 +9932,7 @@
           <a:solidFill>
             <a:srgbClr val="F8FAFC"/>
           </a:solidFill>
-          <a:ln w="12700">
+          <a:ln w="15240">
             <a:solidFill>
               <a:srgbClr val="CBD5E1"/>
             </a:solidFill>
@@ -9552,8 +9968,8 @@
         </p:nvSpPr>
         <p:spPr>
           <a:xfrm>
-            <a:off x="4654296" y="1691640"/>
-            <a:ext cx="2871216" cy="2834640"/>
+            <a:off x="4636007" y="1481328"/>
+            <a:ext cx="2926080" cy="3063240"/>
           </a:xfrm>
           <a:prstGeom prst="rect">
             <a:avLst/>
@@ -9567,34 +9983,59 @@
           <a:lstStyle/>
           <a:p>
             <a:pPr>
+              <a:defRPr sz="1600" b="1">
+                <a:solidFill>
+                  <a:srgbClr val="1E3A8A"/>
+                </a:solidFill>
+              </a:defRPr>
+            </a:pPr>
+            <a:r>
+              <a:t>Step 2: Anti-Cheating Sanitization</a:t>
+            </a:r>
+          </a:p>
+          <a:p>
+            <a:pPr>
               <a:spcAft>
                 <a:spcPts val="800"/>
               </a:spcAft>
-              <a:defRPr sz="1300" b="1">
-                <a:solidFill>
-                  <a:srgbClr val="1E3A8A"/>
-                </a:solidFill>
-              </a:defRPr>
-            </a:pPr>
-            <a:r>
-              <a:t>Step 2: Client Payload Sanitization</a:t>
-            </a:r>
-          </a:p>
-          <a:p>
-            <a:pPr>
-              <a:defRPr sz="1000">
+              <a:defRPr sz="1000" b="1">
+                <a:solidFill>
+                  <a:srgbClr val="0284C7"/>
+                </a:solidFill>
+              </a:defRPr>
+            </a:pPr>
+            <a:r>
+              <a:t>Secure Client Payloads</a:t>
+            </a:r>
+          </a:p>
+          <a:p>
+            <a:pPr>
+              <a:spcAft>
+                <a:spcPts val="400"/>
+              </a:spcAft>
+              <a:defRPr sz="1200">
                 <a:solidFill>
                   <a:srgbClr val="334155"/>
                 </a:solidFill>
               </a:defRPr>
             </a:pPr>
             <a:r>
-              <a:t>When questions are fetched by the browser, the server explicitly strips 'correctIndex' and 'explanation' fields.</a:t>
-            </a:r>
-            <a:br/>
-            <a:br/>
-            <a:r>
-              <a:t>Students cannot inspect the answer keys via browser DevTools or Network tabs.</a:t>
+              <a:t>• When quiz questions are fetched by the browser, the backend explicitly strips correctIndex and explanation fields.</a:t>
+            </a:r>
+          </a:p>
+          <a:p>
+            <a:pPr>
+              <a:spcAft>
+                <a:spcPts val="400"/>
+              </a:spcAft>
+              <a:defRPr sz="1200">
+                <a:solidFill>
+                  <a:srgbClr val="334155"/>
+                </a:solidFill>
+              </a:defRPr>
+            </a:pPr>
+            <a:r>
+              <a:t>• Students cannot extract answer keys via browser DevTools, Network inspect, or local storage inspection.</a:t>
             </a:r>
           </a:p>
         </p:txBody>
@@ -9607,8 +10048,8 @@
         </p:nvSpPr>
         <p:spPr>
           <a:xfrm>
-            <a:off x="8119872" y="1463040"/>
-            <a:ext cx="3328416" cy="3291840"/>
+            <a:off x="8083296" y="1298448"/>
+            <a:ext cx="3383280" cy="3429000"/>
           </a:xfrm>
           <a:prstGeom prst="roundRect">
             <a:avLst/>
@@ -9616,7 +10057,7 @@
           <a:solidFill>
             <a:srgbClr val="F8FAFC"/>
           </a:solidFill>
-          <a:ln w="12700">
+          <a:ln w="15240">
             <a:solidFill>
               <a:srgbClr val="CBD5E1"/>
             </a:solidFill>
@@ -9652,8 +10093,8 @@
         </p:nvSpPr>
         <p:spPr>
           <a:xfrm>
-            <a:off x="8348472" y="1691640"/>
-            <a:ext cx="2871216" cy="2834640"/>
+            <a:off x="8311896" y="1481328"/>
+            <a:ext cx="2926080" cy="3063240"/>
           </a:xfrm>
           <a:prstGeom prst="rect">
             <a:avLst/>
@@ -9667,34 +10108,74 @@
           <a:lstStyle/>
           <a:p>
             <a:pPr>
+              <a:defRPr sz="1600" b="1">
+                <a:solidFill>
+                  <a:srgbClr val="1E3A8A"/>
+                </a:solidFill>
+              </a:defRPr>
+            </a:pPr>
+            <a:r>
+              <a:t>Step 3: Server-Side Grading</a:t>
+            </a:r>
+          </a:p>
+          <a:p>
+            <a:pPr>
               <a:spcAft>
                 <a:spcPts val="800"/>
               </a:spcAft>
-              <a:defRPr sz="1300" b="1">
-                <a:solidFill>
-                  <a:srgbClr val="1E3A8A"/>
-                </a:solidFill>
-              </a:defRPr>
-            </a:pPr>
-            <a:r>
-              <a:t>Step 3: Server-Side Grading &amp; Verification</a:t>
-            </a:r>
-          </a:p>
-          <a:p>
-            <a:pPr>
-              <a:defRPr sz="1000">
+              <a:defRPr sz="1000" b="1">
+                <a:solidFill>
+                  <a:srgbClr val="0284C7"/>
+                </a:solidFill>
+              </a:defRPr>
+            </a:pPr>
+            <a:r>
+              <a:t>Objective Verification</a:t>
+            </a:r>
+          </a:p>
+          <a:p>
+            <a:pPr>
+              <a:spcAft>
+                <a:spcPts val="400"/>
+              </a:spcAft>
+              <a:defRPr sz="1200">
                 <a:solidFill>
                   <a:srgbClr val="334155"/>
                 </a:solidFill>
               </a:defRPr>
             </a:pPr>
             <a:r>
-              <a:t>Answers are graded strictly on the backend API.</a:t>
-            </a:r>
-            <a:br/>
-            <a:br/>
-            <a:r>
-              <a:t>Passing threshold: At least 2 out of 3 correct answers (&gt;= 66.7%). On pass: awards Verified Badge (🛡️) and sets 100% course completion.</a:t>
+              <a:t>• Answers are submitted and evaluated securely on the backend API.</a:t>
+            </a:r>
+          </a:p>
+          <a:p>
+            <a:pPr>
+              <a:spcAft>
+                <a:spcPts val="400"/>
+              </a:spcAft>
+              <a:defRPr sz="1200">
+                <a:solidFill>
+                  <a:srgbClr val="334155"/>
+                </a:solidFill>
+              </a:defRPr>
+            </a:pPr>
+            <a:r>
+              <a:t>• Passing criteria: At least 2 out of 3 correct answers (&gt;= 66.7%).</a:t>
+            </a:r>
+          </a:p>
+          <a:p>
+            <a:pPr>
+              <a:spcAft>
+                <a:spcPts val="400"/>
+              </a:spcAft>
+              <a:defRPr sz="1200">
+                <a:solidFill>
+                  <a:srgbClr val="334155"/>
+                </a:solidFill>
+              </a:defRPr>
+            </a:pPr>
+            <a:r>
+              <a:t>• Passing instantly awards the Verified Badge (🛡️) and sets 100% course completion.</a:t>
             </a:r>
           </a:p>
         </p:txBody>
@@ -9707,8 +10188,8 @@
         </p:nvSpPr>
         <p:spPr>
           <a:xfrm>
-            <a:off x="731520" y="4937760"/>
-            <a:ext cx="10728655" cy="1097280"/>
+            <a:off x="731520" y="4892040"/>
+            <a:ext cx="10728655" cy="1371600"/>
           </a:xfrm>
           <a:prstGeom prst="roundRect">
             <a:avLst/>
@@ -9716,9 +10197,9 @@
           <a:solidFill>
             <a:srgbClr val="F0FDF4"/>
           </a:solidFill>
-          <a:ln w="12700">
+          <a:ln w="15240">
             <a:solidFill>
-              <a:srgbClr val="BBF7D0"/>
+              <a:srgbClr val="86EFAC"/>
             </a:solidFill>
           </a:ln>
         </p:spPr>
@@ -9753,7 +10234,7 @@
         <p:spPr>
           <a:xfrm>
             <a:off x="960120" y="5029200"/>
-            <a:ext cx="10241280" cy="822960"/>
+            <a:ext cx="10241280" cy="1097280"/>
           </a:xfrm>
           <a:prstGeom prst="rect">
             <a:avLst/>
@@ -9767,26 +10248,29 @@
           <a:lstStyle/>
           <a:p>
             <a:pPr>
-              <a:defRPr b="1" sz="1100">
+              <a:spcAft>
+                <a:spcPts val="400"/>
+              </a:spcAft>
+              <a:defRPr b="1" sz="1400">
                 <a:solidFill>
                   <a:srgbClr val="166534"/>
                 </a:solidFill>
               </a:defRPr>
             </a:pPr>
             <a:r>
-              <a:t>Result of Successful Verification:</a:t>
-            </a:r>
-          </a:p>
-          <a:p>
-            <a:pPr>
-              <a:defRPr sz="950">
+              <a:t>Tamper-Proof Credentialing &amp; Automated Progress Rollup:</a:t>
+            </a:r>
+          </a:p>
+          <a:p>
+            <a:pPr>
+              <a:defRPr sz="1250">
                 <a:solidFill>
                   <a:srgbClr val="0F172A"/>
                 </a:solidFill>
               </a:defRPr>
             </a:pPr>
             <a:r>
-              <a:t>Passing the quiz automatically elevates the user's skill rating to Level 4 (Expert), issues the Verified Badge on the roadmap, and atomically marks all lessons in the course curriculum as completed.</a:t>
+              <a:t>Passing the quiz automatically elevates the user's skill rating to Level 4 (Expert), issues the Verified Badge on the roadmap, and atomically marks all lessons in the course curriculum as completed in a single database transaction.</a:t>
             </a:r>
           </a:p>
         </p:txBody>
@@ -9817,8 +10301,8 @@
         </p:nvSpPr>
         <p:spPr>
           <a:xfrm>
-            <a:off x="731520" y="365760"/>
-            <a:ext cx="10515600" cy="320040"/>
+            <a:off x="731520" y="274320"/>
+            <a:ext cx="10728655" cy="320040"/>
           </a:xfrm>
           <a:prstGeom prst="rect">
             <a:avLst/>
@@ -9832,7 +10316,7 @@
           <a:lstStyle/>
           <a:p>
             <a:pPr>
-              <a:defRPr sz="1000" b="1">
+              <a:defRPr sz="1100" b="1">
                 <a:solidFill>
                   <a:srgbClr val="0284C7"/>
                 </a:solidFill>
@@ -9852,8 +10336,8 @@
         </p:nvSpPr>
         <p:spPr>
           <a:xfrm>
-            <a:off x="731520" y="640080"/>
-            <a:ext cx="10515600" cy="502920"/>
+            <a:off x="731520" y="566928"/>
+            <a:ext cx="10728655" cy="502920"/>
           </a:xfrm>
           <a:prstGeom prst="rect">
             <a:avLst/>
@@ -9867,7 +10351,7 @@
           <a:lstStyle/>
           <a:p>
             <a:pPr>
-              <a:defRPr sz="2200" b="1">
+              <a:defRPr sz="2400" b="1">
                 <a:solidFill>
                   <a:srgbClr val="1E3A8A"/>
                 </a:solidFill>
@@ -9887,7 +10371,7 @@
         </p:nvSpPr>
         <p:spPr>
           <a:xfrm>
-            <a:off x="731520" y="1188720"/>
+            <a:off x="731520" y="1115568"/>
             <a:ext cx="10728655" cy="18288"/>
           </a:xfrm>
           <a:prstGeom prst="rect">
@@ -9932,7 +10416,7 @@
         </p:nvSpPr>
         <p:spPr>
           <a:xfrm>
-            <a:off x="731520" y="6400800"/>
+            <a:off x="731520" y="6446520"/>
             <a:ext cx="10728655" cy="274320"/>
           </a:xfrm>
           <a:prstGeom prst="rect">
@@ -9947,7 +10431,7 @@
           <a:lstStyle/>
           <a:p>
             <a:pPr>
-              <a:defRPr sz="900">
+              <a:defRPr sz="1000">
                 <a:solidFill>
                   <a:srgbClr val="94A3B8"/>
                 </a:solidFill>
@@ -9967,8 +10451,8 @@
         </p:nvSpPr>
         <p:spPr>
           <a:xfrm>
-            <a:off x="731520" y="1463040"/>
-            <a:ext cx="5120640" cy="3017520"/>
+            <a:off x="731520" y="1298448"/>
+            <a:ext cx="5212080" cy="3429000"/>
           </a:xfrm>
           <a:prstGeom prst="roundRect">
             <a:avLst/>
@@ -9976,7 +10460,7 @@
           <a:solidFill>
             <a:srgbClr val="F8FAFC"/>
           </a:solidFill>
-          <a:ln w="12700">
+          <a:ln w="15240">
             <a:solidFill>
               <a:srgbClr val="CBD5E1"/>
             </a:solidFill>
@@ -10012,8 +10496,8 @@
         </p:nvSpPr>
         <p:spPr>
           <a:xfrm>
-            <a:off x="960120" y="1691640"/>
-            <a:ext cx="4663440" cy="2560320"/>
+            <a:off x="960120" y="1481328"/>
+            <a:ext cx="4754880" cy="3063240"/>
           </a:xfrm>
           <a:prstGeom prst="rect">
             <a:avLst/>
@@ -10028,40 +10512,91 @@
           <a:p>
             <a:pPr>
               <a:spcAft>
-                <a:spcPts val="600"/>
-              </a:spcAft>
-              <a:defRPr b="1" sz="1300">
+                <a:spcPts val="300"/>
+              </a:spcAft>
+              <a:defRPr b="1" sz="1600">
                 <a:solidFill>
                   <a:srgbClr val="1E3A8A"/>
                 </a:solidFill>
               </a:defRPr>
             </a:pPr>
             <a:r>
-              <a:t>Scenario: Student Learning in Track A</a:t>
-            </a:r>
-          </a:p>
-          <a:p>
-            <a:pPr>
-              <a:defRPr sz="1000">
-                <a:solidFill>
-                  <a:srgbClr val="334155"/>
+              <a:t>Scenario: Learning in Track A (Full Stack)</a:t>
+            </a:r>
+          </a:p>
+          <a:p>
+            <a:pPr>
+              <a:spcAft>
+                <a:spcPts val="800"/>
+              </a:spcAft>
+              <a:defRPr sz="1050" b="1">
+                <a:solidFill>
+                  <a:srgbClr val="0284C7"/>
+                </a:solidFill>
+              </a:defRPr>
+            </a:pPr>
+            <a:r>
+              <a:t>Initial Skill Acquisition</a:t>
+            </a:r>
+          </a:p>
+          <a:p>
+            <a:pPr>
+              <a:spcAft>
+                <a:spcPts val="400"/>
+              </a:spcAft>
+              <a:defRPr sz="1250">
+                <a:solidFill>
+                  <a:srgbClr val="0F172A"/>
                 </a:solidFill>
               </a:defRPr>
             </a:pPr>
             <a:r>
               <a:t>1. Student enrolls in Full Stack Developer track.</a:t>
             </a:r>
-            <a:br/>
-            <a:r>
-              <a:t>2. Completes foundational skills: Git (100%) and Python (100%).</a:t>
-            </a:r>
-            <a:br/>
+          </a:p>
+          <a:p>
+            <a:pPr>
+              <a:spcAft>
+                <a:spcPts val="400"/>
+              </a:spcAft>
+              <a:defRPr sz="1250">
+                <a:solidFill>
+                  <a:srgbClr val="0F172A"/>
+                </a:solidFill>
+              </a:defRPr>
+            </a:pPr>
+            <a:r>
+              <a:t>2. Completes foundational competencies: Git (100%) and Python (100%).</a:t>
+            </a:r>
+          </a:p>
+          <a:p>
+            <a:pPr>
+              <a:spcAft>
+                <a:spcPts val="400"/>
+              </a:spcAft>
+              <a:defRPr sz="1250">
+                <a:solidFill>
+                  <a:srgbClr val="0F172A"/>
+                </a:solidFill>
+              </a:defRPr>
+            </a:pPr>
             <a:r>
               <a:t>3. Takes the Proof-of-Skill validation quiz and earns the Verified Badge.</a:t>
             </a:r>
-            <a:br/>
-            <a:r>
-              <a:t>4. Progress is saved with universal identifiers ('skill-git', 'skill-python').</a:t>
+          </a:p>
+          <a:p>
+            <a:pPr>
+              <a:spcAft>
+                <a:spcPts val="400"/>
+              </a:spcAft>
+              <a:defRPr sz="1250">
+                <a:solidFill>
+                  <a:srgbClr val="0F172A"/>
+                </a:solidFill>
+              </a:defRPr>
+            </a:pPr>
+            <a:r>
+              <a:t>4. Progress is stored under canonical universal identifiers ('skill-git', 'skill-python').</a:t>
             </a:r>
           </a:p>
         </p:txBody>
@@ -10074,18 +10609,18 @@
         </p:nvSpPr>
         <p:spPr>
           <a:xfrm>
-            <a:off x="6217920" y="1463040"/>
-            <a:ext cx="5120640" cy="3017520"/>
+            <a:off x="6217920" y="1298448"/>
+            <a:ext cx="5212080" cy="3429000"/>
           </a:xfrm>
           <a:prstGeom prst="roundRect">
             <a:avLst/>
           </a:prstGeom>
           <a:solidFill>
-            <a:srgbClr val="F8FAFC"/>
+            <a:srgbClr val="F0FDF4"/>
           </a:solidFill>
-          <a:ln w="12700">
+          <a:ln w="15240">
             <a:solidFill>
-              <a:srgbClr val="CBD5E1"/>
+              <a:srgbClr val="86EFAC"/>
             </a:solidFill>
           </a:ln>
         </p:spPr>
@@ -10119,8 +10654,8 @@
         </p:nvSpPr>
         <p:spPr>
           <a:xfrm>
-            <a:off x="6446520" y="1691640"/>
-            <a:ext cx="4663440" cy="2560320"/>
+            <a:off x="6446520" y="1481328"/>
+            <a:ext cx="4754880" cy="3063240"/>
           </a:xfrm>
           <a:prstGeom prst="rect">
             <a:avLst/>
@@ -10135,40 +10670,91 @@
           <a:p>
             <a:pPr>
               <a:spcAft>
-                <a:spcPts val="600"/>
-              </a:spcAft>
-              <a:defRPr b="1" sz="1300">
+                <a:spcPts val="300"/>
+              </a:spcAft>
+              <a:defRPr b="1" sz="1600">
                 <a:solidFill>
                   <a:srgbClr val="166534"/>
                 </a:solidFill>
               </a:defRPr>
             </a:pPr>
             <a:r>
-              <a:t>Outcome: Student Switches to Track B</a:t>
-            </a:r>
-          </a:p>
-          <a:p>
-            <a:pPr>
-              <a:defRPr sz="1000">
-                <a:solidFill>
-                  <a:srgbClr val="334155"/>
+              <a:t>Outcome: Switching to Track B (DevOps / AI)</a:t>
+            </a:r>
+          </a:p>
+          <a:p>
+            <a:pPr>
+              <a:spcAft>
+                <a:spcPts val="800"/>
+              </a:spcAft>
+              <a:defRPr sz="1050" b="1">
+                <a:solidFill>
+                  <a:srgbClr val="166534"/>
+                </a:solidFill>
+              </a:defRPr>
+            </a:pPr>
+            <a:r>
+              <a:t>Instant Automatic Recognition</a:t>
+            </a:r>
+          </a:p>
+          <a:p>
+            <a:pPr>
+              <a:spcAft>
+                <a:spcPts val="400"/>
+              </a:spcAft>
+              <a:defRPr sz="1250">
+                <a:solidFill>
+                  <a:srgbClr val="0F172A"/>
                 </a:solidFill>
               </a:defRPr>
             </a:pPr>
             <a:r>
               <a:t>1. Student switches career track to DevOps Engineer or AI/ML Engineer.</a:t>
             </a:r>
-            <a:br/>
-            <a:r>
-              <a:t>2. The system checks universal skill keys across collections.</a:t>
-            </a:r>
-            <a:br/>
-            <a:r>
-              <a:t>3. Git and Python are IMMEDIATELY recognized as 100% complete and verified!</a:t>
-            </a:r>
-            <a:br/>
-            <a:r>
-              <a:t>4. Student does not waste time re-doing completed competencies.</a:t>
+          </a:p>
+          <a:p>
+            <a:pPr>
+              <a:spcAft>
+                <a:spcPts val="400"/>
+              </a:spcAft>
+              <a:defRPr sz="1250">
+                <a:solidFill>
+                  <a:srgbClr val="0F172A"/>
+                </a:solidFill>
+              </a:defRPr>
+            </a:pPr>
+            <a:r>
+              <a:t>2. The graph engine evaluates universal skill keys across collections.</a:t>
+            </a:r>
+          </a:p>
+          <a:p>
+            <a:pPr>
+              <a:spcAft>
+                <a:spcPts val="400"/>
+              </a:spcAft>
+              <a:defRPr sz="1250">
+                <a:solidFill>
+                  <a:srgbClr val="0F172A"/>
+                </a:solidFill>
+              </a:defRPr>
+            </a:pPr>
+            <a:r>
+              <a:t>3. Git &amp; Python are IMMEDIATELY recognized as 100% complete and verified!</a:t>
+            </a:r>
+          </a:p>
+          <a:p>
+            <a:pPr>
+              <a:spcAft>
+                <a:spcPts val="400"/>
+              </a:spcAft>
+              <a:defRPr sz="1250">
+                <a:solidFill>
+                  <a:srgbClr val="0F172A"/>
+                </a:solidFill>
+              </a:defRPr>
+            </a:pPr>
+            <a:r>
+              <a:t>4. Student skips redundant modules and focuses purely on new domain skills.</a:t>
             </a:r>
           </a:p>
         </p:txBody>
@@ -10181,7 +10767,7 @@
         </p:nvSpPr>
         <p:spPr>
           <a:xfrm>
-            <a:off x="731520" y="4663440"/>
+            <a:off x="731520" y="4892040"/>
             <a:ext cx="10728655" cy="1371600"/>
           </a:xfrm>
           <a:prstGeom prst="roundRect">
@@ -10190,7 +10776,7 @@
           <a:solidFill>
             <a:srgbClr val="F8FAFC"/>
           </a:solidFill>
-          <a:ln w="12700">
+          <a:ln w="15240">
             <a:solidFill>
               <a:srgbClr val="CBD5E1"/>
             </a:solidFill>
@@ -10226,7 +10812,7 @@
         </p:nvSpPr>
         <p:spPr>
           <a:xfrm>
-            <a:off x="960120" y="4800600"/>
+            <a:off x="960120" y="5029200"/>
             <a:ext cx="10241280" cy="1097280"/>
           </a:xfrm>
           <a:prstGeom prst="rect">
@@ -10241,26 +10827,29 @@
           <a:lstStyle/>
           <a:p>
             <a:pPr>
-              <a:defRPr b="1" sz="1100">
+              <a:spcAft>
+                <a:spcPts val="400"/>
+              </a:spcAft>
+              <a:defRPr b="1" sz="1400">
                 <a:solidFill>
                   <a:srgbClr val="1E3A8A"/>
                 </a:solidFill>
               </a:defRPr>
             </a:pPr>
             <a:r>
-              <a:t>Why This Solves Real-World Engineering Education:</a:t>
-            </a:r>
-          </a:p>
-          <a:p>
-            <a:pPr>
-              <a:defRPr sz="950">
-                <a:solidFill>
-                  <a:srgbClr val="334155"/>
-                </a:solidFill>
-              </a:defRPr>
-            </a:pPr>
-            <a:r>
-              <a:t>In traditional platforms, learning is siloed inside single courses. In Career Graph, student progress is modeled around the developer, not isolated silos. Foundational skills are portable across any software engineering pathway.</a:t>
+              <a:t>Why Universal Skill Propagation Matters for Engineering:</a:t>
+            </a:r>
+          </a:p>
+          <a:p>
+            <a:pPr>
+              <a:defRPr sz="1250">
+                <a:solidFill>
+                  <a:srgbClr val="0F172A"/>
+                </a:solidFill>
+              </a:defRPr>
+            </a:pPr>
+            <a:r>
+              <a:t>In conventional learning platforms, student achievements are trapped inside single-course silos. In Career Graph, student progress is centered around the developer, not isolated courses. Foundational skills are portable across any engineering career pathway.</a:t>
             </a:r>
           </a:p>
         </p:txBody>
